--- a/新人90天教育訓練計畫.pptx
+++ b/新人90天教育訓練計畫.pptx
@@ -2273,7 +2273,7 @@
                 <a:ea typeface="Microsoft JhengHei" pitchFamily="34" charset="-122"/>
                 <a:cs typeface="Microsoft JhengHei" pitchFamily="34" charset="-120"/>
               </a:rPr>
-              <a:t>第 1 週測驗</a:t>
+              <a:t>型錄小組分享與導師面談</a:t>
             </a:r>
             <a:endParaRPr lang="en-US" sz="1100" dirty="0"/>
           </a:p>
@@ -2633,7 +2633,7 @@
                 <a:ea typeface="Microsoft JhengHei" pitchFamily="34" charset="-122"/>
                 <a:cs typeface="Microsoft JhengHei" pitchFamily="34" charset="-120"/>
               </a:rPr>
-              <a:t>Day 30 產品知識筆試</a:t>
+              <a:t>Day 30 完成部門輪調</a:t>
             </a:r>
             <a:endParaRPr lang="en-US" sz="1100" dirty="0"/>
           </a:p>
@@ -2993,7 +2993,7 @@
                 <a:ea typeface="Microsoft JhengHei" pitchFamily="34" charset="-122"/>
                 <a:cs typeface="Microsoft JhengHei" pitchFamily="34" charset="-120"/>
               </a:rPr>
-              <a:t>Day 60 實作考核、Day 90 結訓發表</a:t>
+              <a:t>Day 90 結訓成果分享</a:t>
             </a:r>
             <a:endParaRPr lang="en-US" sz="1100" dirty="0"/>
           </a:p>
@@ -3172,7 +3172,7 @@
                 <a:ea typeface="Microsoft JhengHei" pitchFamily="34" charset="-122"/>
                 <a:cs typeface="Microsoft JhengHei" pitchFamily="34" charset="-120"/>
               </a:rPr>
-              <a:t>產品知識筆試</a:t>
+              <a:t>完成部門輪調</a:t>
             </a:r>
             <a:endParaRPr lang="en-US" sz="1050" dirty="0"/>
           </a:p>
@@ -3250,7 +3250,7 @@
                 <a:ea typeface="Microsoft JhengHei" pitchFamily="34" charset="-122"/>
                 <a:cs typeface="Microsoft JhengHei" pitchFamily="34" charset="-120"/>
               </a:rPr>
-              <a:t>實作演練考核</a:t>
+              <a:t>完成隨訪／保養實作</a:t>
             </a:r>
             <a:endParaRPr lang="en-US" sz="1050" dirty="0"/>
           </a:p>
@@ -3328,7 +3328,7 @@
                 <a:ea typeface="Microsoft JhengHei" pitchFamily="34" charset="-122"/>
                 <a:cs typeface="Microsoft JhengHei" pitchFamily="34" charset="-120"/>
               </a:rPr>
-              <a:t>結訓發表</a:t>
+              <a:t>結訓成果分享</a:t>
             </a:r>
             <a:endParaRPr lang="en-US" sz="1050" dirty="0"/>
           </a:p>
@@ -4427,7 +4427,7 @@
                           <a:ea typeface="Microsoft JhengHei" pitchFamily="34" charset="-122"/>
                           <a:cs typeface="Microsoft JhengHei" pitchFamily="34" charset="-120"/>
                         </a:rPr>
-                        <a:t>第 1 週測驗 ・ 導師面談 ・ 分流說明</a:t>
+                        <a:t>導師面談 ・ 分流說明</a:t>
                       </a:r>
                       <a:endParaRPr lang="en-US" sz="1150" dirty="0">
                         <a:latin typeface="Microsoft JhengHei" charset="0"/>
@@ -6060,7 +6060,7 @@
                           <a:ea typeface="Microsoft JhengHei" pitchFamily="34" charset="-122"/>
                           <a:cs typeface="Microsoft JhengHei" pitchFamily="34" charset="-120"/>
                         </a:rPr>
-                        <a:t>市場與客戶分析、CRM ・ Day 30 筆試</a:t>
+                        <a:t>市場與客戶分析、CRM 系統</a:t>
                       </a:r>
                       <a:endParaRPr lang="en-US" sz="1050" dirty="0">
                         <a:latin typeface="Microsoft JhengHei" charset="0"/>
@@ -6128,7 +6128,7 @@
                           <a:ea typeface="Microsoft JhengHei" pitchFamily="34" charset="-122"/>
                           <a:cs typeface="Microsoft JhengHei" pitchFamily="34" charset="-120"/>
                         </a:rPr>
-                        <a:t>Brother C00／Okuma OSP 控制器 ・ Day 30 筆試</a:t>
+                        <a:t>Brother C00／Okuma OSP 控制器操作</a:t>
                       </a:r>
                       <a:endParaRPr lang="en-US" sz="1050" dirty="0">
                         <a:latin typeface="Microsoft JhengHei" charset="0"/>
@@ -6882,7 +6882,7 @@
                           <a:ea typeface="Microsoft JhengHei" pitchFamily="34" charset="-122"/>
                           <a:cs typeface="Microsoft JhengHei" pitchFamily="34" charset="-120"/>
                         </a:rPr>
-                        <a:t>隨訪客戶 ②（射出機）・ Day 60 角色扮演考核</a:t>
+                        <a:t>隨訪客戶 ②（射出機客戶）</a:t>
                       </a:r>
                       <a:endParaRPr lang="en-US" sz="1050" dirty="0">
                         <a:latin typeface="Microsoft JhengHei" charset="0"/>
@@ -6950,7 +6950,7 @@
                           <a:ea typeface="Microsoft JhengHei" pitchFamily="34" charset="-122"/>
                           <a:cs typeface="Microsoft JhengHei" pitchFamily="34" charset="-120"/>
                         </a:rPr>
-                        <a:t>保養實作 ②（射出機）・ Day 60 實作考核</a:t>
+                        <a:t>保養實作 ②（射出機保養）</a:t>
                       </a:r>
                       <a:endParaRPr lang="en-US" sz="1050" dirty="0">
                         <a:latin typeface="Microsoft JhengHei" charset="0"/>
@@ -7978,7 +7978,7 @@
                           <a:ea typeface="Microsoft JhengHei" pitchFamily="34" charset="-122"/>
                           <a:cs typeface="Microsoft JhengHei" pitchFamily="34" charset="-120"/>
                         </a:rPr>
-                        <a:t>成果簡報、商機盤點 ・ Day 90 結訓考核</a:t>
+                        <a:t>成果簡報、商機盤點 ・ 主管面談</a:t>
                       </a:r>
                       <a:endParaRPr lang="en-US" sz="1050" dirty="0">
                         <a:latin typeface="Microsoft JhengHei" charset="0"/>
@@ -8046,7 +8046,7 @@
                           <a:ea typeface="Microsoft JhengHei" pitchFamily="34" charset="-122"/>
                           <a:cs typeface="Microsoft JhengHei" pitchFamily="34" charset="-120"/>
                         </a:rPr>
-                        <a:t>案例分享、實機考核 ・ Day 90 結訓考核</a:t>
+                        <a:t>案例分享 ・ 主管面談</a:t>
                       </a:r>
                       <a:endParaRPr lang="en-US" sz="1050" dirty="0">
                         <a:latin typeface="Microsoft JhengHei" charset="0"/>
@@ -13909,7 +13909,7 @@
                 <a:ea typeface="Microsoft JhengHei" pitchFamily="34" charset="-122"/>
                 <a:cs typeface="Microsoft JhengHei" pitchFamily="34" charset="-120"/>
               </a:rPr>
-              <a:t>學習護照（每人一本，集滿 10 章結訓）</a:t>
+              <a:t>學習護照（每人一本，集滿 8 章結訓）</a:t>
             </a:r>
             <a:endParaRPr lang="en-US" sz="2800" dirty="0"/>
           </a:p>
@@ -14083,7 +14083,7 @@
                 <a:ea typeface="Microsoft JhengHei" pitchFamily="34" charset="-122"/>
                 <a:cs typeface="Microsoft JhengHei" pitchFamily="34" charset="-120"/>
               </a:rPr>
-              <a:t>業務組  ・  10 章</a:t>
+              <a:t>業務組  ・  8 章</a:t>
             </a:r>
             <a:endParaRPr lang="en-US" sz="1400" dirty="0"/>
           </a:p>
@@ -14214,7 +14214,7 @@
         </p:nvSpPr>
         <p:spPr>
           <a:xfrm>
-            <a:off x="868680" y="2249424"/>
+            <a:off x="868680" y="2322576"/>
             <a:ext cx="274320" cy="274320"/>
           </a:xfrm>
           <a:prstGeom prst="ellipse">
@@ -14239,7 +14239,7 @@
         </p:nvSpPr>
         <p:spPr>
           <a:xfrm>
-            <a:off x="868680" y="2249424"/>
+            <a:off x="868680" y="2322576"/>
             <a:ext cx="274320" cy="274320"/>
           </a:xfrm>
           <a:prstGeom prst="rect">
@@ -14278,7 +14278,7 @@
         </p:nvSpPr>
         <p:spPr>
           <a:xfrm>
-            <a:off x="1371600" y="2212848"/>
+            <a:off x="1371600" y="2286000"/>
             <a:ext cx="2651760" cy="347472"/>
           </a:xfrm>
           <a:prstGeom prst="rect">
@@ -14317,7 +14317,7 @@
         </p:nvSpPr>
         <p:spPr>
           <a:xfrm>
-            <a:off x="4023360" y="2212848"/>
+            <a:off x="4023360" y="2286000"/>
             <a:ext cx="914400" cy="347472"/>
           </a:xfrm>
           <a:prstGeom prst="rect">
@@ -14356,7 +14356,7 @@
         </p:nvSpPr>
         <p:spPr>
           <a:xfrm>
-            <a:off x="4892040" y="2487168"/>
+            <a:off x="4892040" y="2560320"/>
             <a:ext cx="914400" cy="0"/>
           </a:xfrm>
           <a:prstGeom prst="line">
@@ -14379,7 +14379,7 @@
         </p:nvSpPr>
         <p:spPr>
           <a:xfrm>
-            <a:off x="868680" y="2587752"/>
+            <a:off x="868680" y="2734056"/>
             <a:ext cx="274320" cy="274320"/>
           </a:xfrm>
           <a:prstGeom prst="ellipse">
@@ -14404,7 +14404,7 @@
         </p:nvSpPr>
         <p:spPr>
           <a:xfrm>
-            <a:off x="868680" y="2587752"/>
+            <a:off x="868680" y="2734056"/>
             <a:ext cx="274320" cy="274320"/>
           </a:xfrm>
           <a:prstGeom prst="rect">
@@ -14443,7 +14443,7 @@
         </p:nvSpPr>
         <p:spPr>
           <a:xfrm>
-            <a:off x="1371600" y="2551176"/>
+            <a:off x="1371600" y="2697480"/>
             <a:ext cx="2651760" cy="347472"/>
           </a:xfrm>
           <a:prstGeom prst="rect">
@@ -14482,7 +14482,7 @@
         </p:nvSpPr>
         <p:spPr>
           <a:xfrm>
-            <a:off x="4023360" y="2551176"/>
+            <a:off x="4023360" y="2697480"/>
             <a:ext cx="914400" cy="347472"/>
           </a:xfrm>
           <a:prstGeom prst="rect">
@@ -14521,7 +14521,7 @@
         </p:nvSpPr>
         <p:spPr>
           <a:xfrm>
-            <a:off x="4892040" y="2825496"/>
+            <a:off x="4892040" y="2971800"/>
             <a:ext cx="914400" cy="0"/>
           </a:xfrm>
           <a:prstGeom prst="line">
@@ -14544,7 +14544,7 @@
         </p:nvSpPr>
         <p:spPr>
           <a:xfrm>
-            <a:off x="868680" y="2926080"/>
+            <a:off x="868680" y="3145536"/>
             <a:ext cx="274320" cy="274320"/>
           </a:xfrm>
           <a:prstGeom prst="ellipse">
@@ -14569,7 +14569,7 @@
         </p:nvSpPr>
         <p:spPr>
           <a:xfrm>
-            <a:off x="868680" y="2926080"/>
+            <a:off x="868680" y="3145536"/>
             <a:ext cx="274320" cy="274320"/>
           </a:xfrm>
           <a:prstGeom prst="rect">
@@ -14608,7 +14608,7 @@
         </p:nvSpPr>
         <p:spPr>
           <a:xfrm>
-            <a:off x="1371600" y="2889504"/>
+            <a:off x="1371600" y="3108960"/>
             <a:ext cx="2651760" cy="347472"/>
           </a:xfrm>
           <a:prstGeom prst="rect">
@@ -14633,7 +14633,7 @@
                 <a:ea typeface="Microsoft JhengHei" pitchFamily="34" charset="-122"/>
                 <a:cs typeface="Microsoft JhengHei" pitchFamily="34" charset="-120"/>
               </a:rPr>
-              <a:t>第 1 週測驗合格</a:t>
+              <a:t>部門輪調 3 站完成</a:t>
             </a:r>
             <a:endParaRPr lang="en-US" sz="1050" dirty="0"/>
           </a:p>
@@ -14647,7 +14647,7 @@
         </p:nvSpPr>
         <p:spPr>
           <a:xfrm>
-            <a:off x="4023360" y="2889504"/>
+            <a:off x="4023360" y="3108960"/>
             <a:ext cx="914400" cy="347472"/>
           </a:xfrm>
           <a:prstGeom prst="rect">
@@ -14672,7 +14672,7 @@
                 <a:ea typeface="Microsoft JhengHei" pitchFamily="34" charset="-122"/>
                 <a:cs typeface="Microsoft JhengHei" pitchFamily="34" charset="-120"/>
               </a:rPr>
-              <a:t>導師</a:t>
+              <a:t>站別負責人</a:t>
             </a:r>
             <a:endParaRPr lang="en-US" sz="950" dirty="0"/>
           </a:p>
@@ -14686,7 +14686,7 @@
         </p:nvSpPr>
         <p:spPr>
           <a:xfrm>
-            <a:off x="4892040" y="3163824"/>
+            <a:off x="4892040" y="3383280"/>
             <a:ext cx="914400" cy="0"/>
           </a:xfrm>
           <a:prstGeom prst="line">
@@ -14709,7 +14709,7 @@
         </p:nvSpPr>
         <p:spPr>
           <a:xfrm>
-            <a:off x="868680" y="3264408"/>
+            <a:off x="868680" y="3557016"/>
             <a:ext cx="274320" cy="274320"/>
           </a:xfrm>
           <a:prstGeom prst="ellipse">
@@ -14734,7 +14734,7 @@
         </p:nvSpPr>
         <p:spPr>
           <a:xfrm>
-            <a:off x="868680" y="3264408"/>
+            <a:off x="868680" y="3557016"/>
             <a:ext cx="274320" cy="274320"/>
           </a:xfrm>
           <a:prstGeom prst="rect">
@@ -14773,7 +14773,7 @@
         </p:nvSpPr>
         <p:spPr>
           <a:xfrm>
-            <a:off x="1371600" y="3227832"/>
+            <a:off x="1371600" y="3520440"/>
             <a:ext cx="2651760" cy="347472"/>
           </a:xfrm>
           <a:prstGeom prst="rect">
@@ -14798,7 +14798,7 @@
                 <a:ea typeface="Microsoft JhengHei" pitchFamily="34" charset="-122"/>
                 <a:cs typeface="Microsoft JhengHei" pitchFamily="34" charset="-120"/>
               </a:rPr>
-              <a:t>部門輪調 3 站完成</a:t>
+              <a:t>隨訪客戶 6 家</a:t>
             </a:r>
             <a:endParaRPr lang="en-US" sz="1050" dirty="0"/>
           </a:p>
@@ -14812,7 +14812,7 @@
         </p:nvSpPr>
         <p:spPr>
           <a:xfrm>
-            <a:off x="4023360" y="3227832"/>
+            <a:off x="4023360" y="3520440"/>
             <a:ext cx="914400" cy="347472"/>
           </a:xfrm>
           <a:prstGeom prst="rect">
@@ -14837,7 +14837,7 @@
                 <a:ea typeface="Microsoft JhengHei" pitchFamily="34" charset="-122"/>
                 <a:cs typeface="Microsoft JhengHei" pitchFamily="34" charset="-120"/>
               </a:rPr>
-              <a:t>站別負責人</a:t>
+              <a:t>資深業務</a:t>
             </a:r>
             <a:endParaRPr lang="en-US" sz="950" dirty="0"/>
           </a:p>
@@ -14851,7 +14851,7 @@
         </p:nvSpPr>
         <p:spPr>
           <a:xfrm>
-            <a:off x="4892040" y="3502152"/>
+            <a:off x="4892040" y="3794760"/>
             <a:ext cx="914400" cy="0"/>
           </a:xfrm>
           <a:prstGeom prst="line">
@@ -14874,7 +14874,7 @@
         </p:nvSpPr>
         <p:spPr>
           <a:xfrm>
-            <a:off x="868680" y="3602736"/>
+            <a:off x="868680" y="3968496"/>
             <a:ext cx="274320" cy="274320"/>
           </a:xfrm>
           <a:prstGeom prst="ellipse">
@@ -14899,7 +14899,7 @@
         </p:nvSpPr>
         <p:spPr>
           <a:xfrm>
-            <a:off x="868680" y="3602736"/>
+            <a:off x="868680" y="3968496"/>
             <a:ext cx="274320" cy="274320"/>
           </a:xfrm>
           <a:prstGeom prst="rect">
@@ -14938,7 +14938,7 @@
         </p:nvSpPr>
         <p:spPr>
           <a:xfrm>
-            <a:off x="1371600" y="3566160"/>
+            <a:off x="1371600" y="3931920"/>
             <a:ext cx="2651760" cy="347472"/>
           </a:xfrm>
           <a:prstGeom prst="rect">
@@ -14963,7 +14963,7 @@
                 <a:ea typeface="Microsoft JhengHei" pitchFamily="34" charset="-122"/>
                 <a:cs typeface="Microsoft JhengHei" pitchFamily="34" charset="-120"/>
               </a:rPr>
-              <a:t>Day 30 產品筆試</a:t>
+              <a:t>模擬提案 1 份</a:t>
             </a:r>
             <a:endParaRPr lang="en-US" sz="1050" dirty="0"/>
           </a:p>
@@ -14977,7 +14977,7 @@
         </p:nvSpPr>
         <p:spPr>
           <a:xfrm>
-            <a:off x="4023360" y="3566160"/>
+            <a:off x="4023360" y="3931920"/>
             <a:ext cx="914400" cy="347472"/>
           </a:xfrm>
           <a:prstGeom prst="rect">
@@ -15002,7 +15002,7 @@
                 <a:ea typeface="Microsoft JhengHei" pitchFamily="34" charset="-122"/>
                 <a:cs typeface="Microsoft JhengHei" pitchFamily="34" charset="-120"/>
               </a:rPr>
-              <a:t>訓練負責人</a:t>
+              <a:t>業務主管</a:t>
             </a:r>
             <a:endParaRPr lang="en-US" sz="950" dirty="0"/>
           </a:p>
@@ -15016,7 +15016,7 @@
         </p:nvSpPr>
         <p:spPr>
           <a:xfrm>
-            <a:off x="4892040" y="3840480"/>
+            <a:off x="4892040" y="4206240"/>
             <a:ext cx="914400" cy="0"/>
           </a:xfrm>
           <a:prstGeom prst="line">
@@ -15039,7 +15039,7 @@
         </p:nvSpPr>
         <p:spPr>
           <a:xfrm>
-            <a:off x="868680" y="3941064"/>
+            <a:off x="868680" y="4379976"/>
             <a:ext cx="274320" cy="274320"/>
           </a:xfrm>
           <a:prstGeom prst="ellipse">
@@ -15064,7 +15064,7 @@
         </p:nvSpPr>
         <p:spPr>
           <a:xfrm>
-            <a:off x="868680" y="3941064"/>
+            <a:off x="868680" y="4379976"/>
             <a:ext cx="274320" cy="274320"/>
           </a:xfrm>
           <a:prstGeom prst="rect">
@@ -15103,7 +15103,7 @@
         </p:nvSpPr>
         <p:spPr>
           <a:xfrm>
-            <a:off x="1371600" y="3904488"/>
+            <a:off x="1371600" y="4343400"/>
             <a:ext cx="2651760" cy="347472"/>
           </a:xfrm>
           <a:prstGeom prst="rect">
@@ -15128,7 +15128,7 @@
                 <a:ea typeface="Microsoft JhengHei" pitchFamily="34" charset="-122"/>
                 <a:cs typeface="Microsoft JhengHei" pitchFamily="34" charset="-120"/>
               </a:rPr>
-              <a:t>隨訪客戶 6 家</a:t>
+              <a:t>原廠銷售課程</a:t>
             </a:r>
             <a:endParaRPr lang="en-US" sz="1050" dirty="0"/>
           </a:p>
@@ -15142,7 +15142,7 @@
         </p:nvSpPr>
         <p:spPr>
           <a:xfrm>
-            <a:off x="4023360" y="3904488"/>
+            <a:off x="4023360" y="4343400"/>
             <a:ext cx="914400" cy="347472"/>
           </a:xfrm>
           <a:prstGeom prst="rect">
@@ -15167,7 +15167,7 @@
                 <a:ea typeface="Microsoft JhengHei" pitchFamily="34" charset="-122"/>
                 <a:cs typeface="Microsoft JhengHei" pitchFamily="34" charset="-120"/>
               </a:rPr>
-              <a:t>資深業務</a:t>
+              <a:t>原廠講師</a:t>
             </a:r>
             <a:endParaRPr lang="en-US" sz="950" dirty="0"/>
           </a:p>
@@ -15181,7 +15181,7 @@
         </p:nvSpPr>
         <p:spPr>
           <a:xfrm>
-            <a:off x="4892040" y="4178808"/>
+            <a:off x="4892040" y="4617720"/>
             <a:ext cx="914400" cy="0"/>
           </a:xfrm>
           <a:prstGeom prst="line">
@@ -15204,7 +15204,7 @@
         </p:nvSpPr>
         <p:spPr>
           <a:xfrm>
-            <a:off x="868680" y="4279392"/>
+            <a:off x="868680" y="4791456"/>
             <a:ext cx="274320" cy="274320"/>
           </a:xfrm>
           <a:prstGeom prst="ellipse">
@@ -15229,7 +15229,7 @@
         </p:nvSpPr>
         <p:spPr>
           <a:xfrm>
-            <a:off x="868680" y="4279392"/>
+            <a:off x="868680" y="4791456"/>
             <a:ext cx="274320" cy="274320"/>
           </a:xfrm>
           <a:prstGeom prst="rect">
@@ -15268,7 +15268,7 @@
         </p:nvSpPr>
         <p:spPr>
           <a:xfrm>
-            <a:off x="1371600" y="4242816"/>
+            <a:off x="1371600" y="4754880"/>
             <a:ext cx="2651760" cy="347472"/>
           </a:xfrm>
           <a:prstGeom prst="rect">
@@ -15293,7 +15293,7 @@
                 <a:ea typeface="Microsoft JhengHei" pitchFamily="34" charset="-122"/>
                 <a:cs typeface="Microsoft JhengHei" pitchFamily="34" charset="-120"/>
               </a:rPr>
-              <a:t>Day 60 角色扮演考核</a:t>
+              <a:t>獨立拜訪 5 家 ＋ 正式提案 1 份</a:t>
             </a:r>
             <a:endParaRPr lang="en-US" sz="1050" dirty="0"/>
           </a:p>
@@ -15307,7 +15307,7 @@
         </p:nvSpPr>
         <p:spPr>
           <a:xfrm>
-            <a:off x="4023360" y="4242816"/>
+            <a:off x="4023360" y="4754880"/>
             <a:ext cx="914400" cy="347472"/>
           </a:xfrm>
           <a:prstGeom prst="rect">
@@ -15332,7 +15332,7 @@
                 <a:ea typeface="Microsoft JhengHei" pitchFamily="34" charset="-122"/>
                 <a:cs typeface="Microsoft JhengHei" pitchFamily="34" charset="-120"/>
               </a:rPr>
-              <a:t>訓練負責人</a:t>
+              <a:t>業務主管</a:t>
             </a:r>
             <a:endParaRPr lang="en-US" sz="950" dirty="0"/>
           </a:p>
@@ -15346,7 +15346,7 @@
         </p:nvSpPr>
         <p:spPr>
           <a:xfrm>
-            <a:off x="4892040" y="4517136"/>
+            <a:off x="4892040" y="5029200"/>
             <a:ext cx="914400" cy="0"/>
           </a:xfrm>
           <a:prstGeom prst="line">
@@ -15369,7 +15369,7 @@
         </p:nvSpPr>
         <p:spPr>
           <a:xfrm>
-            <a:off x="868680" y="4617720"/>
+            <a:off x="868680" y="5202936"/>
             <a:ext cx="274320" cy="274320"/>
           </a:xfrm>
           <a:prstGeom prst="ellipse">
@@ -15394,7 +15394,7 @@
         </p:nvSpPr>
         <p:spPr>
           <a:xfrm>
-            <a:off x="868680" y="4617720"/>
+            <a:off x="868680" y="5202936"/>
             <a:ext cx="274320" cy="274320"/>
           </a:xfrm>
           <a:prstGeom prst="rect">
@@ -15433,337 +15433,7 @@
         </p:nvSpPr>
         <p:spPr>
           <a:xfrm>
-            <a:off x="1371600" y="4581144"/>
-            <a:ext cx="2651760" cy="347472"/>
-          </a:xfrm>
-          <a:prstGeom prst="rect">
-            <a:avLst/>
-          </a:prstGeom>
-          <a:noFill/>
-          <a:ln/>
-        </p:spPr>
-        <p:txBody>
-          <a:bodyPr wrap="square" lIns="0" tIns="0" rIns="0" bIns="0" rtlCol="0" anchor="ctr"/>
-          <a:lstStyle/>
-          <a:p>
-            <a:pPr indent="0" marL="0">
-              <a:buNone/>
-            </a:pPr>
-            <a:r>
-              <a:rPr lang="en-US" sz="1050" b="1" dirty="0">
-                <a:solidFill>
-                  <a:srgbClr val="1F2933"/>
-                </a:solidFill>
-                <a:latin typeface="Microsoft JhengHei" pitchFamily="34" charset="0"/>
-                <a:ea typeface="Microsoft JhengHei" pitchFamily="34" charset="-122"/>
-                <a:cs typeface="Microsoft JhengHei" pitchFamily="34" charset="-120"/>
-              </a:rPr>
-              <a:t>原廠銷售課程</a:t>
-            </a:r>
-            <a:endParaRPr lang="en-US" sz="1050" dirty="0"/>
-          </a:p>
-        </p:txBody>
-      </p:sp>
-      <p:sp>
-        <p:nvSpPr>
-          <p:cNvPr id="51" name="Text 48"/>
-          <p:cNvSpPr txBox="1"/>
-          <p:nvPr/>
-        </p:nvSpPr>
-        <p:spPr>
-          <a:xfrm>
-            <a:off x="4023360" y="4581144"/>
-            <a:ext cx="914400" cy="347472"/>
-          </a:xfrm>
-          <a:prstGeom prst="rect">
-            <a:avLst/>
-          </a:prstGeom>
-          <a:noFill/>
-          <a:ln/>
-        </p:spPr>
-        <p:txBody>
-          <a:bodyPr wrap="square" lIns="0" tIns="0" rIns="0" bIns="0" rtlCol="0" anchor="ctr"/>
-          <a:lstStyle/>
-          <a:p>
-            <a:pPr indent="0" marL="0">
-              <a:buNone/>
-            </a:pPr>
-            <a:r>
-              <a:rPr lang="en-US" sz="950" dirty="0">
-                <a:solidFill>
-                  <a:srgbClr val="6B7785"/>
-                </a:solidFill>
-                <a:latin typeface="Microsoft JhengHei" pitchFamily="34" charset="0"/>
-                <a:ea typeface="Microsoft JhengHei" pitchFamily="34" charset="-122"/>
-                <a:cs typeface="Microsoft JhengHei" pitchFamily="34" charset="-120"/>
-              </a:rPr>
-              <a:t>原廠講師</a:t>
-            </a:r>
-            <a:endParaRPr lang="en-US" sz="950" dirty="0"/>
-          </a:p>
-        </p:txBody>
-      </p:sp>
-      <p:sp>
-        <p:nvSpPr>
-          <p:cNvPr id="52" name="Shape 49"/>
-          <p:cNvSpPr/>
-          <p:nvPr/>
-        </p:nvSpPr>
-        <p:spPr>
-          <a:xfrm>
-            <a:off x="4892040" y="4855464"/>
-            <a:ext cx="914400" cy="0"/>
-          </a:xfrm>
-          <a:prstGeom prst="line">
-            <a:avLst/>
-          </a:prstGeom>
-          <a:noFill/>
-          <a:ln w="12700">
-            <a:solidFill>
-              <a:srgbClr val="E1E6EC"/>
-            </a:solidFill>
-            <a:prstDash val="solid"/>
-          </a:ln>
-        </p:spPr>
-      </p:sp>
-      <p:sp>
-        <p:nvSpPr>
-          <p:cNvPr id="53" name="Shape 50"/>
-          <p:cNvSpPr/>
-          <p:nvPr/>
-        </p:nvSpPr>
-        <p:spPr>
-          <a:xfrm>
-            <a:off x="868680" y="4956048"/>
-            <a:ext cx="274320" cy="274320"/>
-          </a:xfrm>
-          <a:prstGeom prst="ellipse">
-            <a:avLst/>
-          </a:prstGeom>
-          <a:solidFill>
-            <a:srgbClr val="FFFFFF"/>
-          </a:solidFill>
-          <a:ln w="15875">
-            <a:solidFill>
-              <a:srgbClr val="2E5C8A"/>
-            </a:solidFill>
-            <a:prstDash val="dash"/>
-          </a:ln>
-        </p:spPr>
-      </p:sp>
-      <p:sp>
-        <p:nvSpPr>
-          <p:cNvPr id="54" name="Text 51"/>
-          <p:cNvSpPr txBox="1"/>
-          <p:nvPr/>
-        </p:nvSpPr>
-        <p:spPr>
-          <a:xfrm>
-            <a:off x="868680" y="4956048"/>
-            <a:ext cx="274320" cy="274320"/>
-          </a:xfrm>
-          <a:prstGeom prst="rect">
-            <a:avLst/>
-          </a:prstGeom>
-          <a:noFill/>
-          <a:ln/>
-        </p:spPr>
-        <p:txBody>
-          <a:bodyPr wrap="square" lIns="0" tIns="0" rIns="0" bIns="0" rtlCol="0" anchor="ctr"/>
-          <a:lstStyle/>
-          <a:p>
-            <a:pPr algn="ctr" indent="0" marL="0">
-              <a:buNone/>
-            </a:pPr>
-            <a:r>
-              <a:rPr lang="en-US" sz="850" b="1" dirty="0">
-                <a:solidFill>
-                  <a:srgbClr val="2E5C8A"/>
-                </a:solidFill>
-                <a:latin typeface="Arial" pitchFamily="34" charset="0"/>
-                <a:ea typeface="Arial" pitchFamily="34" charset="-122"/>
-                <a:cs typeface="Arial" pitchFamily="34" charset="-120"/>
-              </a:rPr>
-              <a:t>9</a:t>
-            </a:r>
-            <a:endParaRPr lang="en-US" sz="850" dirty="0"/>
-          </a:p>
-        </p:txBody>
-      </p:sp>
-      <p:sp>
-        <p:nvSpPr>
-          <p:cNvPr id="55" name="Text 52"/>
-          <p:cNvSpPr txBox="1"/>
-          <p:nvPr/>
-        </p:nvSpPr>
-        <p:spPr>
-          <a:xfrm>
-            <a:off x="1371600" y="4919472"/>
-            <a:ext cx="2651760" cy="347472"/>
-          </a:xfrm>
-          <a:prstGeom prst="rect">
-            <a:avLst/>
-          </a:prstGeom>
-          <a:noFill/>
-          <a:ln/>
-        </p:spPr>
-        <p:txBody>
-          <a:bodyPr wrap="square" lIns="0" tIns="0" rIns="0" bIns="0" rtlCol="0" anchor="ctr"/>
-          <a:lstStyle/>
-          <a:p>
-            <a:pPr indent="0" marL="0">
-              <a:buNone/>
-            </a:pPr>
-            <a:r>
-              <a:rPr lang="en-US" sz="1050" b="1" dirty="0">
-                <a:solidFill>
-                  <a:srgbClr val="1F2933"/>
-                </a:solidFill>
-                <a:latin typeface="Microsoft JhengHei" pitchFamily="34" charset="0"/>
-                <a:ea typeface="Microsoft JhengHei" pitchFamily="34" charset="-122"/>
-                <a:cs typeface="Microsoft JhengHei" pitchFamily="34" charset="-120"/>
-              </a:rPr>
-              <a:t>獨立拜訪 5 家 ＋ 正式提案 1 份</a:t>
-            </a:r>
-            <a:endParaRPr lang="en-US" sz="1050" dirty="0"/>
-          </a:p>
-        </p:txBody>
-      </p:sp>
-      <p:sp>
-        <p:nvSpPr>
-          <p:cNvPr id="56" name="Text 53"/>
-          <p:cNvSpPr txBox="1"/>
-          <p:nvPr/>
-        </p:nvSpPr>
-        <p:spPr>
-          <a:xfrm>
-            <a:off x="4023360" y="4919472"/>
-            <a:ext cx="914400" cy="347472"/>
-          </a:xfrm>
-          <a:prstGeom prst="rect">
-            <a:avLst/>
-          </a:prstGeom>
-          <a:noFill/>
-          <a:ln/>
-        </p:spPr>
-        <p:txBody>
-          <a:bodyPr wrap="square" lIns="0" tIns="0" rIns="0" bIns="0" rtlCol="0" anchor="ctr"/>
-          <a:lstStyle/>
-          <a:p>
-            <a:pPr indent="0" marL="0">
-              <a:buNone/>
-            </a:pPr>
-            <a:r>
-              <a:rPr lang="en-US" sz="950" dirty="0">
-                <a:solidFill>
-                  <a:srgbClr val="6B7785"/>
-                </a:solidFill>
-                <a:latin typeface="Microsoft JhengHei" pitchFamily="34" charset="0"/>
-                <a:ea typeface="Microsoft JhengHei" pitchFamily="34" charset="-122"/>
-                <a:cs typeface="Microsoft JhengHei" pitchFamily="34" charset="-120"/>
-              </a:rPr>
-              <a:t>業務主管</a:t>
-            </a:r>
-            <a:endParaRPr lang="en-US" sz="950" dirty="0"/>
-          </a:p>
-        </p:txBody>
-      </p:sp>
-      <p:sp>
-        <p:nvSpPr>
-          <p:cNvPr id="57" name="Shape 54"/>
-          <p:cNvSpPr/>
-          <p:nvPr/>
-        </p:nvSpPr>
-        <p:spPr>
-          <a:xfrm>
-            <a:off x="4892040" y="5193792"/>
-            <a:ext cx="914400" cy="0"/>
-          </a:xfrm>
-          <a:prstGeom prst="line">
-            <a:avLst/>
-          </a:prstGeom>
-          <a:noFill/>
-          <a:ln w="12700">
-            <a:solidFill>
-              <a:srgbClr val="E1E6EC"/>
-            </a:solidFill>
-            <a:prstDash val="solid"/>
-          </a:ln>
-        </p:spPr>
-      </p:sp>
-      <p:sp>
-        <p:nvSpPr>
-          <p:cNvPr id="58" name="Shape 55"/>
-          <p:cNvSpPr/>
-          <p:nvPr/>
-        </p:nvSpPr>
-        <p:spPr>
-          <a:xfrm>
-            <a:off x="868680" y="5294376"/>
-            <a:ext cx="274320" cy="274320"/>
-          </a:xfrm>
-          <a:prstGeom prst="ellipse">
-            <a:avLst/>
-          </a:prstGeom>
-          <a:solidFill>
-            <a:srgbClr val="FFFFFF"/>
-          </a:solidFill>
-          <a:ln w="15875">
-            <a:solidFill>
-              <a:srgbClr val="2E5C8A"/>
-            </a:solidFill>
-            <a:prstDash val="dash"/>
-          </a:ln>
-        </p:spPr>
-      </p:sp>
-      <p:sp>
-        <p:nvSpPr>
-          <p:cNvPr id="59" name="Text 56"/>
-          <p:cNvSpPr txBox="1"/>
-          <p:nvPr/>
-        </p:nvSpPr>
-        <p:spPr>
-          <a:xfrm>
-            <a:off x="868680" y="5294376"/>
-            <a:ext cx="274320" cy="274320"/>
-          </a:xfrm>
-          <a:prstGeom prst="rect">
-            <a:avLst/>
-          </a:prstGeom>
-          <a:noFill/>
-          <a:ln/>
-        </p:spPr>
-        <p:txBody>
-          <a:bodyPr wrap="square" lIns="0" tIns="0" rIns="0" bIns="0" rtlCol="0" anchor="ctr"/>
-          <a:lstStyle/>
-          <a:p>
-            <a:pPr algn="ctr" indent="0" marL="0">
-              <a:buNone/>
-            </a:pPr>
-            <a:r>
-              <a:rPr lang="en-US" sz="850" b="1" dirty="0">
-                <a:solidFill>
-                  <a:srgbClr val="2E5C8A"/>
-                </a:solidFill>
-                <a:latin typeface="Arial" pitchFamily="34" charset="0"/>
-                <a:ea typeface="Arial" pitchFamily="34" charset="-122"/>
-                <a:cs typeface="Arial" pitchFamily="34" charset="-120"/>
-              </a:rPr>
-              <a:t>10</a:t>
-            </a:r>
-            <a:endParaRPr lang="en-US" sz="850" dirty="0"/>
-          </a:p>
-        </p:txBody>
-      </p:sp>
-      <p:sp>
-        <p:nvSpPr>
-          <p:cNvPr id="60" name="Text 57"/>
-          <p:cNvSpPr txBox="1"/>
-          <p:nvPr/>
-        </p:nvSpPr>
-        <p:spPr>
-          <a:xfrm>
-            <a:off x="1371600" y="5257800"/>
+            <a:off x="1371600" y="5166360"/>
             <a:ext cx="2651760" cy="347472"/>
           </a:xfrm>
           <a:prstGeom prst="rect">
@@ -15796,13 +15466,13 @@
       </p:sp>
       <p:sp>
         <p:nvSpPr>
-          <p:cNvPr id="61" name="Text 58"/>
+          <p:cNvPr id="51" name="Text 48"/>
           <p:cNvSpPr txBox="1"/>
           <p:nvPr/>
         </p:nvSpPr>
         <p:spPr>
           <a:xfrm>
-            <a:off x="4023360" y="5257800"/>
+            <a:off x="4023360" y="5166360"/>
             <a:ext cx="914400" cy="347472"/>
           </a:xfrm>
           <a:prstGeom prst="rect">
@@ -15835,13 +15505,13 @@
       </p:sp>
       <p:sp>
         <p:nvSpPr>
-          <p:cNvPr id="62" name="Shape 59"/>
+          <p:cNvPr id="52" name="Shape 49"/>
           <p:cNvSpPr/>
           <p:nvPr/>
         </p:nvSpPr>
         <p:spPr>
           <a:xfrm>
-            <a:off x="4892040" y="5532120"/>
+            <a:off x="4892040" y="5440680"/>
             <a:ext cx="914400" cy="0"/>
           </a:xfrm>
           <a:prstGeom prst="line">
@@ -15858,7 +15528,7 @@
       </p:sp>
       <p:sp>
         <p:nvSpPr>
-          <p:cNvPr id="63" name="Shape 60"/>
+          <p:cNvPr id="53" name="Shape 50"/>
           <p:cNvSpPr/>
           <p:nvPr/>
         </p:nvSpPr>
@@ -15892,7 +15562,7 @@
       </p:sp>
       <p:sp>
         <p:nvSpPr>
-          <p:cNvPr id="64" name="Shape 61"/>
+          <p:cNvPr id="54" name="Shape 51"/>
           <p:cNvSpPr/>
           <p:nvPr/>
         </p:nvSpPr>
@@ -15919,7 +15589,7 @@
       </p:sp>
       <p:sp>
         <p:nvSpPr>
-          <p:cNvPr id="65" name="Shape 62"/>
+          <p:cNvPr id="55" name="Shape 52"/>
           <p:cNvSpPr/>
           <p:nvPr/>
         </p:nvSpPr>
@@ -15944,7 +15614,7 @@
       </p:sp>
       <p:sp>
         <p:nvSpPr>
-          <p:cNvPr id="66" name="Shape 63"/>
+          <p:cNvPr id="56" name="Shape 53"/>
           <p:cNvSpPr/>
           <p:nvPr/>
         </p:nvSpPr>
@@ -15969,7 +15639,7 @@
       </p:sp>
       <p:pic>
         <p:nvPicPr>
-          <p:cNvPr id="67" name="Image 1" descr="preencoded.png">    </p:cNvPr>
+          <p:cNvPr id="57" name="Image 1" descr="preencoded.png">    </p:cNvPr>
           <p:cNvPicPr>
             <a:picLocks noChangeAspect="1"/>
           </p:cNvPicPr>
@@ -15993,7 +15663,7 @@
       </p:pic>
       <p:sp>
         <p:nvSpPr>
-          <p:cNvPr id="68" name="Text 64"/>
+          <p:cNvPr id="58" name="Text 54"/>
           <p:cNvSpPr txBox="1"/>
           <p:nvPr/>
         </p:nvSpPr>
@@ -16024,7 +15694,7 @@
                 <a:ea typeface="Microsoft JhengHei" pitchFamily="34" charset="-122"/>
                 <a:cs typeface="Microsoft JhengHei" pitchFamily="34" charset="-120"/>
               </a:rPr>
-              <a:t>技術組  ・  10 章</a:t>
+              <a:t>技術組  ・  8 章</a:t>
             </a:r>
             <a:endParaRPr lang="en-US" sz="1400" dirty="0"/>
           </a:p>
@@ -16032,7 +15702,7 @@
       </p:sp>
       <p:sp>
         <p:nvSpPr>
-          <p:cNvPr id="69" name="Text 65"/>
+          <p:cNvPr id="59" name="Text 55"/>
           <p:cNvSpPr txBox="1"/>
           <p:nvPr/>
         </p:nvSpPr>
@@ -16071,7 +15741,7 @@
       </p:sp>
       <p:sp>
         <p:nvSpPr>
-          <p:cNvPr id="70" name="Text 66"/>
+          <p:cNvPr id="60" name="Text 56"/>
           <p:cNvSpPr txBox="1"/>
           <p:nvPr/>
         </p:nvSpPr>
@@ -16110,7 +15780,7 @@
       </p:sp>
       <p:sp>
         <p:nvSpPr>
-          <p:cNvPr id="71" name="Text 67"/>
+          <p:cNvPr id="61" name="Text 57"/>
           <p:cNvSpPr txBox="1"/>
           <p:nvPr/>
         </p:nvSpPr>
@@ -16149,13 +15819,13 @@
       </p:sp>
       <p:sp>
         <p:nvSpPr>
-          <p:cNvPr id="72" name="Shape 68"/>
+          <p:cNvPr id="62" name="Shape 58"/>
           <p:cNvSpPr/>
           <p:nvPr/>
         </p:nvSpPr>
         <p:spPr>
           <a:xfrm>
-            <a:off x="6446520" y="2249424"/>
+            <a:off x="6446520" y="2322576"/>
             <a:ext cx="274320" cy="274320"/>
           </a:xfrm>
           <a:prstGeom prst="ellipse">
@@ -16174,13 +15844,13 @@
       </p:sp>
       <p:sp>
         <p:nvSpPr>
-          <p:cNvPr id="73" name="Text 69"/>
+          <p:cNvPr id="63" name="Text 59"/>
           <p:cNvSpPr txBox="1"/>
           <p:nvPr/>
         </p:nvSpPr>
         <p:spPr>
           <a:xfrm>
-            <a:off x="6446520" y="2249424"/>
+            <a:off x="6446520" y="2322576"/>
             <a:ext cx="274320" cy="274320"/>
           </a:xfrm>
           <a:prstGeom prst="rect">
@@ -16213,13 +15883,13 @@
       </p:sp>
       <p:sp>
         <p:nvSpPr>
-          <p:cNvPr id="74" name="Text 70"/>
+          <p:cNvPr id="64" name="Text 60"/>
           <p:cNvSpPr txBox="1"/>
           <p:nvPr/>
         </p:nvSpPr>
         <p:spPr>
           <a:xfrm>
-            <a:off x="6949440" y="2212848"/>
+            <a:off x="6949440" y="2286000"/>
             <a:ext cx="2651760" cy="347472"/>
           </a:xfrm>
           <a:prstGeom prst="rect">
@@ -16252,13 +15922,13 @@
       </p:sp>
       <p:sp>
         <p:nvSpPr>
-          <p:cNvPr id="75" name="Text 71"/>
+          <p:cNvPr id="65" name="Text 61"/>
           <p:cNvSpPr txBox="1"/>
           <p:nvPr/>
         </p:nvSpPr>
         <p:spPr>
           <a:xfrm>
-            <a:off x="9601200" y="2212848"/>
+            <a:off x="9601200" y="2286000"/>
             <a:ext cx="914400" cy="347472"/>
           </a:xfrm>
           <a:prstGeom prst="rect">
@@ -16291,13 +15961,13 @@
       </p:sp>
       <p:sp>
         <p:nvSpPr>
-          <p:cNvPr id="76" name="Shape 72"/>
+          <p:cNvPr id="66" name="Shape 62"/>
           <p:cNvSpPr/>
           <p:nvPr/>
         </p:nvSpPr>
         <p:spPr>
           <a:xfrm>
-            <a:off x="10469880" y="2487168"/>
+            <a:off x="10469880" y="2560320"/>
             <a:ext cx="914400" cy="0"/>
           </a:xfrm>
           <a:prstGeom prst="line">
@@ -16314,13 +15984,13 @@
       </p:sp>
       <p:sp>
         <p:nvSpPr>
-          <p:cNvPr id="77" name="Shape 73"/>
+          <p:cNvPr id="67" name="Shape 63"/>
           <p:cNvSpPr/>
           <p:nvPr/>
         </p:nvSpPr>
         <p:spPr>
           <a:xfrm>
-            <a:off x="6446520" y="2587752"/>
+            <a:off x="6446520" y="2734056"/>
             <a:ext cx="274320" cy="274320"/>
           </a:xfrm>
           <a:prstGeom prst="ellipse">
@@ -16339,13 +16009,13 @@
       </p:sp>
       <p:sp>
         <p:nvSpPr>
-          <p:cNvPr id="78" name="Text 74"/>
+          <p:cNvPr id="68" name="Text 64"/>
           <p:cNvSpPr txBox="1"/>
           <p:nvPr/>
         </p:nvSpPr>
         <p:spPr>
           <a:xfrm>
-            <a:off x="6446520" y="2587752"/>
+            <a:off x="6446520" y="2734056"/>
             <a:ext cx="274320" cy="274320"/>
           </a:xfrm>
           <a:prstGeom prst="rect">
@@ -16378,13 +16048,13 @@
       </p:sp>
       <p:sp>
         <p:nvSpPr>
-          <p:cNvPr id="79" name="Text 75"/>
+          <p:cNvPr id="69" name="Text 65"/>
           <p:cNvSpPr txBox="1"/>
           <p:nvPr/>
         </p:nvSpPr>
         <p:spPr>
           <a:xfrm>
-            <a:off x="6949440" y="2551176"/>
+            <a:off x="6949440" y="2697480"/>
             <a:ext cx="2651760" cy="347472"/>
           </a:xfrm>
           <a:prstGeom prst="rect">
@@ -16417,13 +16087,13 @@
       </p:sp>
       <p:sp>
         <p:nvSpPr>
-          <p:cNvPr id="80" name="Text 76"/>
+          <p:cNvPr id="70" name="Text 66"/>
           <p:cNvSpPr txBox="1"/>
           <p:nvPr/>
         </p:nvSpPr>
         <p:spPr>
           <a:xfrm>
-            <a:off x="9601200" y="2551176"/>
+            <a:off x="9601200" y="2697480"/>
             <a:ext cx="914400" cy="347472"/>
           </a:xfrm>
           <a:prstGeom prst="rect">
@@ -16456,13 +16126,13 @@
       </p:sp>
       <p:sp>
         <p:nvSpPr>
-          <p:cNvPr id="81" name="Shape 77"/>
+          <p:cNvPr id="71" name="Shape 67"/>
           <p:cNvSpPr/>
           <p:nvPr/>
         </p:nvSpPr>
         <p:spPr>
           <a:xfrm>
-            <a:off x="10469880" y="2825496"/>
+            <a:off x="10469880" y="2971800"/>
             <a:ext cx="914400" cy="0"/>
           </a:xfrm>
           <a:prstGeom prst="line">
@@ -16479,13 +16149,13 @@
       </p:sp>
       <p:sp>
         <p:nvSpPr>
-          <p:cNvPr id="82" name="Shape 78"/>
+          <p:cNvPr id="72" name="Shape 68"/>
           <p:cNvSpPr/>
           <p:nvPr/>
         </p:nvSpPr>
         <p:spPr>
           <a:xfrm>
-            <a:off x="6446520" y="2926080"/>
+            <a:off x="6446520" y="3145536"/>
             <a:ext cx="274320" cy="274320"/>
           </a:xfrm>
           <a:prstGeom prst="ellipse">
@@ -16504,13 +16174,13 @@
       </p:sp>
       <p:sp>
         <p:nvSpPr>
-          <p:cNvPr id="83" name="Text 79"/>
+          <p:cNvPr id="73" name="Text 69"/>
           <p:cNvSpPr txBox="1"/>
           <p:nvPr/>
         </p:nvSpPr>
         <p:spPr>
           <a:xfrm>
-            <a:off x="6446520" y="2926080"/>
+            <a:off x="6446520" y="3145536"/>
             <a:ext cx="274320" cy="274320"/>
           </a:xfrm>
           <a:prstGeom prst="rect">
@@ -16543,13 +16213,13 @@
       </p:sp>
       <p:sp>
         <p:nvSpPr>
-          <p:cNvPr id="84" name="Text 80"/>
+          <p:cNvPr id="74" name="Text 70"/>
           <p:cNvSpPr txBox="1"/>
           <p:nvPr/>
         </p:nvSpPr>
         <p:spPr>
           <a:xfrm>
-            <a:off x="6949440" y="2889504"/>
+            <a:off x="6949440" y="3108960"/>
             <a:ext cx="2651760" cy="347472"/>
           </a:xfrm>
           <a:prstGeom prst="rect">
@@ -16574,7 +16244,7 @@
                 <a:ea typeface="Microsoft JhengHei" pitchFamily="34" charset="-122"/>
                 <a:cs typeface="Microsoft JhengHei" pitchFamily="34" charset="-120"/>
               </a:rPr>
-              <a:t>第 1 週測驗合格</a:t>
+              <a:t>部門輪調 3 站完成</a:t>
             </a:r>
             <a:endParaRPr lang="en-US" sz="1050" dirty="0"/>
           </a:p>
@@ -16582,13 +16252,13 @@
       </p:sp>
       <p:sp>
         <p:nvSpPr>
-          <p:cNvPr id="85" name="Text 81"/>
+          <p:cNvPr id="75" name="Text 71"/>
           <p:cNvSpPr txBox="1"/>
           <p:nvPr/>
         </p:nvSpPr>
         <p:spPr>
           <a:xfrm>
-            <a:off x="9601200" y="2889504"/>
+            <a:off x="9601200" y="3108960"/>
             <a:ext cx="914400" cy="347472"/>
           </a:xfrm>
           <a:prstGeom prst="rect">
@@ -16613,7 +16283,7 @@
                 <a:ea typeface="Microsoft JhengHei" pitchFamily="34" charset="-122"/>
                 <a:cs typeface="Microsoft JhengHei" pitchFamily="34" charset="-120"/>
               </a:rPr>
-              <a:t>導師</a:t>
+              <a:t>站別負責人</a:t>
             </a:r>
             <a:endParaRPr lang="en-US" sz="950" dirty="0"/>
           </a:p>
@@ -16621,13 +16291,13 @@
       </p:sp>
       <p:sp>
         <p:nvSpPr>
-          <p:cNvPr id="86" name="Shape 82"/>
+          <p:cNvPr id="76" name="Shape 72"/>
           <p:cNvSpPr/>
           <p:nvPr/>
         </p:nvSpPr>
         <p:spPr>
           <a:xfrm>
-            <a:off x="10469880" y="3163824"/>
+            <a:off x="10469880" y="3383280"/>
             <a:ext cx="914400" cy="0"/>
           </a:xfrm>
           <a:prstGeom prst="line">
@@ -16644,13 +16314,13 @@
       </p:sp>
       <p:sp>
         <p:nvSpPr>
-          <p:cNvPr id="87" name="Shape 83"/>
+          <p:cNvPr id="77" name="Shape 73"/>
           <p:cNvSpPr/>
           <p:nvPr/>
         </p:nvSpPr>
         <p:spPr>
           <a:xfrm>
-            <a:off x="6446520" y="3264408"/>
+            <a:off x="6446520" y="3557016"/>
             <a:ext cx="274320" cy="274320"/>
           </a:xfrm>
           <a:prstGeom prst="ellipse">
@@ -16669,13 +16339,13 @@
       </p:sp>
       <p:sp>
         <p:nvSpPr>
-          <p:cNvPr id="88" name="Text 84"/>
+          <p:cNvPr id="78" name="Text 74"/>
           <p:cNvSpPr txBox="1"/>
           <p:nvPr/>
         </p:nvSpPr>
         <p:spPr>
           <a:xfrm>
-            <a:off x="6446520" y="3264408"/>
+            <a:off x="6446520" y="3557016"/>
             <a:ext cx="274320" cy="274320"/>
           </a:xfrm>
           <a:prstGeom prst="rect">
@@ -16708,13 +16378,13 @@
       </p:sp>
       <p:sp>
         <p:nvSpPr>
-          <p:cNvPr id="89" name="Text 85"/>
+          <p:cNvPr id="79" name="Text 75"/>
           <p:cNvSpPr txBox="1"/>
           <p:nvPr/>
         </p:nvSpPr>
         <p:spPr>
           <a:xfrm>
-            <a:off x="6949440" y="3227832"/>
+            <a:off x="6949440" y="3520440"/>
             <a:ext cx="2651760" cy="347472"/>
           </a:xfrm>
           <a:prstGeom prst="rect">
@@ -16739,7 +16409,7 @@
                 <a:ea typeface="Microsoft JhengHei" pitchFamily="34" charset="-122"/>
                 <a:cs typeface="Microsoft JhengHei" pitchFamily="34" charset="-120"/>
               </a:rPr>
-              <a:t>部門輪調 3 站完成</a:t>
+              <a:t>隨師裝機 1 台</a:t>
             </a:r>
             <a:endParaRPr lang="en-US" sz="1050" dirty="0"/>
           </a:p>
@@ -16747,13 +16417,13 @@
       </p:sp>
       <p:sp>
         <p:nvSpPr>
-          <p:cNvPr id="90" name="Text 86"/>
+          <p:cNvPr id="80" name="Text 76"/>
           <p:cNvSpPr txBox="1"/>
           <p:nvPr/>
         </p:nvSpPr>
         <p:spPr>
           <a:xfrm>
-            <a:off x="9601200" y="3227832"/>
+            <a:off x="9601200" y="3520440"/>
             <a:ext cx="914400" cy="347472"/>
           </a:xfrm>
           <a:prstGeom prst="rect">
@@ -16778,7 +16448,7 @@
                 <a:ea typeface="Microsoft JhengHei" pitchFamily="34" charset="-122"/>
                 <a:cs typeface="Microsoft JhengHei" pitchFamily="34" charset="-120"/>
               </a:rPr>
-              <a:t>站別負責人</a:t>
+              <a:t>資深技師</a:t>
             </a:r>
             <a:endParaRPr lang="en-US" sz="950" dirty="0"/>
           </a:p>
@@ -16786,13 +16456,13 @@
       </p:sp>
       <p:sp>
         <p:nvSpPr>
-          <p:cNvPr id="91" name="Shape 87"/>
+          <p:cNvPr id="81" name="Shape 77"/>
           <p:cNvSpPr/>
           <p:nvPr/>
         </p:nvSpPr>
         <p:spPr>
           <a:xfrm>
-            <a:off x="10469880" y="3502152"/>
+            <a:off x="10469880" y="3794760"/>
             <a:ext cx="914400" cy="0"/>
           </a:xfrm>
           <a:prstGeom prst="line">
@@ -16809,13 +16479,13 @@
       </p:sp>
       <p:sp>
         <p:nvSpPr>
-          <p:cNvPr id="92" name="Shape 88"/>
+          <p:cNvPr id="82" name="Shape 78"/>
           <p:cNvSpPr/>
           <p:nvPr/>
         </p:nvSpPr>
         <p:spPr>
           <a:xfrm>
-            <a:off x="6446520" y="3602736"/>
+            <a:off x="6446520" y="3968496"/>
             <a:ext cx="274320" cy="274320"/>
           </a:xfrm>
           <a:prstGeom prst="ellipse">
@@ -16834,13 +16504,13 @@
       </p:sp>
       <p:sp>
         <p:nvSpPr>
-          <p:cNvPr id="93" name="Text 89"/>
+          <p:cNvPr id="83" name="Text 79"/>
           <p:cNvSpPr txBox="1"/>
           <p:nvPr/>
         </p:nvSpPr>
         <p:spPr>
           <a:xfrm>
-            <a:off x="6446520" y="3602736"/>
+            <a:off x="6446520" y="3968496"/>
             <a:ext cx="274320" cy="274320"/>
           </a:xfrm>
           <a:prstGeom prst="rect">
@@ -16873,13 +16543,13 @@
       </p:sp>
       <p:sp>
         <p:nvSpPr>
-          <p:cNvPr id="94" name="Text 90"/>
+          <p:cNvPr id="84" name="Text 80"/>
           <p:cNvSpPr txBox="1"/>
           <p:nvPr/>
         </p:nvSpPr>
         <p:spPr>
           <a:xfrm>
-            <a:off x="6949440" y="3566160"/>
+            <a:off x="6949440" y="3931920"/>
             <a:ext cx="2651760" cy="347472"/>
           </a:xfrm>
           <a:prstGeom prst="rect">
@@ -16904,7 +16574,7 @@
                 <a:ea typeface="Microsoft JhengHei" pitchFamily="34" charset="-122"/>
                 <a:cs typeface="Microsoft JhengHei" pitchFamily="34" charset="-120"/>
               </a:rPr>
-              <a:t>Day 30 產品筆試</a:t>
+              <a:t>保養實作 3 台</a:t>
             </a:r>
             <a:endParaRPr lang="en-US" sz="1050" dirty="0"/>
           </a:p>
@@ -16912,13 +16582,13 @@
       </p:sp>
       <p:sp>
         <p:nvSpPr>
-          <p:cNvPr id="95" name="Text 91"/>
+          <p:cNvPr id="85" name="Text 81"/>
           <p:cNvSpPr txBox="1"/>
           <p:nvPr/>
         </p:nvSpPr>
         <p:spPr>
           <a:xfrm>
-            <a:off x="9601200" y="3566160"/>
+            <a:off x="9601200" y="3931920"/>
             <a:ext cx="914400" cy="347472"/>
           </a:xfrm>
           <a:prstGeom prst="rect">
@@ -16943,7 +16613,7 @@
                 <a:ea typeface="Microsoft JhengHei" pitchFamily="34" charset="-122"/>
                 <a:cs typeface="Microsoft JhengHei" pitchFamily="34" charset="-120"/>
               </a:rPr>
-              <a:t>訓練負責人</a:t>
+              <a:t>資深技師</a:t>
             </a:r>
             <a:endParaRPr lang="en-US" sz="950" dirty="0"/>
           </a:p>
@@ -16951,13 +16621,13 @@
       </p:sp>
       <p:sp>
         <p:nvSpPr>
-          <p:cNvPr id="96" name="Shape 92"/>
+          <p:cNvPr id="86" name="Shape 82"/>
           <p:cNvSpPr/>
           <p:nvPr/>
         </p:nvSpPr>
         <p:spPr>
           <a:xfrm>
-            <a:off x="10469880" y="3840480"/>
+            <a:off x="10469880" y="4206240"/>
             <a:ext cx="914400" cy="0"/>
           </a:xfrm>
           <a:prstGeom prst="line">
@@ -16974,13 +16644,13 @@
       </p:sp>
       <p:sp>
         <p:nvSpPr>
-          <p:cNvPr id="97" name="Shape 93"/>
+          <p:cNvPr id="87" name="Shape 83"/>
           <p:cNvSpPr/>
           <p:nvPr/>
         </p:nvSpPr>
         <p:spPr>
           <a:xfrm>
-            <a:off x="6446520" y="3941064"/>
+            <a:off x="6446520" y="4379976"/>
             <a:ext cx="274320" cy="274320"/>
           </a:xfrm>
           <a:prstGeom prst="ellipse">
@@ -16999,13 +16669,13 @@
       </p:sp>
       <p:sp>
         <p:nvSpPr>
-          <p:cNvPr id="98" name="Text 94"/>
+          <p:cNvPr id="88" name="Text 84"/>
           <p:cNvSpPr txBox="1"/>
           <p:nvPr/>
         </p:nvSpPr>
         <p:spPr>
           <a:xfrm>
-            <a:off x="6446520" y="3941064"/>
+            <a:off x="6446520" y="4379976"/>
             <a:ext cx="274320" cy="274320"/>
           </a:xfrm>
           <a:prstGeom prst="rect">
@@ -17038,13 +16708,13 @@
       </p:sp>
       <p:sp>
         <p:nvSpPr>
-          <p:cNvPr id="99" name="Text 95"/>
+          <p:cNvPr id="89" name="Text 85"/>
           <p:cNvSpPr txBox="1"/>
           <p:nvPr/>
         </p:nvSpPr>
         <p:spPr>
           <a:xfrm>
-            <a:off x="6949440" y="3904488"/>
+            <a:off x="6949440" y="4343400"/>
             <a:ext cx="2651760" cy="347472"/>
           </a:xfrm>
           <a:prstGeom prst="rect">
@@ -17069,7 +16739,7 @@
                 <a:ea typeface="Microsoft JhengHei" pitchFamily="34" charset="-122"/>
                 <a:cs typeface="Microsoft JhengHei" pitchFamily="34" charset="-120"/>
               </a:rPr>
-              <a:t>隨師裝機 1 台 ＋ 保養 3 台</a:t>
+              <a:t>原廠技術課程</a:t>
             </a:r>
             <a:endParaRPr lang="en-US" sz="1050" dirty="0"/>
           </a:p>
@@ -17077,13 +16747,13 @@
       </p:sp>
       <p:sp>
         <p:nvSpPr>
-          <p:cNvPr id="100" name="Text 96"/>
+          <p:cNvPr id="90" name="Text 86"/>
           <p:cNvSpPr txBox="1"/>
           <p:nvPr/>
         </p:nvSpPr>
         <p:spPr>
           <a:xfrm>
-            <a:off x="9601200" y="3904488"/>
+            <a:off x="9601200" y="4343400"/>
             <a:ext cx="914400" cy="347472"/>
           </a:xfrm>
           <a:prstGeom prst="rect">
@@ -17108,7 +16778,7 @@
                 <a:ea typeface="Microsoft JhengHei" pitchFamily="34" charset="-122"/>
                 <a:cs typeface="Microsoft JhengHei" pitchFamily="34" charset="-120"/>
               </a:rPr>
-              <a:t>資深技師</a:t>
+              <a:t>原廠講師</a:t>
             </a:r>
             <a:endParaRPr lang="en-US" sz="950" dirty="0"/>
           </a:p>
@@ -17116,13 +16786,13 @@
       </p:sp>
       <p:sp>
         <p:nvSpPr>
-          <p:cNvPr id="101" name="Shape 97"/>
+          <p:cNvPr id="91" name="Shape 87"/>
           <p:cNvSpPr/>
           <p:nvPr/>
         </p:nvSpPr>
         <p:spPr>
           <a:xfrm>
-            <a:off x="10469880" y="4178808"/>
+            <a:off x="10469880" y="4617720"/>
             <a:ext cx="914400" cy="0"/>
           </a:xfrm>
           <a:prstGeom prst="line">
@@ -17139,13 +16809,13 @@
       </p:sp>
       <p:sp>
         <p:nvSpPr>
-          <p:cNvPr id="102" name="Shape 98"/>
+          <p:cNvPr id="92" name="Shape 88"/>
           <p:cNvSpPr/>
           <p:nvPr/>
         </p:nvSpPr>
         <p:spPr>
           <a:xfrm>
-            <a:off x="6446520" y="4279392"/>
+            <a:off x="6446520" y="4791456"/>
             <a:ext cx="274320" cy="274320"/>
           </a:xfrm>
           <a:prstGeom prst="ellipse">
@@ -17164,13 +16834,13 @@
       </p:sp>
       <p:sp>
         <p:nvSpPr>
-          <p:cNvPr id="103" name="Text 99"/>
+          <p:cNvPr id="93" name="Text 89"/>
           <p:cNvSpPr txBox="1"/>
           <p:nvPr/>
         </p:nvSpPr>
         <p:spPr>
           <a:xfrm>
-            <a:off x="6446520" y="4279392"/>
+            <a:off x="6446520" y="4791456"/>
             <a:ext cx="274320" cy="274320"/>
           </a:xfrm>
           <a:prstGeom prst="rect">
@@ -17203,13 +16873,13 @@
       </p:sp>
       <p:sp>
         <p:nvSpPr>
-          <p:cNvPr id="104" name="Text 100"/>
+          <p:cNvPr id="94" name="Text 90"/>
           <p:cNvSpPr txBox="1"/>
           <p:nvPr/>
         </p:nvSpPr>
         <p:spPr>
           <a:xfrm>
-            <a:off x="6949440" y="4242816"/>
+            <a:off x="6949440" y="4754880"/>
             <a:ext cx="2651760" cy="347472"/>
           </a:xfrm>
           <a:prstGeom prst="rect">
@@ -17234,7 +16904,7 @@
                 <a:ea typeface="Microsoft JhengHei" pitchFamily="34" charset="-122"/>
                 <a:cs typeface="Microsoft JhengHei" pitchFamily="34" charset="-120"/>
               </a:rPr>
-              <a:t>Day 60 實作考核</a:t>
+              <a:t>獨立服務案件 3 件</a:t>
             </a:r>
             <a:endParaRPr lang="en-US" sz="1050" dirty="0"/>
           </a:p>
@@ -17242,13 +16912,13 @@
       </p:sp>
       <p:sp>
         <p:nvSpPr>
-          <p:cNvPr id="105" name="Text 101"/>
+          <p:cNvPr id="95" name="Text 91"/>
           <p:cNvSpPr txBox="1"/>
           <p:nvPr/>
         </p:nvSpPr>
         <p:spPr>
           <a:xfrm>
-            <a:off x="9601200" y="4242816"/>
+            <a:off x="9601200" y="4754880"/>
             <a:ext cx="914400" cy="347472"/>
           </a:xfrm>
           <a:prstGeom prst="rect">
@@ -17273,7 +16943,7 @@
                 <a:ea typeface="Microsoft JhengHei" pitchFamily="34" charset="-122"/>
                 <a:cs typeface="Microsoft JhengHei" pitchFamily="34" charset="-120"/>
               </a:rPr>
-              <a:t>訓練負責人</a:t>
+              <a:t>技術主管</a:t>
             </a:r>
             <a:endParaRPr lang="en-US" sz="950" dirty="0"/>
           </a:p>
@@ -17281,13 +16951,13 @@
       </p:sp>
       <p:sp>
         <p:nvSpPr>
-          <p:cNvPr id="106" name="Shape 102"/>
+          <p:cNvPr id="96" name="Shape 92"/>
           <p:cNvSpPr/>
           <p:nvPr/>
         </p:nvSpPr>
         <p:spPr>
           <a:xfrm>
-            <a:off x="10469880" y="4517136"/>
+            <a:off x="10469880" y="5029200"/>
             <a:ext cx="914400" cy="0"/>
           </a:xfrm>
           <a:prstGeom prst="line">
@@ -17304,13 +16974,13 @@
       </p:sp>
       <p:sp>
         <p:nvSpPr>
-          <p:cNvPr id="107" name="Shape 103"/>
+          <p:cNvPr id="97" name="Shape 93"/>
           <p:cNvSpPr/>
           <p:nvPr/>
         </p:nvSpPr>
         <p:spPr>
           <a:xfrm>
-            <a:off x="6446520" y="4617720"/>
+            <a:off x="6446520" y="5202936"/>
             <a:ext cx="274320" cy="274320"/>
           </a:xfrm>
           <a:prstGeom prst="ellipse">
@@ -17329,13 +16999,13 @@
       </p:sp>
       <p:sp>
         <p:nvSpPr>
-          <p:cNvPr id="108" name="Text 104"/>
+          <p:cNvPr id="98" name="Text 94"/>
           <p:cNvSpPr txBox="1"/>
           <p:nvPr/>
         </p:nvSpPr>
         <p:spPr>
           <a:xfrm>
-            <a:off x="6446520" y="4617720"/>
+            <a:off x="6446520" y="5202936"/>
             <a:ext cx="274320" cy="274320"/>
           </a:xfrm>
           <a:prstGeom prst="rect">
@@ -17368,13 +17038,13 @@
       </p:sp>
       <p:sp>
         <p:nvSpPr>
-          <p:cNvPr id="109" name="Text 105"/>
+          <p:cNvPr id="99" name="Text 95"/>
           <p:cNvSpPr txBox="1"/>
           <p:nvPr/>
         </p:nvSpPr>
         <p:spPr>
           <a:xfrm>
-            <a:off x="6949440" y="4581144"/>
+            <a:off x="6949440" y="5166360"/>
             <a:ext cx="2651760" cy="347472"/>
           </a:xfrm>
           <a:prstGeom prst="rect">
@@ -17399,7 +17069,7 @@
                 <a:ea typeface="Microsoft JhengHei" pitchFamily="34" charset="-122"/>
                 <a:cs typeface="Microsoft JhengHei" pitchFamily="34" charset="-120"/>
               </a:rPr>
-              <a:t>原廠技術課程</a:t>
+              <a:t>Day 90 結訓成果分享</a:t>
             </a:r>
             <a:endParaRPr lang="en-US" sz="1050" dirty="0"/>
           </a:p>
@@ -17407,343 +17077,13 @@
       </p:sp>
       <p:sp>
         <p:nvSpPr>
-          <p:cNvPr id="110" name="Text 106"/>
+          <p:cNvPr id="100" name="Text 96"/>
           <p:cNvSpPr txBox="1"/>
           <p:nvPr/>
         </p:nvSpPr>
         <p:spPr>
           <a:xfrm>
-            <a:off x="9601200" y="4581144"/>
-            <a:ext cx="914400" cy="347472"/>
-          </a:xfrm>
-          <a:prstGeom prst="rect">
-            <a:avLst/>
-          </a:prstGeom>
-          <a:noFill/>
-          <a:ln/>
-        </p:spPr>
-        <p:txBody>
-          <a:bodyPr wrap="square" lIns="0" tIns="0" rIns="0" bIns="0" rtlCol="0" anchor="ctr"/>
-          <a:lstStyle/>
-          <a:p>
-            <a:pPr indent="0" marL="0">
-              <a:buNone/>
-            </a:pPr>
-            <a:r>
-              <a:rPr lang="en-US" sz="950" dirty="0">
-                <a:solidFill>
-                  <a:srgbClr val="6B7785"/>
-                </a:solidFill>
-                <a:latin typeface="Microsoft JhengHei" pitchFamily="34" charset="0"/>
-                <a:ea typeface="Microsoft JhengHei" pitchFamily="34" charset="-122"/>
-                <a:cs typeface="Microsoft JhengHei" pitchFamily="34" charset="-120"/>
-              </a:rPr>
-              <a:t>原廠講師</a:t>
-            </a:r>
-            <a:endParaRPr lang="en-US" sz="950" dirty="0"/>
-          </a:p>
-        </p:txBody>
-      </p:sp>
-      <p:sp>
-        <p:nvSpPr>
-          <p:cNvPr id="111" name="Shape 107"/>
-          <p:cNvSpPr/>
-          <p:nvPr/>
-        </p:nvSpPr>
-        <p:spPr>
-          <a:xfrm>
-            <a:off x="10469880" y="4855464"/>
-            <a:ext cx="914400" cy="0"/>
-          </a:xfrm>
-          <a:prstGeom prst="line">
-            <a:avLst/>
-          </a:prstGeom>
-          <a:noFill/>
-          <a:ln w="12700">
-            <a:solidFill>
-              <a:srgbClr val="E1E6EC"/>
-            </a:solidFill>
-            <a:prstDash val="solid"/>
-          </a:ln>
-        </p:spPr>
-      </p:sp>
-      <p:sp>
-        <p:nvSpPr>
-          <p:cNvPr id="112" name="Shape 108"/>
-          <p:cNvSpPr/>
-          <p:nvPr/>
-        </p:nvSpPr>
-        <p:spPr>
-          <a:xfrm>
-            <a:off x="6446520" y="4956048"/>
-            <a:ext cx="274320" cy="274320"/>
-          </a:xfrm>
-          <a:prstGeom prst="ellipse">
-            <a:avLst/>
-          </a:prstGeom>
-          <a:solidFill>
-            <a:srgbClr val="FFFFFF"/>
-          </a:solidFill>
-          <a:ln w="15875">
-            <a:solidFill>
-              <a:srgbClr val="E8762E"/>
-            </a:solidFill>
-            <a:prstDash val="dash"/>
-          </a:ln>
-        </p:spPr>
-      </p:sp>
-      <p:sp>
-        <p:nvSpPr>
-          <p:cNvPr id="113" name="Text 109"/>
-          <p:cNvSpPr txBox="1"/>
-          <p:nvPr/>
-        </p:nvSpPr>
-        <p:spPr>
-          <a:xfrm>
-            <a:off x="6446520" y="4956048"/>
-            <a:ext cx="274320" cy="274320"/>
-          </a:xfrm>
-          <a:prstGeom prst="rect">
-            <a:avLst/>
-          </a:prstGeom>
-          <a:noFill/>
-          <a:ln/>
-        </p:spPr>
-        <p:txBody>
-          <a:bodyPr wrap="square" lIns="0" tIns="0" rIns="0" bIns="0" rtlCol="0" anchor="ctr"/>
-          <a:lstStyle/>
-          <a:p>
-            <a:pPr algn="ctr" indent="0" marL="0">
-              <a:buNone/>
-            </a:pPr>
-            <a:r>
-              <a:rPr lang="en-US" sz="850" b="1" dirty="0">
-                <a:solidFill>
-                  <a:srgbClr val="E8762E"/>
-                </a:solidFill>
-                <a:latin typeface="Arial" pitchFamily="34" charset="0"/>
-                <a:ea typeface="Arial" pitchFamily="34" charset="-122"/>
-                <a:cs typeface="Arial" pitchFamily="34" charset="-120"/>
-              </a:rPr>
-              <a:t>9</a:t>
-            </a:r>
-            <a:endParaRPr lang="en-US" sz="850" dirty="0"/>
-          </a:p>
-        </p:txBody>
-      </p:sp>
-      <p:sp>
-        <p:nvSpPr>
-          <p:cNvPr id="114" name="Text 110"/>
-          <p:cNvSpPr txBox="1"/>
-          <p:nvPr/>
-        </p:nvSpPr>
-        <p:spPr>
-          <a:xfrm>
-            <a:off x="6949440" y="4919472"/>
-            <a:ext cx="2651760" cy="347472"/>
-          </a:xfrm>
-          <a:prstGeom prst="rect">
-            <a:avLst/>
-          </a:prstGeom>
-          <a:noFill/>
-          <a:ln/>
-        </p:spPr>
-        <p:txBody>
-          <a:bodyPr wrap="square" lIns="0" tIns="0" rIns="0" bIns="0" rtlCol="0" anchor="ctr"/>
-          <a:lstStyle/>
-          <a:p>
-            <a:pPr indent="0" marL="0">
-              <a:buNone/>
-            </a:pPr>
-            <a:r>
-              <a:rPr lang="en-US" sz="1050" b="1" dirty="0">
-                <a:solidFill>
-                  <a:srgbClr val="1F2933"/>
-                </a:solidFill>
-                <a:latin typeface="Microsoft JhengHei" pitchFamily="34" charset="0"/>
-                <a:ea typeface="Microsoft JhengHei" pitchFamily="34" charset="-122"/>
-                <a:cs typeface="Microsoft JhengHei" pitchFamily="34" charset="-120"/>
-              </a:rPr>
-              <a:t>獨立服務案件 3 件</a:t>
-            </a:r>
-            <a:endParaRPr lang="en-US" sz="1050" dirty="0"/>
-          </a:p>
-        </p:txBody>
-      </p:sp>
-      <p:sp>
-        <p:nvSpPr>
-          <p:cNvPr id="115" name="Text 111"/>
-          <p:cNvSpPr txBox="1"/>
-          <p:nvPr/>
-        </p:nvSpPr>
-        <p:spPr>
-          <a:xfrm>
-            <a:off x="9601200" y="4919472"/>
-            <a:ext cx="914400" cy="347472"/>
-          </a:xfrm>
-          <a:prstGeom prst="rect">
-            <a:avLst/>
-          </a:prstGeom>
-          <a:noFill/>
-          <a:ln/>
-        </p:spPr>
-        <p:txBody>
-          <a:bodyPr wrap="square" lIns="0" tIns="0" rIns="0" bIns="0" rtlCol="0" anchor="ctr"/>
-          <a:lstStyle/>
-          <a:p>
-            <a:pPr indent="0" marL="0">
-              <a:buNone/>
-            </a:pPr>
-            <a:r>
-              <a:rPr lang="en-US" sz="950" dirty="0">
-                <a:solidFill>
-                  <a:srgbClr val="6B7785"/>
-                </a:solidFill>
-                <a:latin typeface="Microsoft JhengHei" pitchFamily="34" charset="0"/>
-                <a:ea typeface="Microsoft JhengHei" pitchFamily="34" charset="-122"/>
-                <a:cs typeface="Microsoft JhengHei" pitchFamily="34" charset="-120"/>
-              </a:rPr>
-              <a:t>技術主管</a:t>
-            </a:r>
-            <a:endParaRPr lang="en-US" sz="950" dirty="0"/>
-          </a:p>
-        </p:txBody>
-      </p:sp>
-      <p:sp>
-        <p:nvSpPr>
-          <p:cNvPr id="116" name="Shape 112"/>
-          <p:cNvSpPr/>
-          <p:nvPr/>
-        </p:nvSpPr>
-        <p:spPr>
-          <a:xfrm>
-            <a:off x="10469880" y="5193792"/>
-            <a:ext cx="914400" cy="0"/>
-          </a:xfrm>
-          <a:prstGeom prst="line">
-            <a:avLst/>
-          </a:prstGeom>
-          <a:noFill/>
-          <a:ln w="12700">
-            <a:solidFill>
-              <a:srgbClr val="E1E6EC"/>
-            </a:solidFill>
-            <a:prstDash val="solid"/>
-          </a:ln>
-        </p:spPr>
-      </p:sp>
-      <p:sp>
-        <p:nvSpPr>
-          <p:cNvPr id="117" name="Shape 113"/>
-          <p:cNvSpPr/>
-          <p:nvPr/>
-        </p:nvSpPr>
-        <p:spPr>
-          <a:xfrm>
-            <a:off x="6446520" y="5294376"/>
-            <a:ext cx="274320" cy="274320"/>
-          </a:xfrm>
-          <a:prstGeom prst="ellipse">
-            <a:avLst/>
-          </a:prstGeom>
-          <a:solidFill>
-            <a:srgbClr val="FFFFFF"/>
-          </a:solidFill>
-          <a:ln w="15875">
-            <a:solidFill>
-              <a:srgbClr val="E8762E"/>
-            </a:solidFill>
-            <a:prstDash val="dash"/>
-          </a:ln>
-        </p:spPr>
-      </p:sp>
-      <p:sp>
-        <p:nvSpPr>
-          <p:cNvPr id="118" name="Text 114"/>
-          <p:cNvSpPr txBox="1"/>
-          <p:nvPr/>
-        </p:nvSpPr>
-        <p:spPr>
-          <a:xfrm>
-            <a:off x="6446520" y="5294376"/>
-            <a:ext cx="274320" cy="274320"/>
-          </a:xfrm>
-          <a:prstGeom prst="rect">
-            <a:avLst/>
-          </a:prstGeom>
-          <a:noFill/>
-          <a:ln/>
-        </p:spPr>
-        <p:txBody>
-          <a:bodyPr wrap="square" lIns="0" tIns="0" rIns="0" bIns="0" rtlCol="0" anchor="ctr"/>
-          <a:lstStyle/>
-          <a:p>
-            <a:pPr algn="ctr" indent="0" marL="0">
-              <a:buNone/>
-            </a:pPr>
-            <a:r>
-              <a:rPr lang="en-US" sz="850" b="1" dirty="0">
-                <a:solidFill>
-                  <a:srgbClr val="E8762E"/>
-                </a:solidFill>
-                <a:latin typeface="Arial" pitchFamily="34" charset="0"/>
-                <a:ea typeface="Arial" pitchFamily="34" charset="-122"/>
-                <a:cs typeface="Arial" pitchFamily="34" charset="-120"/>
-              </a:rPr>
-              <a:t>10</a:t>
-            </a:r>
-            <a:endParaRPr lang="en-US" sz="850" dirty="0"/>
-          </a:p>
-        </p:txBody>
-      </p:sp>
-      <p:sp>
-        <p:nvSpPr>
-          <p:cNvPr id="119" name="Text 115"/>
-          <p:cNvSpPr txBox="1"/>
-          <p:nvPr/>
-        </p:nvSpPr>
-        <p:spPr>
-          <a:xfrm>
-            <a:off x="6949440" y="5257800"/>
-            <a:ext cx="2651760" cy="347472"/>
-          </a:xfrm>
-          <a:prstGeom prst="rect">
-            <a:avLst/>
-          </a:prstGeom>
-          <a:noFill/>
-          <a:ln/>
-        </p:spPr>
-        <p:txBody>
-          <a:bodyPr wrap="square" lIns="0" tIns="0" rIns="0" bIns="0" rtlCol="0" anchor="ctr"/>
-          <a:lstStyle/>
-          <a:p>
-            <a:pPr indent="0" marL="0">
-              <a:buNone/>
-            </a:pPr>
-            <a:r>
-              <a:rPr lang="en-US" sz="1050" b="1" dirty="0">
-                <a:solidFill>
-                  <a:srgbClr val="1F2933"/>
-                </a:solidFill>
-                <a:latin typeface="Microsoft JhengHei" pitchFamily="34" charset="0"/>
-                <a:ea typeface="Microsoft JhengHei" pitchFamily="34" charset="-122"/>
-                <a:cs typeface="Microsoft JhengHei" pitchFamily="34" charset="-120"/>
-              </a:rPr>
-              <a:t>Day 90 結訓考核</a:t>
-            </a:r>
-            <a:endParaRPr lang="en-US" sz="1050" dirty="0"/>
-          </a:p>
-        </p:txBody>
-      </p:sp>
-      <p:sp>
-        <p:nvSpPr>
-          <p:cNvPr id="120" name="Text 116"/>
-          <p:cNvSpPr txBox="1"/>
-          <p:nvPr/>
-        </p:nvSpPr>
-        <p:spPr>
-          <a:xfrm>
-            <a:off x="9601200" y="5257800"/>
+            <a:off x="9601200" y="5166360"/>
             <a:ext cx="914400" cy="347472"/>
           </a:xfrm>
           <a:prstGeom prst="rect">
@@ -17776,13 +17116,13 @@
       </p:sp>
       <p:sp>
         <p:nvSpPr>
-          <p:cNvPr id="121" name="Shape 117"/>
+          <p:cNvPr id="101" name="Shape 97"/>
           <p:cNvSpPr/>
           <p:nvPr/>
         </p:nvSpPr>
         <p:spPr>
           <a:xfrm>
-            <a:off x="10469880" y="5532120"/>
+            <a:off x="10469880" y="5440680"/>
             <a:ext cx="914400" cy="0"/>
           </a:xfrm>
           <a:prstGeom prst="line">
@@ -17799,7 +17139,7 @@
       </p:sp>
       <p:sp>
         <p:nvSpPr>
-          <p:cNvPr id="122" name="Shape 118"/>
+          <p:cNvPr id="102" name="Shape 98"/>
           <p:cNvSpPr/>
           <p:nvPr/>
         </p:nvSpPr>
@@ -17826,7 +17166,7 @@
       </p:sp>
       <p:sp>
         <p:nvSpPr>
-          <p:cNvPr id="123" name="Text 119"/>
+          <p:cNvPr id="103" name="Text 99"/>
           <p:cNvSpPr txBox="1"/>
           <p:nvPr/>
         </p:nvSpPr>
@@ -17871,7 +17211,7 @@
                 <a:ea typeface="Microsoft JhengHei" pitchFamily="34" charset="-122"/>
                 <a:cs typeface="Microsoft JhengHei" pitchFamily="34" charset="-120"/>
               </a:rPr>
-              <a:t>完成一項由簽章人簽名；每週五導師檢視護照。集滿 10 章 ＋ 三次考核合格 ＝ 結訓通過，作為轉正依據。</a:t>
+              <a:t>完成一項由簽章人簽名；每週五導師檢視護照。集滿 8 章 ＝ 結訓通過，作為轉正依據。</a:t>
             </a:r>
             <a:endParaRPr lang="en-US" sz="1050" dirty="0"/>
           </a:p>
@@ -17879,7 +17219,7 @@
       </p:sp>
       <p:sp>
         <p:nvSpPr>
-          <p:cNvPr id="124" name="Text 120"/>
+          <p:cNvPr id="104" name="Text 100"/>
           <p:cNvSpPr txBox="1"/>
           <p:nvPr/>
         </p:nvSpPr>
@@ -17918,7 +17258,7 @@
       </p:sp>
       <p:sp>
         <p:nvSpPr>
-          <p:cNvPr id="125" name="Text 121"/>
+          <p:cNvPr id="105" name="Text 101"/>
           <p:cNvSpPr txBox="1"/>
           <p:nvPr/>
         </p:nvSpPr>

--- a/新人90天教育訓練計畫.pptx
+++ b/新人90天教育訓練計畫.pptx
@@ -1673,7 +1673,7 @@
                 <a:ea typeface="Microsoft JhengHei" pitchFamily="34" charset="-122"/>
                 <a:cs typeface="Microsoft JhengHei" pitchFamily="34" charset="-120"/>
               </a:rPr>
-              <a:t>業務組  5 人</a:t>
+              <a:t>營業組  5 人</a:t>
             </a:r>
             <a:endParaRPr lang="en-US" sz="1050" dirty="0"/>
           </a:p>
@@ -2570,7 +2570,7 @@
                 <a:ea typeface="Microsoft JhengHei" pitchFamily="34" charset="-122"/>
                 <a:cs typeface="Microsoft JhengHei" pitchFamily="34" charset="-120"/>
               </a:rPr>
-              <a:t>部門輪調：展示中心／服務部／零件倉／業務部</a:t>
+              <a:t>營業週／技術週隔週交替，帶隊者每天輪流</a:t>
             </a:r>
             <a:endParaRPr lang="en-US" sz="1100" dirty="0"/>
           </a:p>
@@ -2612,7 +2612,7 @@
                 <a:ea typeface="Microsoft JhengHei" pitchFamily="34" charset="-122"/>
                 <a:cs typeface="Microsoft JhengHei" pitchFamily="34" charset="-120"/>
               </a:rPr>
-              <a:t>第 5 週回歸各組專業課程</a:t>
+              <a:t>營業 A–E 與技術 W–Z 一起隨行學習</a:t>
             </a:r>
             <a:endParaRPr lang="en-US" sz="1100" dirty="0"/>
           </a:p>
@@ -2633,7 +2633,7 @@
                 <a:ea typeface="Microsoft JhengHei" pitchFamily="34" charset="-122"/>
                 <a:cs typeface="Microsoft JhengHei" pitchFamily="34" charset="-120"/>
               </a:rPr>
-              <a:t>Day 30 完成部門輪調</a:t>
+              <a:t>Day 30 完成第一輪輪調</a:t>
             </a:r>
             <a:endParaRPr lang="en-US" sz="1100" dirty="0"/>
           </a:p>
@@ -2930,7 +2930,7 @@
                 <a:ea typeface="Microsoft JhengHei" pitchFamily="34" charset="-122"/>
                 <a:cs typeface="Microsoft JhengHei" pitchFamily="34" charset="-120"/>
               </a:rPr>
-              <a:t>業務：隨訪客戶 → 獨立拜訪 → 正式提案</a:t>
+              <a:t>營業：隨訪客戶 → 獨立拜訪 → 正式提案</a:t>
             </a:r>
             <a:endParaRPr lang="en-US" sz="1100" dirty="0"/>
           </a:p>
@@ -3172,7 +3172,7 @@
                 <a:ea typeface="Microsoft JhengHei" pitchFamily="34" charset="-122"/>
                 <a:cs typeface="Microsoft JhengHei" pitchFamily="34" charset="-120"/>
               </a:rPr>
-              <a:t>完成部門輪調</a:t>
+              <a:t>完成第一輪輪調</a:t>
             </a:r>
             <a:endParaRPr lang="en-US" sz="1050" dirty="0"/>
           </a:p>
@@ -3516,7 +3516,7 @@
                 <a:ea typeface="Microsoft JhengHei" pitchFamily="34" charset="-122"/>
                 <a:cs typeface="Microsoft JhengHei" pitchFamily="34" charset="-120"/>
               </a:rPr>
-              <a:t>第 1 週共同課程（業務 + 技術，在公司內）</a:t>
+              <a:t>第 1 週共同課程（營業 + 技術，在公司內）</a:t>
             </a:r>
             <a:endParaRPr lang="en-US" sz="2800" dirty="0"/>
           </a:p>
@@ -4776,7 +4776,7 @@
                 <a:ea typeface="Microsoft JhengHei" pitchFamily="34" charset="-122"/>
                 <a:cs typeface="Microsoft JhengHei" pitchFamily="34" charset="-120"/>
               </a:rPr>
-              <a:t>第 2–12 週行程（業務組 ／ 技術組）</a:t>
+              <a:t>第 2–12 週行程（營業組 ／ 技術組）</a:t>
             </a:r>
             <a:endParaRPr lang="en-US" sz="2800" dirty="0"/>
           </a:p>
@@ -4964,7 +4964,7 @@
                           <a:ea typeface="Microsoft JhengHei" pitchFamily="34" charset="-122"/>
                           <a:cs typeface="Microsoft JhengHei" pitchFamily="34" charset="-120"/>
                         </a:rPr>
-                        <a:t>業務組（5 人）</a:t>
+                        <a:t>營業組 A–E（5 人）</a:t>
                       </a:r>
                       <a:endParaRPr lang="en-US" sz="1150" dirty="0">
                         <a:latin typeface="Microsoft JhengHei" charset="0"/>
@@ -5032,7 +5032,7 @@
                           <a:ea typeface="Microsoft JhengHei" pitchFamily="34" charset="-122"/>
                           <a:cs typeface="Microsoft JhengHei" pitchFamily="34" charset="-120"/>
                         </a:rPr>
-                        <a:t>技術組（4 人）</a:t>
+                        <a:t>技術組 W–Z（4 人）</a:t>
                       </a:r>
                       <a:endParaRPr lang="en-US" sz="1150" dirty="0">
                         <a:latin typeface="Microsoft JhengHei" charset="0"/>
@@ -5170,7 +5170,7 @@
                           <a:ea typeface="Microsoft JhengHei" pitchFamily="34" charset="-122"/>
                           <a:cs typeface="Microsoft JhengHei" pitchFamily="34" charset="-120"/>
                         </a:rPr>
-                        <a:t>輪調</a:t>
+                        <a:t>營業週</a:t>
                       </a:r>
                       <a:endParaRPr lang="en-US" sz="1000" dirty="0">
                         <a:latin typeface="Microsoft JhengHei" charset="0"/>
@@ -5238,7 +5238,7 @@
                           <a:ea typeface="Microsoft JhengHei" pitchFamily="34" charset="-122"/>
                           <a:cs typeface="Microsoft JhengHei" pitchFamily="34" charset="-120"/>
                         </a:rPr>
-                        <a:t>展示中心：Demo 流程、來訪接待</a:t>
+                        <a:t>隨資深業務：拜訪、Demo、報價、提案</a:t>
                       </a:r>
                       <a:endParaRPr lang="en-US" sz="1050" dirty="0">
                         <a:latin typeface="Microsoft JhengHei" charset="0"/>
@@ -5306,7 +5306,7 @@
                           <a:ea typeface="Microsoft JhengHei" pitchFamily="34" charset="-122"/>
                           <a:cs typeface="Microsoft JhengHei" pitchFamily="34" charset="-120"/>
                         </a:rPr>
-                        <a:t>技術服務部：工具儀器、服務單流程</a:t>
+                        <a:t>隨資深業務：客戶需求、Demo 準備</a:t>
                       </a:r>
                       <a:endParaRPr lang="en-US" sz="1050" dirty="0">
                         <a:latin typeface="Microsoft JhengHei" charset="0"/>
@@ -5444,7 +5444,7 @@
                           <a:ea typeface="Microsoft JhengHei" pitchFamily="34" charset="-122"/>
                           <a:cs typeface="Microsoft JhengHei" pitchFamily="34" charset="-120"/>
                         </a:rPr>
-                        <a:t>輪調</a:t>
+                        <a:t>技術週</a:t>
                       </a:r>
                       <a:endParaRPr lang="en-US" sz="1000" dirty="0">
                         <a:latin typeface="Microsoft JhengHei" charset="0"/>
@@ -5512,7 +5512,7 @@
                           <a:ea typeface="Microsoft JhengHei" pitchFamily="34" charset="-122"/>
                           <a:cs typeface="Microsoft JhengHei" pitchFamily="34" charset="-120"/>
                         </a:rPr>
-                        <a:t>技術服務部：隨技師保養、售後流程</a:t>
+                        <a:t>隨技師：保養流程、售後服務、常見問題</a:t>
                       </a:r>
                       <a:endParaRPr lang="en-US" sz="1050" dirty="0">
                         <a:latin typeface="Microsoft JhengHei" charset="0"/>
@@ -5580,7 +5580,7 @@
                           <a:ea typeface="Microsoft JhengHei" pitchFamily="34" charset="-122"/>
                           <a:cs typeface="Microsoft JhengHei" pitchFamily="34" charset="-120"/>
                         </a:rPr>
-                        <a:t>零件倉：料號系統、備品管理</a:t>
+                        <a:t>隨技師：工具儀器、保養、服務單流程</a:t>
                       </a:r>
                       <a:endParaRPr lang="en-US" sz="1050" dirty="0">
                         <a:latin typeface="Microsoft JhengHei" charset="0"/>
@@ -5718,7 +5718,7 @@
                           <a:ea typeface="Microsoft JhengHei" pitchFamily="34" charset="-122"/>
                           <a:cs typeface="Microsoft JhengHei" pitchFamily="34" charset="-120"/>
                         </a:rPr>
-                        <a:t>輪調</a:t>
+                        <a:t>營業週</a:t>
                       </a:r>
                       <a:endParaRPr lang="en-US" sz="1000" dirty="0">
                         <a:latin typeface="Microsoft JhengHei" charset="0"/>
@@ -5786,7 +5786,7 @@
                           <a:ea typeface="Microsoft JhengHei" pitchFamily="34" charset="-122"/>
                           <a:cs typeface="Microsoft JhengHei" pitchFamily="34" charset="-120"/>
                         </a:rPr>
-                        <a:t>零件倉／內勤：報價、訂單、交期</a:t>
+                        <a:t>隨資深業務：訂單、交期、客戶回訪</a:t>
                       </a:r>
                       <a:endParaRPr lang="en-US" sz="1050" dirty="0">
                         <a:latin typeface="Microsoft JhengHei" charset="0"/>
@@ -5854,7 +5854,7 @@
                           <a:ea typeface="Microsoft JhengHei" pitchFamily="34" charset="-122"/>
                           <a:cs typeface="Microsoft JhengHei" pitchFamily="34" charset="-120"/>
                         </a:rPr>
-                        <a:t>業務部／展示中心：客戶需求、Demo 準備</a:t>
+                        <a:t>隨資深業務：報價與零件流程</a:t>
                       </a:r>
                       <a:endParaRPr lang="en-US" sz="1050" dirty="0">
                         <a:latin typeface="Microsoft JhengHei" charset="0"/>
@@ -5992,7 +5992,7 @@
                           <a:ea typeface="Microsoft JhengHei" pitchFamily="34" charset="-122"/>
                           <a:cs typeface="Microsoft JhengHei" pitchFamily="34" charset="-120"/>
                         </a:rPr>
-                        <a:t>基礎</a:t>
+                        <a:t>技術週</a:t>
                       </a:r>
                       <a:endParaRPr lang="en-US" sz="1000" dirty="0">
                         <a:latin typeface="Microsoft JhengHei" charset="0"/>
@@ -6060,7 +6060,7 @@
                           <a:ea typeface="Microsoft JhengHei" pitchFamily="34" charset="-122"/>
                           <a:cs typeface="Microsoft JhengHei" pitchFamily="34" charset="-120"/>
                         </a:rPr>
-                        <a:t>市場與客戶分析、CRM 系統</a:t>
+                        <a:t>隨技師：機台操作、控制器基礎</a:t>
                       </a:r>
                       <a:endParaRPr lang="en-US" sz="1050" dirty="0">
                         <a:latin typeface="Microsoft JhengHei" charset="0"/>
@@ -6128,7 +6128,7 @@
                           <a:ea typeface="Microsoft JhengHei" pitchFamily="34" charset="-122"/>
                           <a:cs typeface="Microsoft JhengHei" pitchFamily="34" charset="-120"/>
                         </a:rPr>
-                        <a:t>Brother C00／Okuma OSP 控制器操作</a:t>
+                        <a:t>隨技師：Brother C00／Okuma OSP 控制器操作</a:t>
                       </a:r>
                       <a:endParaRPr lang="en-US" sz="1050" dirty="0">
                         <a:latin typeface="Microsoft JhengHei" charset="0"/>
@@ -8455,7 +8455,7 @@
                 <a:ea typeface="Microsoft JhengHei" pitchFamily="34" charset="-122"/>
                 <a:cs typeface="Microsoft JhengHei" pitchFamily="34" charset="-120"/>
               </a:rPr>
-              <a:t>業務組</a:t>
+              <a:t>營業組</a:t>
             </a:r>
             <a:endParaRPr lang="en-US" sz="950" dirty="0"/>
           </a:p>
@@ -9570,7 +9570,7 @@
                 <a:ea typeface="Microsoft JhengHei" pitchFamily="34" charset="-122"/>
                 <a:cs typeface="Microsoft JhengHei" pitchFamily="34" charset="-120"/>
               </a:rPr>
-              <a:t>部門輪調（4 站）</a:t>
+              <a:t>營業／技術隔週輪調</a:t>
             </a:r>
             <a:endParaRPr lang="en-US" sz="1050" dirty="0"/>
           </a:p>
@@ -9585,7 +9585,7 @@
         <p:spPr>
           <a:xfrm>
             <a:off x="4101084" y="2350008"/>
-            <a:ext cx="1970532" cy="201168"/>
+            <a:ext cx="2651760" cy="201168"/>
           </a:xfrm>
           <a:prstGeom prst="roundRect">
             <a:avLst>
@@ -9780,7 +9780,7 @@
                 <a:ea typeface="Microsoft JhengHei" pitchFamily="34" charset="-122"/>
                 <a:cs typeface="Microsoft JhengHei" pitchFamily="34" charset="-120"/>
               </a:rPr>
-              <a:t>業務</a:t>
+              <a:t>營業</a:t>
             </a:r>
             <a:endParaRPr lang="en-US" sz="950" dirty="0"/>
           </a:p>
@@ -9819,7 +9819,7 @@
                 <a:ea typeface="Microsoft JhengHei" pitchFamily="34" charset="-122"/>
                 <a:cs typeface="Microsoft JhengHei" pitchFamily="34" charset="-120"/>
               </a:rPr>
-              <a:t>市場分析 ・ 提案報價</a:t>
+              <a:t>提案報價訓練</a:t>
             </a:r>
             <a:endParaRPr lang="en-US" sz="1050" dirty="0"/>
           </a:p>
@@ -9833,8 +9833,8 @@
         </p:nvSpPr>
         <p:spPr>
           <a:xfrm>
-            <a:off x="6144768" y="3008376"/>
-            <a:ext cx="1289304" cy="201168"/>
+            <a:off x="6825996" y="3008376"/>
+            <a:ext cx="608076" cy="201168"/>
           </a:xfrm>
           <a:prstGeom prst="roundRect">
             <a:avLst>
@@ -9917,7 +9917,7 @@
                 <a:ea typeface="Microsoft JhengHei" pitchFamily="34" charset="-122"/>
                 <a:cs typeface="Microsoft JhengHei" pitchFamily="34" charset="-120"/>
               </a:rPr>
-              <a:t>業務</a:t>
+              <a:t>營業</a:t>
             </a:r>
             <a:endParaRPr lang="en-US" sz="950" dirty="0"/>
           </a:p>
@@ -10029,7 +10029,7 @@
                 <a:ea typeface="Microsoft JhengHei" pitchFamily="34" charset="-122"/>
                 <a:cs typeface="Microsoft JhengHei" pitchFamily="34" charset="-120"/>
               </a:rPr>
-              <a:t>業務</a:t>
+              <a:t>營業</a:t>
             </a:r>
             <a:endParaRPr lang="en-US" sz="950" dirty="0"/>
           </a:p>
@@ -10205,7 +10205,7 @@
                 <a:ea typeface="Microsoft JhengHei" pitchFamily="34" charset="-122"/>
                 <a:cs typeface="Microsoft JhengHei" pitchFamily="34" charset="-120"/>
               </a:rPr>
-              <a:t>控制器 ・ 安裝調校</a:t>
+              <a:t>安裝調校</a:t>
             </a:r>
             <a:endParaRPr lang="en-US" sz="1050" dirty="0"/>
           </a:p>
@@ -10219,8 +10219,8 @@
         </p:nvSpPr>
         <p:spPr>
           <a:xfrm>
-            <a:off x="6144768" y="3995928"/>
-            <a:ext cx="1289304" cy="201168"/>
+            <a:off x="6825996" y="3995928"/>
+            <a:ext cx="608076" cy="201168"/>
           </a:xfrm>
           <a:prstGeom prst="roundRect">
             <a:avLst>
@@ -11480,7 +11480,7 @@
                 <a:ea typeface="Arial" pitchFamily="34" charset="-122"/>
                 <a:cs typeface="Arial" pitchFamily="34" charset="-120"/>
               </a:rPr>
-              <a:t>CROSS-FUNCTIONAL ROTATION</a:t>
+              <a:t>DAILY ROTATION</a:t>
             </a:r>
             <a:endParaRPr lang="en-US" sz="1050" dirty="0"/>
           </a:p>
@@ -11519,9 +11519,642 @@
                 <a:ea typeface="Microsoft JhengHei" pitchFamily="34" charset="-122"/>
                 <a:cs typeface="Microsoft JhengHei" pitchFamily="34" charset="-120"/>
               </a:rPr>
-              <a:t>業務／技術輪調排版表（第 2–4 週）</a:t>
+              <a:t>營業／技術輪調排版表（第 2–5 週，隔週交替）</a:t>
             </a:r>
             <a:endParaRPr lang="en-US" sz="2800" dirty="0"/>
+          </a:p>
+        </p:txBody>
+      </p:sp>
+      <p:sp>
+        <p:nvSpPr>
+          <p:cNvPr id="4" name="Text 2"/>
+          <p:cNvSpPr txBox="1"/>
+          <p:nvPr/>
+        </p:nvSpPr>
+        <p:spPr>
+          <a:xfrm>
+            <a:off x="640080" y="1417320"/>
+            <a:ext cx="1097280" cy="310896"/>
+          </a:xfrm>
+          <a:prstGeom prst="rect">
+            <a:avLst/>
+          </a:prstGeom>
+          <a:noFill/>
+          <a:ln/>
+        </p:spPr>
+        <p:txBody>
+          <a:bodyPr wrap="square" lIns="0" tIns="0" rIns="0" bIns="0" rtlCol="0" anchor="ctr"/>
+          <a:lstStyle/>
+          <a:p>
+            <a:pPr indent="0" marL="0">
+              <a:buNone/>
+            </a:pPr>
+            <a:r>
+              <a:rPr lang="en-US" sz="1100" b="1" dirty="0">
+                <a:solidFill>
+                  <a:srgbClr val="0F1E33"/>
+                </a:solidFill>
+                <a:latin typeface="Microsoft JhengHei" pitchFamily="34" charset="0"/>
+                <a:ea typeface="Microsoft JhengHei" pitchFamily="34" charset="-122"/>
+                <a:cs typeface="Microsoft JhengHei" pitchFamily="34" charset="-120"/>
+              </a:rPr>
+              <a:t>新人名單</a:t>
+            </a:r>
+            <a:endParaRPr lang="en-US" sz="1100" dirty="0"/>
+          </a:p>
+        </p:txBody>
+      </p:sp>
+      <p:sp>
+        <p:nvSpPr>
+          <p:cNvPr id="5" name="Shape 3"/>
+          <p:cNvSpPr/>
+          <p:nvPr/>
+        </p:nvSpPr>
+        <p:spPr>
+          <a:xfrm>
+            <a:off x="1737360" y="1417320"/>
+            <a:ext cx="777240" cy="310896"/>
+          </a:xfrm>
+          <a:prstGeom prst="roundRect">
+            <a:avLst>
+              <a:gd name="adj" fmla="val 50000"/>
+            </a:avLst>
+          </a:prstGeom>
+          <a:solidFill>
+            <a:srgbClr val="2E5C8A"/>
+          </a:solidFill>
+          <a:ln w="12700">
+            <a:solidFill>
+              <a:srgbClr val="2E5C8A"/>
+            </a:solidFill>
+            <a:prstDash val="solid"/>
+          </a:ln>
+        </p:spPr>
+      </p:sp>
+      <p:sp>
+        <p:nvSpPr>
+          <p:cNvPr id="6" name="Text 4"/>
+          <p:cNvSpPr txBox="1"/>
+          <p:nvPr/>
+        </p:nvSpPr>
+        <p:spPr>
+          <a:xfrm>
+            <a:off x="1737360" y="1417320"/>
+            <a:ext cx="777240" cy="310896"/>
+          </a:xfrm>
+          <a:prstGeom prst="rect">
+            <a:avLst/>
+          </a:prstGeom>
+          <a:noFill/>
+          <a:ln/>
+        </p:spPr>
+        <p:txBody>
+          <a:bodyPr wrap="square" lIns="0" tIns="0" rIns="0" bIns="0" rtlCol="0" anchor="ctr"/>
+          <a:lstStyle/>
+          <a:p>
+            <a:pPr algn="ctr" indent="0" marL="0">
+              <a:buNone/>
+            </a:pPr>
+            <a:r>
+              <a:rPr lang="en-US" sz="1050" b="1" dirty="0">
+                <a:solidFill>
+                  <a:srgbClr val="FFFFFF"/>
+                </a:solidFill>
+                <a:latin typeface="Microsoft JhengHei" pitchFamily="34" charset="0"/>
+                <a:ea typeface="Microsoft JhengHei" pitchFamily="34" charset="-122"/>
+                <a:cs typeface="Microsoft JhengHei" pitchFamily="34" charset="-120"/>
+              </a:rPr>
+              <a:t>營業 A</a:t>
+            </a:r>
+            <a:endParaRPr lang="en-US" sz="1050" dirty="0"/>
+          </a:p>
+        </p:txBody>
+      </p:sp>
+      <p:sp>
+        <p:nvSpPr>
+          <p:cNvPr id="7" name="Shape 5"/>
+          <p:cNvSpPr/>
+          <p:nvPr/>
+        </p:nvSpPr>
+        <p:spPr>
+          <a:xfrm>
+            <a:off x="2606040" y="1417320"/>
+            <a:ext cx="777240" cy="310896"/>
+          </a:xfrm>
+          <a:prstGeom prst="roundRect">
+            <a:avLst>
+              <a:gd name="adj" fmla="val 50000"/>
+            </a:avLst>
+          </a:prstGeom>
+          <a:solidFill>
+            <a:srgbClr val="2E5C8A"/>
+          </a:solidFill>
+          <a:ln w="12700">
+            <a:solidFill>
+              <a:srgbClr val="2E5C8A"/>
+            </a:solidFill>
+            <a:prstDash val="solid"/>
+          </a:ln>
+        </p:spPr>
+      </p:sp>
+      <p:sp>
+        <p:nvSpPr>
+          <p:cNvPr id="8" name="Text 6"/>
+          <p:cNvSpPr txBox="1"/>
+          <p:nvPr/>
+        </p:nvSpPr>
+        <p:spPr>
+          <a:xfrm>
+            <a:off x="2606040" y="1417320"/>
+            <a:ext cx="777240" cy="310896"/>
+          </a:xfrm>
+          <a:prstGeom prst="rect">
+            <a:avLst/>
+          </a:prstGeom>
+          <a:noFill/>
+          <a:ln/>
+        </p:spPr>
+        <p:txBody>
+          <a:bodyPr wrap="square" lIns="0" tIns="0" rIns="0" bIns="0" rtlCol="0" anchor="ctr"/>
+          <a:lstStyle/>
+          <a:p>
+            <a:pPr algn="ctr" indent="0" marL="0">
+              <a:buNone/>
+            </a:pPr>
+            <a:r>
+              <a:rPr lang="en-US" sz="1050" b="1" dirty="0">
+                <a:solidFill>
+                  <a:srgbClr val="FFFFFF"/>
+                </a:solidFill>
+                <a:latin typeface="Microsoft JhengHei" pitchFamily="34" charset="0"/>
+                <a:ea typeface="Microsoft JhengHei" pitchFamily="34" charset="-122"/>
+                <a:cs typeface="Microsoft JhengHei" pitchFamily="34" charset="-120"/>
+              </a:rPr>
+              <a:t>營業 B</a:t>
+            </a:r>
+            <a:endParaRPr lang="en-US" sz="1050" dirty="0"/>
+          </a:p>
+        </p:txBody>
+      </p:sp>
+      <p:sp>
+        <p:nvSpPr>
+          <p:cNvPr id="9" name="Shape 7"/>
+          <p:cNvSpPr/>
+          <p:nvPr/>
+        </p:nvSpPr>
+        <p:spPr>
+          <a:xfrm>
+            <a:off x="3474720" y="1417320"/>
+            <a:ext cx="777240" cy="310896"/>
+          </a:xfrm>
+          <a:prstGeom prst="roundRect">
+            <a:avLst>
+              <a:gd name="adj" fmla="val 50000"/>
+            </a:avLst>
+          </a:prstGeom>
+          <a:solidFill>
+            <a:srgbClr val="2E5C8A"/>
+          </a:solidFill>
+          <a:ln w="12700">
+            <a:solidFill>
+              <a:srgbClr val="2E5C8A"/>
+            </a:solidFill>
+            <a:prstDash val="solid"/>
+          </a:ln>
+        </p:spPr>
+      </p:sp>
+      <p:sp>
+        <p:nvSpPr>
+          <p:cNvPr id="10" name="Text 8"/>
+          <p:cNvSpPr txBox="1"/>
+          <p:nvPr/>
+        </p:nvSpPr>
+        <p:spPr>
+          <a:xfrm>
+            <a:off x="3474720" y="1417320"/>
+            <a:ext cx="777240" cy="310896"/>
+          </a:xfrm>
+          <a:prstGeom prst="rect">
+            <a:avLst/>
+          </a:prstGeom>
+          <a:noFill/>
+          <a:ln/>
+        </p:spPr>
+        <p:txBody>
+          <a:bodyPr wrap="square" lIns="0" tIns="0" rIns="0" bIns="0" rtlCol="0" anchor="ctr"/>
+          <a:lstStyle/>
+          <a:p>
+            <a:pPr algn="ctr" indent="0" marL="0">
+              <a:buNone/>
+            </a:pPr>
+            <a:r>
+              <a:rPr lang="en-US" sz="1050" b="1" dirty="0">
+                <a:solidFill>
+                  <a:srgbClr val="FFFFFF"/>
+                </a:solidFill>
+                <a:latin typeface="Microsoft JhengHei" pitchFamily="34" charset="0"/>
+                <a:ea typeface="Microsoft JhengHei" pitchFamily="34" charset="-122"/>
+                <a:cs typeface="Microsoft JhengHei" pitchFamily="34" charset="-120"/>
+              </a:rPr>
+              <a:t>營業 C</a:t>
+            </a:r>
+            <a:endParaRPr lang="en-US" sz="1050" dirty="0"/>
+          </a:p>
+        </p:txBody>
+      </p:sp>
+      <p:sp>
+        <p:nvSpPr>
+          <p:cNvPr id="11" name="Shape 9"/>
+          <p:cNvSpPr/>
+          <p:nvPr/>
+        </p:nvSpPr>
+        <p:spPr>
+          <a:xfrm>
+            <a:off x="4343400" y="1417320"/>
+            <a:ext cx="777240" cy="310896"/>
+          </a:xfrm>
+          <a:prstGeom prst="roundRect">
+            <a:avLst>
+              <a:gd name="adj" fmla="val 50000"/>
+            </a:avLst>
+          </a:prstGeom>
+          <a:solidFill>
+            <a:srgbClr val="2E5C8A"/>
+          </a:solidFill>
+          <a:ln w="12700">
+            <a:solidFill>
+              <a:srgbClr val="2E5C8A"/>
+            </a:solidFill>
+            <a:prstDash val="solid"/>
+          </a:ln>
+        </p:spPr>
+      </p:sp>
+      <p:sp>
+        <p:nvSpPr>
+          <p:cNvPr id="12" name="Text 10"/>
+          <p:cNvSpPr txBox="1"/>
+          <p:nvPr/>
+        </p:nvSpPr>
+        <p:spPr>
+          <a:xfrm>
+            <a:off x="4343400" y="1417320"/>
+            <a:ext cx="777240" cy="310896"/>
+          </a:xfrm>
+          <a:prstGeom prst="rect">
+            <a:avLst/>
+          </a:prstGeom>
+          <a:noFill/>
+          <a:ln/>
+        </p:spPr>
+        <p:txBody>
+          <a:bodyPr wrap="square" lIns="0" tIns="0" rIns="0" bIns="0" rtlCol="0" anchor="ctr"/>
+          <a:lstStyle/>
+          <a:p>
+            <a:pPr algn="ctr" indent="0" marL="0">
+              <a:buNone/>
+            </a:pPr>
+            <a:r>
+              <a:rPr lang="en-US" sz="1050" b="1" dirty="0">
+                <a:solidFill>
+                  <a:srgbClr val="FFFFFF"/>
+                </a:solidFill>
+                <a:latin typeface="Microsoft JhengHei" pitchFamily="34" charset="0"/>
+                <a:ea typeface="Microsoft JhengHei" pitchFamily="34" charset="-122"/>
+                <a:cs typeface="Microsoft JhengHei" pitchFamily="34" charset="-120"/>
+              </a:rPr>
+              <a:t>營業 D</a:t>
+            </a:r>
+            <a:endParaRPr lang="en-US" sz="1050" dirty="0"/>
+          </a:p>
+        </p:txBody>
+      </p:sp>
+      <p:sp>
+        <p:nvSpPr>
+          <p:cNvPr id="13" name="Shape 11"/>
+          <p:cNvSpPr/>
+          <p:nvPr/>
+        </p:nvSpPr>
+        <p:spPr>
+          <a:xfrm>
+            <a:off x="5212080" y="1417320"/>
+            <a:ext cx="777240" cy="310896"/>
+          </a:xfrm>
+          <a:prstGeom prst="roundRect">
+            <a:avLst>
+              <a:gd name="adj" fmla="val 50000"/>
+            </a:avLst>
+          </a:prstGeom>
+          <a:solidFill>
+            <a:srgbClr val="2E5C8A"/>
+          </a:solidFill>
+          <a:ln w="12700">
+            <a:solidFill>
+              <a:srgbClr val="2E5C8A"/>
+            </a:solidFill>
+            <a:prstDash val="solid"/>
+          </a:ln>
+        </p:spPr>
+      </p:sp>
+      <p:sp>
+        <p:nvSpPr>
+          <p:cNvPr id="14" name="Text 12"/>
+          <p:cNvSpPr txBox="1"/>
+          <p:nvPr/>
+        </p:nvSpPr>
+        <p:spPr>
+          <a:xfrm>
+            <a:off x="5212080" y="1417320"/>
+            <a:ext cx="777240" cy="310896"/>
+          </a:xfrm>
+          <a:prstGeom prst="rect">
+            <a:avLst/>
+          </a:prstGeom>
+          <a:noFill/>
+          <a:ln/>
+        </p:spPr>
+        <p:txBody>
+          <a:bodyPr wrap="square" lIns="0" tIns="0" rIns="0" bIns="0" rtlCol="0" anchor="ctr"/>
+          <a:lstStyle/>
+          <a:p>
+            <a:pPr algn="ctr" indent="0" marL="0">
+              <a:buNone/>
+            </a:pPr>
+            <a:r>
+              <a:rPr lang="en-US" sz="1050" b="1" dirty="0">
+                <a:solidFill>
+                  <a:srgbClr val="FFFFFF"/>
+                </a:solidFill>
+                <a:latin typeface="Microsoft JhengHei" pitchFamily="34" charset="0"/>
+                <a:ea typeface="Microsoft JhengHei" pitchFamily="34" charset="-122"/>
+                <a:cs typeface="Microsoft JhengHei" pitchFamily="34" charset="-120"/>
+              </a:rPr>
+              <a:t>營業 E</a:t>
+            </a:r>
+            <a:endParaRPr lang="en-US" sz="1050" dirty="0"/>
+          </a:p>
+        </p:txBody>
+      </p:sp>
+      <p:sp>
+        <p:nvSpPr>
+          <p:cNvPr id="15" name="Shape 13"/>
+          <p:cNvSpPr/>
+          <p:nvPr/>
+        </p:nvSpPr>
+        <p:spPr>
+          <a:xfrm>
+            <a:off x="6309360" y="1417320"/>
+            <a:ext cx="777240" cy="310896"/>
+          </a:xfrm>
+          <a:prstGeom prst="roundRect">
+            <a:avLst>
+              <a:gd name="adj" fmla="val 50000"/>
+            </a:avLst>
+          </a:prstGeom>
+          <a:solidFill>
+            <a:srgbClr val="E8762E"/>
+          </a:solidFill>
+          <a:ln w="12700">
+            <a:solidFill>
+              <a:srgbClr val="E8762E"/>
+            </a:solidFill>
+            <a:prstDash val="solid"/>
+          </a:ln>
+        </p:spPr>
+      </p:sp>
+      <p:sp>
+        <p:nvSpPr>
+          <p:cNvPr id="16" name="Text 14"/>
+          <p:cNvSpPr txBox="1"/>
+          <p:nvPr/>
+        </p:nvSpPr>
+        <p:spPr>
+          <a:xfrm>
+            <a:off x="6309360" y="1417320"/>
+            <a:ext cx="777240" cy="310896"/>
+          </a:xfrm>
+          <a:prstGeom prst="rect">
+            <a:avLst/>
+          </a:prstGeom>
+          <a:noFill/>
+          <a:ln/>
+        </p:spPr>
+        <p:txBody>
+          <a:bodyPr wrap="square" lIns="0" tIns="0" rIns="0" bIns="0" rtlCol="0" anchor="ctr"/>
+          <a:lstStyle/>
+          <a:p>
+            <a:pPr algn="ctr" indent="0" marL="0">
+              <a:buNone/>
+            </a:pPr>
+            <a:r>
+              <a:rPr lang="en-US" sz="1050" b="1" dirty="0">
+                <a:solidFill>
+                  <a:srgbClr val="FFFFFF"/>
+                </a:solidFill>
+                <a:latin typeface="Microsoft JhengHei" pitchFamily="34" charset="0"/>
+                <a:ea typeface="Microsoft JhengHei" pitchFamily="34" charset="-122"/>
+                <a:cs typeface="Microsoft JhengHei" pitchFamily="34" charset="-120"/>
+              </a:rPr>
+              <a:t>技術 W</a:t>
+            </a:r>
+            <a:endParaRPr lang="en-US" sz="1050" dirty="0"/>
+          </a:p>
+        </p:txBody>
+      </p:sp>
+      <p:sp>
+        <p:nvSpPr>
+          <p:cNvPr id="17" name="Shape 15"/>
+          <p:cNvSpPr/>
+          <p:nvPr/>
+        </p:nvSpPr>
+        <p:spPr>
+          <a:xfrm>
+            <a:off x="7178040" y="1417320"/>
+            <a:ext cx="777240" cy="310896"/>
+          </a:xfrm>
+          <a:prstGeom prst="roundRect">
+            <a:avLst>
+              <a:gd name="adj" fmla="val 50000"/>
+            </a:avLst>
+          </a:prstGeom>
+          <a:solidFill>
+            <a:srgbClr val="E8762E"/>
+          </a:solidFill>
+          <a:ln w="12700">
+            <a:solidFill>
+              <a:srgbClr val="E8762E"/>
+            </a:solidFill>
+            <a:prstDash val="solid"/>
+          </a:ln>
+        </p:spPr>
+      </p:sp>
+      <p:sp>
+        <p:nvSpPr>
+          <p:cNvPr id="18" name="Text 16"/>
+          <p:cNvSpPr txBox="1"/>
+          <p:nvPr/>
+        </p:nvSpPr>
+        <p:spPr>
+          <a:xfrm>
+            <a:off x="7178040" y="1417320"/>
+            <a:ext cx="777240" cy="310896"/>
+          </a:xfrm>
+          <a:prstGeom prst="rect">
+            <a:avLst/>
+          </a:prstGeom>
+          <a:noFill/>
+          <a:ln/>
+        </p:spPr>
+        <p:txBody>
+          <a:bodyPr wrap="square" lIns="0" tIns="0" rIns="0" bIns="0" rtlCol="0" anchor="ctr"/>
+          <a:lstStyle/>
+          <a:p>
+            <a:pPr algn="ctr" indent="0" marL="0">
+              <a:buNone/>
+            </a:pPr>
+            <a:r>
+              <a:rPr lang="en-US" sz="1050" b="1" dirty="0">
+                <a:solidFill>
+                  <a:srgbClr val="FFFFFF"/>
+                </a:solidFill>
+                <a:latin typeface="Microsoft JhengHei" pitchFamily="34" charset="0"/>
+                <a:ea typeface="Microsoft JhengHei" pitchFamily="34" charset="-122"/>
+                <a:cs typeface="Microsoft JhengHei" pitchFamily="34" charset="-120"/>
+              </a:rPr>
+              <a:t>技術 X</a:t>
+            </a:r>
+            <a:endParaRPr lang="en-US" sz="1050" dirty="0"/>
+          </a:p>
+        </p:txBody>
+      </p:sp>
+      <p:sp>
+        <p:nvSpPr>
+          <p:cNvPr id="19" name="Shape 17"/>
+          <p:cNvSpPr/>
+          <p:nvPr/>
+        </p:nvSpPr>
+        <p:spPr>
+          <a:xfrm>
+            <a:off x="8046720" y="1417320"/>
+            <a:ext cx="777240" cy="310896"/>
+          </a:xfrm>
+          <a:prstGeom prst="roundRect">
+            <a:avLst>
+              <a:gd name="adj" fmla="val 50000"/>
+            </a:avLst>
+          </a:prstGeom>
+          <a:solidFill>
+            <a:srgbClr val="E8762E"/>
+          </a:solidFill>
+          <a:ln w="12700">
+            <a:solidFill>
+              <a:srgbClr val="E8762E"/>
+            </a:solidFill>
+            <a:prstDash val="solid"/>
+          </a:ln>
+        </p:spPr>
+      </p:sp>
+      <p:sp>
+        <p:nvSpPr>
+          <p:cNvPr id="20" name="Text 18"/>
+          <p:cNvSpPr txBox="1"/>
+          <p:nvPr/>
+        </p:nvSpPr>
+        <p:spPr>
+          <a:xfrm>
+            <a:off x="8046720" y="1417320"/>
+            <a:ext cx="777240" cy="310896"/>
+          </a:xfrm>
+          <a:prstGeom prst="rect">
+            <a:avLst/>
+          </a:prstGeom>
+          <a:noFill/>
+          <a:ln/>
+        </p:spPr>
+        <p:txBody>
+          <a:bodyPr wrap="square" lIns="0" tIns="0" rIns="0" bIns="0" rtlCol="0" anchor="ctr"/>
+          <a:lstStyle/>
+          <a:p>
+            <a:pPr algn="ctr" indent="0" marL="0">
+              <a:buNone/>
+            </a:pPr>
+            <a:r>
+              <a:rPr lang="en-US" sz="1050" b="1" dirty="0">
+                <a:solidFill>
+                  <a:srgbClr val="FFFFFF"/>
+                </a:solidFill>
+                <a:latin typeface="Microsoft JhengHei" pitchFamily="34" charset="0"/>
+                <a:ea typeface="Microsoft JhengHei" pitchFamily="34" charset="-122"/>
+                <a:cs typeface="Microsoft JhengHei" pitchFamily="34" charset="-120"/>
+              </a:rPr>
+              <a:t>技術 Y</a:t>
+            </a:r>
+            <a:endParaRPr lang="en-US" sz="1050" dirty="0"/>
+          </a:p>
+        </p:txBody>
+      </p:sp>
+      <p:sp>
+        <p:nvSpPr>
+          <p:cNvPr id="21" name="Shape 19"/>
+          <p:cNvSpPr/>
+          <p:nvPr/>
+        </p:nvSpPr>
+        <p:spPr>
+          <a:xfrm>
+            <a:off x="8915400" y="1417320"/>
+            <a:ext cx="777240" cy="310896"/>
+          </a:xfrm>
+          <a:prstGeom prst="roundRect">
+            <a:avLst>
+              <a:gd name="adj" fmla="val 50000"/>
+            </a:avLst>
+          </a:prstGeom>
+          <a:solidFill>
+            <a:srgbClr val="E8762E"/>
+          </a:solidFill>
+          <a:ln w="12700">
+            <a:solidFill>
+              <a:srgbClr val="E8762E"/>
+            </a:solidFill>
+            <a:prstDash val="solid"/>
+          </a:ln>
+        </p:spPr>
+      </p:sp>
+      <p:sp>
+        <p:nvSpPr>
+          <p:cNvPr id="22" name="Text 20"/>
+          <p:cNvSpPr txBox="1"/>
+          <p:nvPr/>
+        </p:nvSpPr>
+        <p:spPr>
+          <a:xfrm>
+            <a:off x="8915400" y="1417320"/>
+            <a:ext cx="777240" cy="310896"/>
+          </a:xfrm>
+          <a:prstGeom prst="rect">
+            <a:avLst/>
+          </a:prstGeom>
+          <a:noFill/>
+          <a:ln/>
+        </p:spPr>
+        <p:txBody>
+          <a:bodyPr wrap="square" lIns="0" tIns="0" rIns="0" bIns="0" rtlCol="0" anchor="ctr"/>
+          <a:lstStyle/>
+          <a:p>
+            <a:pPr algn="ctr" indent="0" marL="0">
+              <a:buNone/>
+            </a:pPr>
+            <a:r>
+              <a:rPr lang="en-US" sz="1050" b="1" dirty="0">
+                <a:solidFill>
+                  <a:srgbClr val="FFFFFF"/>
+                </a:solidFill>
+                <a:latin typeface="Microsoft JhengHei" pitchFamily="34" charset="0"/>
+                <a:ea typeface="Microsoft JhengHei" pitchFamily="34" charset="-122"/>
+                <a:cs typeface="Microsoft JhengHei" pitchFamily="34" charset="-120"/>
+              </a:rPr>
+              <a:t>技術 Z</a:t>
+            </a:r>
+            <a:endParaRPr lang="en-US" sz="1050" dirty="0"/>
           </a:p>
         </p:txBody>
       </p:sp>
@@ -11540,7 +12173,7 @@
           </p:nvPr>
         </p:nvGraphicFramePr>
         <p:xfrm>
-          <a:off x="640080" y="1554480"/>
+          <a:off x="640080" y="1920240"/>
           <a:ext cx="10927080" cy="914400"/>
         </p:xfrm>
         <a:graphic>
@@ -11548,13 +12181,12 @@
             <a:tbl>
               <a:tblPr/>
               <a:tblGrid>
-                <a:gridCol w="3108960"/>
-                <a:gridCol w="1691640"/>
-                <a:gridCol w="2048256"/>
-                <a:gridCol w="2039112"/>
-                <a:gridCol w="2039112"/>
+                <a:gridCol w="1005840"/>
+                <a:gridCol w="3566160"/>
+                <a:gridCol w="3566160"/>
+                <a:gridCol w="2788920"/>
               </a:tblGrid>
-              <a:tr h="438912">
+              <a:tr h="411480">
                 <a:tc>
                   <a:txBody>
                     <a:bodyPr/>
@@ -11572,7 +12204,7 @@
                           <a:ea typeface="Microsoft JhengHei" pitchFamily="34" charset="-122"/>
                           <a:cs typeface="Microsoft JhengHei" pitchFamily="34" charset="-120"/>
                         </a:rPr>
-                        <a:t>輪調站別</a:t>
+                        <a:t>日程</a:t>
                       </a:r>
                       <a:endParaRPr lang="en-US" sz="1150" dirty="0">
                         <a:latin typeface="Microsoft JhengHei" charset="0"/>
@@ -11640,7 +12272,7 @@
                           <a:ea typeface="Microsoft JhengHei" pitchFamily="34" charset="-122"/>
                           <a:cs typeface="Microsoft JhengHei" pitchFamily="34" charset="-120"/>
                         </a:rPr>
-                        <a:t>站別負責人</a:t>
+                        <a:t>營業週（第 2、4 週）帶隊</a:t>
                       </a:r>
                       <a:endParaRPr lang="en-US" sz="1150" dirty="0">
                         <a:latin typeface="Microsoft JhengHei" charset="0"/>
@@ -11687,7 +12319,7 @@
                       <a:tailEnd type="none" w="med" len="med"/>
                     </a:lnB>
                     <a:solidFill>
-                      <a:srgbClr val="0F1E33"/>
+                      <a:srgbClr val="2E5C8A"/>
                     </a:solidFill>
                   </a:tcPr>
                 </a:tc>
@@ -11708,7 +12340,7 @@
                           <a:ea typeface="Microsoft JhengHei" pitchFamily="34" charset="-122"/>
                           <a:cs typeface="Microsoft JhengHei" pitchFamily="34" charset="-120"/>
                         </a:rPr>
-                        <a:t>第 2 週</a:t>
+                        <a:t>技術週（第 3、5 週）帶隊</a:t>
                       </a:r>
                       <a:endParaRPr lang="en-US" sz="1150" dirty="0">
                         <a:latin typeface="Microsoft JhengHei" charset="0"/>
@@ -11755,7 +12387,7 @@
                       <a:tailEnd type="none" w="med" len="med"/>
                     </a:lnB>
                     <a:solidFill>
-                      <a:srgbClr val="0F1E33"/>
+                      <a:srgbClr val="E8762E"/>
                     </a:solidFill>
                   </a:tcPr>
                 </a:tc>
@@ -11776,7 +12408,7 @@
                           <a:ea typeface="Microsoft JhengHei" pitchFamily="34" charset="-122"/>
                           <a:cs typeface="Microsoft JhengHei" pitchFamily="34" charset="-120"/>
                         </a:rPr>
-                        <a:t>第 3 週</a:t>
+                        <a:t>隨行新人</a:t>
                       </a:r>
                       <a:endParaRPr lang="en-US" sz="1150" dirty="0">
                         <a:latin typeface="Microsoft JhengHei" charset="0"/>
@@ -11827,6 +12459,8 @@
                     </a:solidFill>
                   </a:tcPr>
                 </a:tc>
+              </a:tr>
+              <a:tr h="493776">
                 <a:tc>
                   <a:txBody>
                     <a:bodyPr/>
@@ -11838,13 +12472,13 @@
                       <a:r>
                         <a:rPr lang="en-US" sz="1150" b="1" dirty="0">
                           <a:solidFill>
-                            <a:srgbClr val="FFFFFF"/>
+                            <a:srgbClr val="0F1E33"/>
                           </a:solidFill>
                           <a:latin typeface="Microsoft JhengHei" pitchFamily="34" charset="0"/>
                           <a:ea typeface="Microsoft JhengHei" pitchFamily="34" charset="-122"/>
                           <a:cs typeface="Microsoft JhengHei" pitchFamily="34" charset="-120"/>
                         </a:rPr>
-                        <a:t>第 4 週</a:t>
+                        <a:t>週一</a:t>
                       </a:r>
                       <a:endParaRPr lang="en-US" sz="1150" dirty="0">
                         <a:latin typeface="Microsoft JhengHei" charset="0"/>
@@ -11891,18 +12525,219 @@
                       <a:tailEnd type="none" w="med" len="med"/>
                     </a:lnB>
                     <a:solidFill>
-                      <a:srgbClr val="0F1E33"/>
+                      <a:srgbClr val="F4F6F9"/>
                     </a:solidFill>
                   </a:tcPr>
                 </a:tc>
-              </a:tr>
-              <a:tr h="658368">
                 <a:tc>
                   <a:txBody>
                     <a:bodyPr/>
                     <a:lstStyle/>
                     <a:p>
                       <a:pPr indent="0" marL="0">
+                        <a:buNone/>
+                      </a:pPr>
+                      <a:r>
+                        <a:rPr lang="en-US" sz="1050" dirty="0">
+                          <a:solidFill>
+                            <a:srgbClr val="1F2933"/>
+                          </a:solidFill>
+                          <a:latin typeface="Microsoft JhengHei" pitchFamily="34" charset="0"/>
+                          <a:ea typeface="Microsoft JhengHei" pitchFamily="34" charset="-122"/>
+                          <a:cs typeface="Microsoft JhengHei" pitchFamily="34" charset="-120"/>
+                        </a:rPr>
+                        <a:t>資深業務 ①：客戶拜訪隨行</a:t>
+                      </a:r>
+                      <a:endParaRPr lang="en-US" sz="1050" dirty="0">
+                        <a:latin typeface="Microsoft JhengHei" charset="0"/>
+                        <a:ea typeface="Microsoft JhengHei" charset="0"/>
+                        <a:cs typeface="Microsoft JhengHei" charset="0"/>
+                      </a:endParaRPr>
+                    </a:p>
+                  </a:txBody>
+                  <a:tcPr marL="91440" marR="91440" marT="45720" marB="45720" anchor="ctr">
+                    <a:lnL w="19050" cap="flat" cmpd="sng" algn="ctr">
+                      <a:solidFill>
+                        <a:srgbClr val="FFFFFF"/>
+                      </a:solidFill>
+                      <a:prstDash val="solid"/>
+                      <a:round/>
+                      <a:headEnd type="none" w="med" len="med"/>
+                      <a:tailEnd type="none" w="med" len="med"/>
+                    </a:lnL>
+                    <a:lnR w="19050" cap="flat" cmpd="sng" algn="ctr">
+                      <a:solidFill>
+                        <a:srgbClr val="FFFFFF"/>
+                      </a:solidFill>
+                      <a:prstDash val="solid"/>
+                      <a:round/>
+                      <a:headEnd type="none" w="med" len="med"/>
+                      <a:tailEnd type="none" w="med" len="med"/>
+                    </a:lnR>
+                    <a:lnT w="19050" cap="flat" cmpd="sng" algn="ctr">
+                      <a:solidFill>
+                        <a:srgbClr val="FFFFFF"/>
+                      </a:solidFill>
+                      <a:prstDash val="solid"/>
+                      <a:round/>
+                      <a:headEnd type="none" w="med" len="med"/>
+                      <a:tailEnd type="none" w="med" len="med"/>
+                    </a:lnT>
+                    <a:lnB w="19050" cap="flat" cmpd="sng" algn="ctr">
+                      <a:solidFill>
+                        <a:srgbClr val="FFFFFF"/>
+                      </a:solidFill>
+                      <a:prstDash val="solid"/>
+                      <a:round/>
+                      <a:headEnd type="none" w="med" len="med"/>
+                      <a:tailEnd type="none" w="med" len="med"/>
+                    </a:lnB>
+                    <a:solidFill>
+                      <a:srgbClr val="E7EFF8"/>
+                    </a:solidFill>
+                  </a:tcPr>
+                </a:tc>
+                <a:tc>
+                  <a:txBody>
+                    <a:bodyPr/>
+                    <a:lstStyle/>
+                    <a:p>
+                      <a:pPr indent="0" marL="0">
+                        <a:buNone/>
+                      </a:pPr>
+                      <a:r>
+                        <a:rPr lang="en-US" sz="1050" dirty="0">
+                          <a:solidFill>
+                            <a:srgbClr val="1F2933"/>
+                          </a:solidFill>
+                          <a:latin typeface="Microsoft JhengHei" pitchFamily="34" charset="0"/>
+                          <a:ea typeface="Microsoft JhengHei" pitchFamily="34" charset="-122"/>
+                          <a:cs typeface="Microsoft JhengHei" pitchFamily="34" charset="-120"/>
+                        </a:rPr>
+                        <a:t>資深技師 ①：現場保養隨行</a:t>
+                      </a:r>
+                      <a:endParaRPr lang="en-US" sz="1050" dirty="0">
+                        <a:latin typeface="Microsoft JhengHei" charset="0"/>
+                        <a:ea typeface="Microsoft JhengHei" charset="0"/>
+                        <a:cs typeface="Microsoft JhengHei" charset="0"/>
+                      </a:endParaRPr>
+                    </a:p>
+                  </a:txBody>
+                  <a:tcPr marL="91440" marR="91440" marT="45720" marB="45720" anchor="ctr">
+                    <a:lnL w="19050" cap="flat" cmpd="sng" algn="ctr">
+                      <a:solidFill>
+                        <a:srgbClr val="FFFFFF"/>
+                      </a:solidFill>
+                      <a:prstDash val="solid"/>
+                      <a:round/>
+                      <a:headEnd type="none" w="med" len="med"/>
+                      <a:tailEnd type="none" w="med" len="med"/>
+                    </a:lnL>
+                    <a:lnR w="19050" cap="flat" cmpd="sng" algn="ctr">
+                      <a:solidFill>
+                        <a:srgbClr val="FFFFFF"/>
+                      </a:solidFill>
+                      <a:prstDash val="solid"/>
+                      <a:round/>
+                      <a:headEnd type="none" w="med" len="med"/>
+                      <a:tailEnd type="none" w="med" len="med"/>
+                    </a:lnR>
+                    <a:lnT w="19050" cap="flat" cmpd="sng" algn="ctr">
+                      <a:solidFill>
+                        <a:srgbClr val="FFFFFF"/>
+                      </a:solidFill>
+                      <a:prstDash val="solid"/>
+                      <a:round/>
+                      <a:headEnd type="none" w="med" len="med"/>
+                      <a:tailEnd type="none" w="med" len="med"/>
+                    </a:lnT>
+                    <a:lnB w="19050" cap="flat" cmpd="sng" algn="ctr">
+                      <a:solidFill>
+                        <a:srgbClr val="FFFFFF"/>
+                      </a:solidFill>
+                      <a:prstDash val="solid"/>
+                      <a:round/>
+                      <a:headEnd type="none" w="med" len="med"/>
+                      <a:tailEnd type="none" w="med" len="med"/>
+                    </a:lnB>
+                    <a:solidFill>
+                      <a:srgbClr val="FDEEE3"/>
+                    </a:solidFill>
+                  </a:tcPr>
+                </a:tc>
+                <a:tc>
+                  <a:txBody>
+                    <a:bodyPr/>
+                    <a:lstStyle/>
+                    <a:p>
+                      <a:pPr indent="0" marL="0">
+                        <a:buNone/>
+                      </a:pPr>
+                      <a:r>
+                        <a:rPr lang="en-US" sz="1050" b="1" dirty="0">
+                          <a:solidFill>
+                            <a:srgbClr val="0F1E33"/>
+                          </a:solidFill>
+                          <a:latin typeface="Microsoft JhengHei" pitchFamily="34" charset="0"/>
+                          <a:ea typeface="Microsoft JhengHei" pitchFamily="34" charset="-122"/>
+                          <a:cs typeface="Microsoft JhengHei" pitchFamily="34" charset="-120"/>
+                        </a:rPr>
+                        <a:t>營業 A B ＋ 技術 W X</a:t>
+                      </a:r>
+                      <a:endParaRPr lang="en-US" sz="1050" dirty="0">
+                        <a:latin typeface="Microsoft JhengHei" charset="0"/>
+                        <a:ea typeface="Microsoft JhengHei" charset="0"/>
+                        <a:cs typeface="Microsoft JhengHei" charset="0"/>
+                      </a:endParaRPr>
+                    </a:p>
+                  </a:txBody>
+                  <a:tcPr marL="91440" marR="91440" marT="45720" marB="45720" anchor="ctr">
+                    <a:lnL w="19050" cap="flat" cmpd="sng" algn="ctr">
+                      <a:solidFill>
+                        <a:srgbClr val="FFFFFF"/>
+                      </a:solidFill>
+                      <a:prstDash val="solid"/>
+                      <a:round/>
+                      <a:headEnd type="none" w="med" len="med"/>
+                      <a:tailEnd type="none" w="med" len="med"/>
+                    </a:lnL>
+                    <a:lnR w="19050" cap="flat" cmpd="sng" algn="ctr">
+                      <a:solidFill>
+                        <a:srgbClr val="FFFFFF"/>
+                      </a:solidFill>
+                      <a:prstDash val="solid"/>
+                      <a:round/>
+                      <a:headEnd type="none" w="med" len="med"/>
+                      <a:tailEnd type="none" w="med" len="med"/>
+                    </a:lnR>
+                    <a:lnT w="19050" cap="flat" cmpd="sng" algn="ctr">
+                      <a:solidFill>
+                        <a:srgbClr val="FFFFFF"/>
+                      </a:solidFill>
+                      <a:prstDash val="solid"/>
+                      <a:round/>
+                      <a:headEnd type="none" w="med" len="med"/>
+                      <a:tailEnd type="none" w="med" len="med"/>
+                    </a:lnT>
+                    <a:lnB w="19050" cap="flat" cmpd="sng" algn="ctr">
+                      <a:solidFill>
+                        <a:srgbClr val="FFFFFF"/>
+                      </a:solidFill>
+                      <a:prstDash val="solid"/>
+                      <a:round/>
+                      <a:headEnd type="none" w="med" len="med"/>
+                      <a:tailEnd type="none" w="med" len="med"/>
+                    </a:lnB>
+                  </a:tcPr>
+                </a:tc>
+              </a:tr>
+              <a:tr h="493776">
+                <a:tc>
+                  <a:txBody>
+                    <a:bodyPr/>
+                    <a:lstStyle/>
+                    <a:p>
+                      <a:pPr algn="ctr" indent="0" marL="0">
                         <a:buNone/>
                       </a:pPr>
                       <a:r>
@@ -11914,7 +12749,7 @@
                           <a:ea typeface="Microsoft JhengHei" pitchFamily="34" charset="-122"/>
                           <a:cs typeface="Microsoft JhengHei" pitchFamily="34" charset="-120"/>
                         </a:rPr>
-                        <a:t>A  展示中心（Demo／操作）</a:t>
+                        <a:t>週二</a:t>
                       </a:r>
                       <a:endParaRPr lang="en-US" sz="1150" dirty="0">
                         <a:latin typeface="Microsoft JhengHei" charset="0"/>
@@ -11960,6 +12795,9 @@
                       <a:headEnd type="none" w="med" len="med"/>
                       <a:tailEnd type="none" w="med" len="med"/>
                     </a:lnB>
+                    <a:solidFill>
+                      <a:srgbClr val="F4F6F9"/>
+                    </a:solidFill>
                   </a:tcPr>
                 </a:tc>
                 <a:tc>
@@ -11971,82 +12809,17 @@
                         <a:buNone/>
                       </a:pPr>
                       <a:r>
-                        <a:rPr lang="en-US" sz="1000" dirty="0">
+                        <a:rPr lang="en-US" sz="1050" dirty="0">
                           <a:solidFill>
-                            <a:srgbClr val="6B7785"/>
+                            <a:srgbClr val="1F2933"/>
                           </a:solidFill>
                           <a:latin typeface="Microsoft JhengHei" pitchFamily="34" charset="0"/>
                           <a:ea typeface="Microsoft JhengHei" pitchFamily="34" charset="-122"/>
                           <a:cs typeface="Microsoft JhengHei" pitchFamily="34" charset="-120"/>
                         </a:rPr>
-                        <a:t>展示中心主管</a:t>
+                        <a:t>資深業務 ②：展示中心 Demo</a:t>
                       </a:r>
-                      <a:endParaRPr lang="en-US" sz="1000" dirty="0">
-                        <a:latin typeface="Microsoft JhengHei" charset="0"/>
-                        <a:ea typeface="Microsoft JhengHei" charset="0"/>
-                        <a:cs typeface="Microsoft JhengHei" charset="0"/>
-                      </a:endParaRPr>
-                    </a:p>
-                  </a:txBody>
-                  <a:tcPr marL="91440" marR="91440" marT="45720" marB="45720" anchor="ctr">
-                    <a:lnL w="19050" cap="flat" cmpd="sng" algn="ctr">
-                      <a:solidFill>
-                        <a:srgbClr val="FFFFFF"/>
-                      </a:solidFill>
-                      <a:prstDash val="solid"/>
-                      <a:round/>
-                      <a:headEnd type="none" w="med" len="med"/>
-                      <a:tailEnd type="none" w="med" len="med"/>
-                    </a:lnL>
-                    <a:lnR w="19050" cap="flat" cmpd="sng" algn="ctr">
-                      <a:solidFill>
-                        <a:srgbClr val="FFFFFF"/>
-                      </a:solidFill>
-                      <a:prstDash val="solid"/>
-                      <a:round/>
-                      <a:headEnd type="none" w="med" len="med"/>
-                      <a:tailEnd type="none" w="med" len="med"/>
-                    </a:lnR>
-                    <a:lnT w="19050" cap="flat" cmpd="sng" algn="ctr">
-                      <a:solidFill>
-                        <a:srgbClr val="FFFFFF"/>
-                      </a:solidFill>
-                      <a:prstDash val="solid"/>
-                      <a:round/>
-                      <a:headEnd type="none" w="med" len="med"/>
-                      <a:tailEnd type="none" w="med" len="med"/>
-                    </a:lnT>
-                    <a:lnB w="19050" cap="flat" cmpd="sng" algn="ctr">
-                      <a:solidFill>
-                        <a:srgbClr val="FFFFFF"/>
-                      </a:solidFill>
-                      <a:prstDash val="solid"/>
-                      <a:round/>
-                      <a:headEnd type="none" w="med" len="med"/>
-                      <a:tailEnd type="none" w="med" len="med"/>
-                    </a:lnB>
-                  </a:tcPr>
-                </a:tc>
-                <a:tc>
-                  <a:txBody>
-                    <a:bodyPr/>
-                    <a:lstStyle/>
-                    <a:p>
-                      <a:pPr algn="ctr" indent="0" marL="0">
-                        <a:buNone/>
-                      </a:pPr>
-                      <a:r>
-                        <a:rPr lang="en-US" sz="1100" b="1" dirty="0">
-                          <a:solidFill>
-                            <a:srgbClr val="2E5C8A"/>
-                          </a:solidFill>
-                          <a:latin typeface="Microsoft JhengHei" pitchFamily="34" charset="0"/>
-                          <a:ea typeface="Microsoft JhengHei" pitchFamily="34" charset="-122"/>
-                          <a:cs typeface="Microsoft JhengHei" pitchFamily="34" charset="-120"/>
-                        </a:rPr>
-                        <a:t>業務 B1 B2</a:t>
-                      </a:r>
-                      <a:endParaRPr lang="en-US" sz="1100" dirty="0">
+                      <a:endParaRPr lang="en-US" sz="1050" dirty="0">
                         <a:latin typeface="Microsoft JhengHei" charset="0"/>
                         <a:ea typeface="Microsoft JhengHei" charset="0"/>
                         <a:cs typeface="Microsoft JhengHei" charset="0"/>
@@ -12100,21 +12873,224 @@
                     <a:bodyPr/>
                     <a:lstStyle/>
                     <a:p>
-                      <a:pPr algn="ctr" indent="0" marL="0">
+                      <a:pPr indent="0" marL="0">
                         <a:buNone/>
                       </a:pPr>
                       <a:r>
-                        <a:rPr lang="en-US" sz="1100" b="1" dirty="0">
+                        <a:rPr lang="en-US" sz="1050" dirty="0">
                           <a:solidFill>
-                            <a:srgbClr val="2E5C8A"/>
+                            <a:srgbClr val="1F2933"/>
                           </a:solidFill>
                           <a:latin typeface="Microsoft JhengHei" pitchFamily="34" charset="0"/>
                           <a:ea typeface="Microsoft JhengHei" pitchFamily="34" charset="-122"/>
                           <a:cs typeface="Microsoft JhengHei" pitchFamily="34" charset="-120"/>
                         </a:rPr>
-                        <a:t>業務 B3 B4 B5</a:t>
+                        <a:t>資深技師 ②：裝機／調校隨行</a:t>
                       </a:r>
-                      <a:endParaRPr lang="en-US" sz="1100" dirty="0">
+                      <a:endParaRPr lang="en-US" sz="1050" dirty="0">
+                        <a:latin typeface="Microsoft JhengHei" charset="0"/>
+                        <a:ea typeface="Microsoft JhengHei" charset="0"/>
+                        <a:cs typeface="Microsoft JhengHei" charset="0"/>
+                      </a:endParaRPr>
+                    </a:p>
+                  </a:txBody>
+                  <a:tcPr marL="91440" marR="91440" marT="45720" marB="45720" anchor="ctr">
+                    <a:lnL w="19050" cap="flat" cmpd="sng" algn="ctr">
+                      <a:solidFill>
+                        <a:srgbClr val="FFFFFF"/>
+                      </a:solidFill>
+                      <a:prstDash val="solid"/>
+                      <a:round/>
+                      <a:headEnd type="none" w="med" len="med"/>
+                      <a:tailEnd type="none" w="med" len="med"/>
+                    </a:lnL>
+                    <a:lnR w="19050" cap="flat" cmpd="sng" algn="ctr">
+                      <a:solidFill>
+                        <a:srgbClr val="FFFFFF"/>
+                      </a:solidFill>
+                      <a:prstDash val="solid"/>
+                      <a:round/>
+                      <a:headEnd type="none" w="med" len="med"/>
+                      <a:tailEnd type="none" w="med" len="med"/>
+                    </a:lnR>
+                    <a:lnT w="19050" cap="flat" cmpd="sng" algn="ctr">
+                      <a:solidFill>
+                        <a:srgbClr val="FFFFFF"/>
+                      </a:solidFill>
+                      <a:prstDash val="solid"/>
+                      <a:round/>
+                      <a:headEnd type="none" w="med" len="med"/>
+                      <a:tailEnd type="none" w="med" len="med"/>
+                    </a:lnT>
+                    <a:lnB w="19050" cap="flat" cmpd="sng" algn="ctr">
+                      <a:solidFill>
+                        <a:srgbClr val="FFFFFF"/>
+                      </a:solidFill>
+                      <a:prstDash val="solid"/>
+                      <a:round/>
+                      <a:headEnd type="none" w="med" len="med"/>
+                      <a:tailEnd type="none" w="med" len="med"/>
+                    </a:lnB>
+                    <a:solidFill>
+                      <a:srgbClr val="FDEEE3"/>
+                    </a:solidFill>
+                  </a:tcPr>
+                </a:tc>
+                <a:tc>
+                  <a:txBody>
+                    <a:bodyPr/>
+                    <a:lstStyle/>
+                    <a:p>
+                      <a:pPr indent="0" marL="0">
+                        <a:buNone/>
+                      </a:pPr>
+                      <a:r>
+                        <a:rPr lang="en-US" sz="1050" b="1" dirty="0">
+                          <a:solidFill>
+                            <a:srgbClr val="0F1E33"/>
+                          </a:solidFill>
+                          <a:latin typeface="Microsoft JhengHei" pitchFamily="34" charset="0"/>
+                          <a:ea typeface="Microsoft JhengHei" pitchFamily="34" charset="-122"/>
+                          <a:cs typeface="Microsoft JhengHei" pitchFamily="34" charset="-120"/>
+                        </a:rPr>
+                        <a:t>營業 C D ＋ 技術 Y Z</a:t>
+                      </a:r>
+                      <a:endParaRPr lang="en-US" sz="1050" dirty="0">
+                        <a:latin typeface="Microsoft JhengHei" charset="0"/>
+                        <a:ea typeface="Microsoft JhengHei" charset="0"/>
+                        <a:cs typeface="Microsoft JhengHei" charset="0"/>
+                      </a:endParaRPr>
+                    </a:p>
+                  </a:txBody>
+                  <a:tcPr marL="91440" marR="91440" marT="45720" marB="45720" anchor="ctr">
+                    <a:lnL w="19050" cap="flat" cmpd="sng" algn="ctr">
+                      <a:solidFill>
+                        <a:srgbClr val="FFFFFF"/>
+                      </a:solidFill>
+                      <a:prstDash val="solid"/>
+                      <a:round/>
+                      <a:headEnd type="none" w="med" len="med"/>
+                      <a:tailEnd type="none" w="med" len="med"/>
+                    </a:lnL>
+                    <a:lnR w="19050" cap="flat" cmpd="sng" algn="ctr">
+                      <a:solidFill>
+                        <a:srgbClr val="FFFFFF"/>
+                      </a:solidFill>
+                      <a:prstDash val="solid"/>
+                      <a:round/>
+                      <a:headEnd type="none" w="med" len="med"/>
+                      <a:tailEnd type="none" w="med" len="med"/>
+                    </a:lnR>
+                    <a:lnT w="19050" cap="flat" cmpd="sng" algn="ctr">
+                      <a:solidFill>
+                        <a:srgbClr val="FFFFFF"/>
+                      </a:solidFill>
+                      <a:prstDash val="solid"/>
+                      <a:round/>
+                      <a:headEnd type="none" w="med" len="med"/>
+                      <a:tailEnd type="none" w="med" len="med"/>
+                    </a:lnT>
+                    <a:lnB w="19050" cap="flat" cmpd="sng" algn="ctr">
+                      <a:solidFill>
+                        <a:srgbClr val="FFFFFF"/>
+                      </a:solidFill>
+                      <a:prstDash val="solid"/>
+                      <a:round/>
+                      <a:headEnd type="none" w="med" len="med"/>
+                      <a:tailEnd type="none" w="med" len="med"/>
+                    </a:lnB>
+                  </a:tcPr>
+                </a:tc>
+              </a:tr>
+              <a:tr h="493776">
+                <a:tc>
+                  <a:txBody>
+                    <a:bodyPr/>
+                    <a:lstStyle/>
+                    <a:p>
+                      <a:pPr algn="ctr" indent="0" marL="0">
+                        <a:buNone/>
+                      </a:pPr>
+                      <a:r>
+                        <a:rPr lang="en-US" sz="1150" b="1" dirty="0">
+                          <a:solidFill>
+                            <a:srgbClr val="0F1E33"/>
+                          </a:solidFill>
+                          <a:latin typeface="Microsoft JhengHei" pitchFamily="34" charset="0"/>
+                          <a:ea typeface="Microsoft JhengHei" pitchFamily="34" charset="-122"/>
+                          <a:cs typeface="Microsoft JhengHei" pitchFamily="34" charset="-120"/>
+                        </a:rPr>
+                        <a:t>週三</a:t>
+                      </a:r>
+                      <a:endParaRPr lang="en-US" sz="1150" dirty="0">
+                        <a:latin typeface="Microsoft JhengHei" charset="0"/>
+                        <a:ea typeface="Microsoft JhengHei" charset="0"/>
+                        <a:cs typeface="Microsoft JhengHei" charset="0"/>
+                      </a:endParaRPr>
+                    </a:p>
+                  </a:txBody>
+                  <a:tcPr marL="91440" marR="91440" marT="45720" marB="45720" anchor="ctr">
+                    <a:lnL w="19050" cap="flat" cmpd="sng" algn="ctr">
+                      <a:solidFill>
+                        <a:srgbClr val="FFFFFF"/>
+                      </a:solidFill>
+                      <a:prstDash val="solid"/>
+                      <a:round/>
+                      <a:headEnd type="none" w="med" len="med"/>
+                      <a:tailEnd type="none" w="med" len="med"/>
+                    </a:lnL>
+                    <a:lnR w="19050" cap="flat" cmpd="sng" algn="ctr">
+                      <a:solidFill>
+                        <a:srgbClr val="FFFFFF"/>
+                      </a:solidFill>
+                      <a:prstDash val="solid"/>
+                      <a:round/>
+                      <a:headEnd type="none" w="med" len="med"/>
+                      <a:tailEnd type="none" w="med" len="med"/>
+                    </a:lnR>
+                    <a:lnT w="19050" cap="flat" cmpd="sng" algn="ctr">
+                      <a:solidFill>
+                        <a:srgbClr val="FFFFFF"/>
+                      </a:solidFill>
+                      <a:prstDash val="solid"/>
+                      <a:round/>
+                      <a:headEnd type="none" w="med" len="med"/>
+                      <a:tailEnd type="none" w="med" len="med"/>
+                    </a:lnT>
+                    <a:lnB w="19050" cap="flat" cmpd="sng" algn="ctr">
+                      <a:solidFill>
+                        <a:srgbClr val="FFFFFF"/>
+                      </a:solidFill>
+                      <a:prstDash val="solid"/>
+                      <a:round/>
+                      <a:headEnd type="none" w="med" len="med"/>
+                      <a:tailEnd type="none" w="med" len="med"/>
+                    </a:lnB>
+                    <a:solidFill>
+                      <a:srgbClr val="F4F6F9"/>
+                    </a:solidFill>
+                  </a:tcPr>
+                </a:tc>
+                <a:tc>
+                  <a:txBody>
+                    <a:bodyPr/>
+                    <a:lstStyle/>
+                    <a:p>
+                      <a:pPr indent="0" marL="0">
+                        <a:buNone/>
+                      </a:pPr>
+                      <a:r>
+                        <a:rPr lang="en-US" sz="1050" dirty="0">
+                          <a:solidFill>
+                            <a:srgbClr val="1F2933"/>
+                          </a:solidFill>
+                          <a:latin typeface="Microsoft JhengHei" pitchFamily="34" charset="0"/>
+                          <a:ea typeface="Microsoft JhengHei" pitchFamily="34" charset="-122"/>
+                          <a:cs typeface="Microsoft JhengHei" pitchFamily="34" charset="-120"/>
+                        </a:rPr>
+                        <a:t>資深業務 ③：報價與訂單流程</a:t>
+                      </a:r>
+                      <a:endParaRPr lang="en-US" sz="1050" dirty="0">
                         <a:latin typeface="Microsoft JhengHei" charset="0"/>
                         <a:ea typeface="Microsoft JhengHei" charset="0"/>
                         <a:cs typeface="Microsoft JhengHei" charset="0"/>
@@ -12168,21 +13144,21 @@
                     <a:bodyPr/>
                     <a:lstStyle/>
                     <a:p>
-                      <a:pPr algn="ctr" indent="0" marL="0">
+                      <a:pPr indent="0" marL="0">
                         <a:buNone/>
                       </a:pPr>
                       <a:r>
-                        <a:rPr lang="en-US" sz="1100" b="1" dirty="0">
+                        <a:rPr lang="en-US" sz="1050" dirty="0">
                           <a:solidFill>
-                            <a:srgbClr val="E8762E"/>
+                            <a:srgbClr val="1F2933"/>
                           </a:solidFill>
                           <a:latin typeface="Microsoft JhengHei" pitchFamily="34" charset="0"/>
                           <a:ea typeface="Microsoft JhengHei" pitchFamily="34" charset="-122"/>
                           <a:cs typeface="Microsoft JhengHei" pitchFamily="34" charset="-120"/>
                         </a:rPr>
-                        <a:t>技術 T3 T4</a:t>
+                        <a:t>資深技師 ③：控制器操作教學</a:t>
                       </a:r>
-                      <a:endParaRPr lang="en-US" sz="1100" dirty="0">
+                      <a:endParaRPr lang="en-US" sz="1050" dirty="0">
                         <a:latin typeface="Microsoft JhengHei" charset="0"/>
                         <a:ea typeface="Microsoft JhengHei" charset="0"/>
                         <a:cs typeface="Microsoft JhengHei" charset="0"/>
@@ -12231,14 +13207,79 @@
                     </a:solidFill>
                   </a:tcPr>
                 </a:tc>
-              </a:tr>
-              <a:tr h="658368">
                 <a:tc>
                   <a:txBody>
                     <a:bodyPr/>
                     <a:lstStyle/>
                     <a:p>
                       <a:pPr indent="0" marL="0">
+                        <a:buNone/>
+                      </a:pPr>
+                      <a:r>
+                        <a:rPr lang="en-US" sz="1050" b="1" dirty="0">
+                          <a:solidFill>
+                            <a:srgbClr val="0F1E33"/>
+                          </a:solidFill>
+                          <a:latin typeface="Microsoft JhengHei" pitchFamily="34" charset="0"/>
+                          <a:ea typeface="Microsoft JhengHei" pitchFamily="34" charset="-122"/>
+                          <a:cs typeface="Microsoft JhengHei" pitchFamily="34" charset="-120"/>
+                        </a:rPr>
+                        <a:t>營業 E ＋ 技術 W X</a:t>
+                      </a:r>
+                      <a:endParaRPr lang="en-US" sz="1050" dirty="0">
+                        <a:latin typeface="Microsoft JhengHei" charset="0"/>
+                        <a:ea typeface="Microsoft JhengHei" charset="0"/>
+                        <a:cs typeface="Microsoft JhengHei" charset="0"/>
+                      </a:endParaRPr>
+                    </a:p>
+                  </a:txBody>
+                  <a:tcPr marL="91440" marR="91440" marT="45720" marB="45720" anchor="ctr">
+                    <a:lnL w="19050" cap="flat" cmpd="sng" algn="ctr">
+                      <a:solidFill>
+                        <a:srgbClr val="FFFFFF"/>
+                      </a:solidFill>
+                      <a:prstDash val="solid"/>
+                      <a:round/>
+                      <a:headEnd type="none" w="med" len="med"/>
+                      <a:tailEnd type="none" w="med" len="med"/>
+                    </a:lnL>
+                    <a:lnR w="19050" cap="flat" cmpd="sng" algn="ctr">
+                      <a:solidFill>
+                        <a:srgbClr val="FFFFFF"/>
+                      </a:solidFill>
+                      <a:prstDash val="solid"/>
+                      <a:round/>
+                      <a:headEnd type="none" w="med" len="med"/>
+                      <a:tailEnd type="none" w="med" len="med"/>
+                    </a:lnR>
+                    <a:lnT w="19050" cap="flat" cmpd="sng" algn="ctr">
+                      <a:solidFill>
+                        <a:srgbClr val="FFFFFF"/>
+                      </a:solidFill>
+                      <a:prstDash val="solid"/>
+                      <a:round/>
+                      <a:headEnd type="none" w="med" len="med"/>
+                      <a:tailEnd type="none" w="med" len="med"/>
+                    </a:lnT>
+                    <a:lnB w="19050" cap="flat" cmpd="sng" algn="ctr">
+                      <a:solidFill>
+                        <a:srgbClr val="FFFFFF"/>
+                      </a:solidFill>
+                      <a:prstDash val="solid"/>
+                      <a:round/>
+                      <a:headEnd type="none" w="med" len="med"/>
+                      <a:tailEnd type="none" w="med" len="med"/>
+                    </a:lnB>
+                  </a:tcPr>
+                </a:tc>
+              </a:tr>
+              <a:tr h="493776">
+                <a:tc>
+                  <a:txBody>
+                    <a:bodyPr/>
+                    <a:lstStyle/>
+                    <a:p>
+                      <a:pPr algn="ctr" indent="0" marL="0">
                         <a:buNone/>
                       </a:pPr>
                       <a:r>
@@ -12250,7 +13291,7 @@
                           <a:ea typeface="Microsoft JhengHei" pitchFamily="34" charset="-122"/>
                           <a:cs typeface="Microsoft JhengHei" pitchFamily="34" charset="-120"/>
                         </a:rPr>
-                        <a:t>B  技術服務部（保養／裝機）</a:t>
+                        <a:t>週四</a:t>
                       </a:r>
                       <a:endParaRPr lang="en-US" sz="1150" dirty="0">
                         <a:latin typeface="Microsoft JhengHei" charset="0"/>
@@ -12296,6 +13337,9 @@
                       <a:headEnd type="none" w="med" len="med"/>
                       <a:tailEnd type="none" w="med" len="med"/>
                     </a:lnB>
+                    <a:solidFill>
+                      <a:srgbClr val="F4F6F9"/>
+                    </a:solidFill>
                   </a:tcPr>
                 </a:tc>
                 <a:tc>
@@ -12307,17 +13351,17 @@
                         <a:buNone/>
                       </a:pPr>
                       <a:r>
-                        <a:rPr lang="en-US" sz="1000" dirty="0">
+                        <a:rPr lang="en-US" sz="1050" dirty="0">
                           <a:solidFill>
-                            <a:srgbClr val="6B7785"/>
+                            <a:srgbClr val="1F2933"/>
                           </a:solidFill>
                           <a:latin typeface="Microsoft JhengHei" pitchFamily="34" charset="0"/>
                           <a:ea typeface="Microsoft JhengHei" pitchFamily="34" charset="-122"/>
                           <a:cs typeface="Microsoft JhengHei" pitchFamily="34" charset="-120"/>
                         </a:rPr>
-                        <a:t>技術主管</a:t>
+                        <a:t>資深業務 ④：客戶需求與提案</a:t>
                       </a:r>
-                      <a:endParaRPr lang="en-US" sz="1000" dirty="0">
+                      <a:endParaRPr lang="en-US" sz="1050" dirty="0">
                         <a:latin typeface="Microsoft JhengHei" charset="0"/>
                         <a:ea typeface="Microsoft JhengHei" charset="0"/>
                         <a:cs typeface="Microsoft JhengHei" charset="0"/>
@@ -12361,6 +13405,9 @@
                       <a:headEnd type="none" w="med" len="med"/>
                       <a:tailEnd type="none" w="med" len="med"/>
                     </a:lnB>
+                    <a:solidFill>
+                      <a:srgbClr val="E7EFF8"/>
+                    </a:solidFill>
                   </a:tcPr>
                 </a:tc>
                 <a:tc>
@@ -12368,21 +13415,21 @@
                     <a:bodyPr/>
                     <a:lstStyle/>
                     <a:p>
-                      <a:pPr algn="ctr" indent="0" marL="0">
+                      <a:pPr indent="0" marL="0">
                         <a:buNone/>
                       </a:pPr>
                       <a:r>
-                        <a:rPr lang="en-US" sz="1100" b="1" dirty="0">
+                        <a:rPr lang="en-US" sz="1050" dirty="0">
                           <a:solidFill>
-                            <a:srgbClr val="E8762E"/>
+                            <a:srgbClr val="1F2933"/>
                           </a:solidFill>
                           <a:latin typeface="Microsoft JhengHei" pitchFamily="34" charset="0"/>
                           <a:ea typeface="Microsoft JhengHei" pitchFamily="34" charset="-122"/>
                           <a:cs typeface="Microsoft JhengHei" pitchFamily="34" charset="-120"/>
                         </a:rPr>
-                        <a:t>技術 T1 T2</a:t>
+                        <a:t>資深技師 ④：零件備品與服務單</a:t>
                       </a:r>
-                      <a:endParaRPr lang="en-US" sz="1100" dirty="0">
+                      <a:endParaRPr lang="en-US" sz="1050" dirty="0">
                         <a:latin typeface="Microsoft JhengHei" charset="0"/>
                         <a:ea typeface="Microsoft JhengHei" charset="0"/>
                         <a:cs typeface="Microsoft JhengHei" charset="0"/>
@@ -12436,21 +13483,156 @@
                     <a:bodyPr/>
                     <a:lstStyle/>
                     <a:p>
-                      <a:pPr algn="ctr" indent="0" marL="0">
+                      <a:pPr indent="0" marL="0">
                         <a:buNone/>
                       </a:pPr>
                       <a:r>
-                        <a:rPr lang="en-US" sz="1100" b="1" dirty="0">
+                        <a:rPr lang="en-US" sz="1050" b="1" dirty="0">
                           <a:solidFill>
-                            <a:srgbClr val="2E5C8A"/>
+                            <a:srgbClr val="0F1E33"/>
                           </a:solidFill>
                           <a:latin typeface="Microsoft JhengHei" pitchFamily="34" charset="0"/>
                           <a:ea typeface="Microsoft JhengHei" pitchFamily="34" charset="-122"/>
                           <a:cs typeface="Microsoft JhengHei" pitchFamily="34" charset="-120"/>
                         </a:rPr>
-                        <a:t>業務 B1 B2</a:t>
+                        <a:t>營業 A B C ＋ 技術 Y Z</a:t>
                       </a:r>
-                      <a:endParaRPr lang="en-US" sz="1100" dirty="0">
+                      <a:endParaRPr lang="en-US" sz="1050" dirty="0">
+                        <a:latin typeface="Microsoft JhengHei" charset="0"/>
+                        <a:ea typeface="Microsoft JhengHei" charset="0"/>
+                        <a:cs typeface="Microsoft JhengHei" charset="0"/>
+                      </a:endParaRPr>
+                    </a:p>
+                  </a:txBody>
+                  <a:tcPr marL="91440" marR="91440" marT="45720" marB="45720" anchor="ctr">
+                    <a:lnL w="19050" cap="flat" cmpd="sng" algn="ctr">
+                      <a:solidFill>
+                        <a:srgbClr val="FFFFFF"/>
+                      </a:solidFill>
+                      <a:prstDash val="solid"/>
+                      <a:round/>
+                      <a:headEnd type="none" w="med" len="med"/>
+                      <a:tailEnd type="none" w="med" len="med"/>
+                    </a:lnL>
+                    <a:lnR w="19050" cap="flat" cmpd="sng" algn="ctr">
+                      <a:solidFill>
+                        <a:srgbClr val="FFFFFF"/>
+                      </a:solidFill>
+                      <a:prstDash val="solid"/>
+                      <a:round/>
+                      <a:headEnd type="none" w="med" len="med"/>
+                      <a:tailEnd type="none" w="med" len="med"/>
+                    </a:lnR>
+                    <a:lnT w="19050" cap="flat" cmpd="sng" algn="ctr">
+                      <a:solidFill>
+                        <a:srgbClr val="FFFFFF"/>
+                      </a:solidFill>
+                      <a:prstDash val="solid"/>
+                      <a:round/>
+                      <a:headEnd type="none" w="med" len="med"/>
+                      <a:tailEnd type="none" w="med" len="med"/>
+                    </a:lnT>
+                    <a:lnB w="19050" cap="flat" cmpd="sng" algn="ctr">
+                      <a:solidFill>
+                        <a:srgbClr val="FFFFFF"/>
+                      </a:solidFill>
+                      <a:prstDash val="solid"/>
+                      <a:round/>
+                      <a:headEnd type="none" w="med" len="med"/>
+                      <a:tailEnd type="none" w="med" len="med"/>
+                    </a:lnB>
+                  </a:tcPr>
+                </a:tc>
+              </a:tr>
+              <a:tr h="493776">
+                <a:tc>
+                  <a:txBody>
+                    <a:bodyPr/>
+                    <a:lstStyle/>
+                    <a:p>
+                      <a:pPr algn="ctr" indent="0" marL="0">
+                        <a:buNone/>
+                      </a:pPr>
+                      <a:r>
+                        <a:rPr lang="en-US" sz="1150" b="1" dirty="0">
+                          <a:solidFill>
+                            <a:srgbClr val="0F1E33"/>
+                          </a:solidFill>
+                          <a:latin typeface="Microsoft JhengHei" pitchFamily="34" charset="0"/>
+                          <a:ea typeface="Microsoft JhengHei" pitchFamily="34" charset="-122"/>
+                          <a:cs typeface="Microsoft JhengHei" pitchFamily="34" charset="-120"/>
+                        </a:rPr>
+                        <a:t>週五</a:t>
+                      </a:r>
+                      <a:endParaRPr lang="en-US" sz="1150" dirty="0">
+                        <a:latin typeface="Microsoft JhengHei" charset="0"/>
+                        <a:ea typeface="Microsoft JhengHei" charset="0"/>
+                        <a:cs typeface="Microsoft JhengHei" charset="0"/>
+                      </a:endParaRPr>
+                    </a:p>
+                  </a:txBody>
+                  <a:tcPr marL="91440" marR="91440" marT="45720" marB="45720" anchor="ctr">
+                    <a:lnL w="19050" cap="flat" cmpd="sng" algn="ctr">
+                      <a:solidFill>
+                        <a:srgbClr val="FFFFFF"/>
+                      </a:solidFill>
+                      <a:prstDash val="solid"/>
+                      <a:round/>
+                      <a:headEnd type="none" w="med" len="med"/>
+                      <a:tailEnd type="none" w="med" len="med"/>
+                    </a:lnL>
+                    <a:lnR w="19050" cap="flat" cmpd="sng" algn="ctr">
+                      <a:solidFill>
+                        <a:srgbClr val="FFFFFF"/>
+                      </a:solidFill>
+                      <a:prstDash val="solid"/>
+                      <a:round/>
+                      <a:headEnd type="none" w="med" len="med"/>
+                      <a:tailEnd type="none" w="med" len="med"/>
+                    </a:lnR>
+                    <a:lnT w="19050" cap="flat" cmpd="sng" algn="ctr">
+                      <a:solidFill>
+                        <a:srgbClr val="FFFFFF"/>
+                      </a:solidFill>
+                      <a:prstDash val="solid"/>
+                      <a:round/>
+                      <a:headEnd type="none" w="med" len="med"/>
+                      <a:tailEnd type="none" w="med" len="med"/>
+                    </a:lnT>
+                    <a:lnB w="19050" cap="flat" cmpd="sng" algn="ctr">
+                      <a:solidFill>
+                        <a:srgbClr val="FFFFFF"/>
+                      </a:solidFill>
+                      <a:prstDash val="solid"/>
+                      <a:round/>
+                      <a:headEnd type="none" w="med" len="med"/>
+                      <a:tailEnd type="none" w="med" len="med"/>
+                    </a:lnB>
+                    <a:solidFill>
+                      <a:srgbClr val="F4F6F9"/>
+                    </a:solidFill>
+                  </a:tcPr>
+                </a:tc>
+                <a:tc>
+                  <a:txBody>
+                    <a:bodyPr/>
+                    <a:lstStyle/>
+                    <a:p>
+                      <a:pPr indent="0" marL="0">
+                        <a:buNone/>
+                      </a:pPr>
+                      <a:r>
+                        <a:rPr lang="en-US" sz="1050" dirty="0">
+                          <a:solidFill>
+                            <a:srgbClr val="1F2933"/>
+                          </a:solidFill>
+                          <a:latin typeface="Microsoft JhengHei" pitchFamily="34" charset="0"/>
+                          <a:ea typeface="Microsoft JhengHei" pitchFamily="34" charset="-122"/>
+                          <a:cs typeface="Microsoft JhengHei" pitchFamily="34" charset="-120"/>
+                        </a:rPr>
+                        <a:t>營業主管：週回顧、護照確認</a:t>
+                      </a:r>
+                      <a:endParaRPr lang="en-US" sz="1050" dirty="0">
                         <a:latin typeface="Microsoft JhengHei" charset="0"/>
                         <a:ea typeface="Microsoft JhengHei" charset="0"/>
                         <a:cs typeface="Microsoft JhengHei" charset="0"/>
@@ -12504,21 +13686,21 @@
                     <a:bodyPr/>
                     <a:lstStyle/>
                     <a:p>
-                      <a:pPr algn="ctr" indent="0" marL="0">
+                      <a:pPr indent="0" marL="0">
                         <a:buNone/>
                       </a:pPr>
                       <a:r>
-                        <a:rPr lang="en-US" sz="1100" b="1" dirty="0">
+                        <a:rPr lang="en-US" sz="1050" dirty="0">
                           <a:solidFill>
-                            <a:srgbClr val="2E5C8A"/>
+                            <a:srgbClr val="1F2933"/>
                           </a:solidFill>
                           <a:latin typeface="Microsoft JhengHei" pitchFamily="34" charset="0"/>
                           <a:ea typeface="Microsoft JhengHei" pitchFamily="34" charset="-122"/>
                           <a:cs typeface="Microsoft JhengHei" pitchFamily="34" charset="-120"/>
                         </a:rPr>
-                        <a:t>業務 B3 B4 B5</a:t>
+                        <a:t>技術主管：週回顧、護照確認</a:t>
                       </a:r>
-                      <a:endParaRPr lang="en-US" sz="1100" dirty="0">
+                      <a:endParaRPr lang="en-US" sz="1050" dirty="0">
                         <a:latin typeface="Microsoft JhengHei" charset="0"/>
                         <a:ea typeface="Microsoft JhengHei" charset="0"/>
                         <a:cs typeface="Microsoft JhengHei" charset="0"/>
@@ -12563,75 +13745,8 @@
                       <a:tailEnd type="none" w="med" len="med"/>
                     </a:lnB>
                     <a:solidFill>
-                      <a:srgbClr val="E7EFF8"/>
+                      <a:srgbClr val="FDEEE3"/>
                     </a:solidFill>
-                  </a:tcPr>
-                </a:tc>
-              </a:tr>
-              <a:tr h="658368">
-                <a:tc>
-                  <a:txBody>
-                    <a:bodyPr/>
-                    <a:lstStyle/>
-                    <a:p>
-                      <a:pPr indent="0" marL="0">
-                        <a:buNone/>
-                      </a:pPr>
-                      <a:r>
-                        <a:rPr lang="en-US" sz="1150" b="1" dirty="0">
-                          <a:solidFill>
-                            <a:srgbClr val="0F1E33"/>
-                          </a:solidFill>
-                          <a:latin typeface="Microsoft JhengHei" pitchFamily="34" charset="0"/>
-                          <a:ea typeface="Microsoft JhengHei" pitchFamily="34" charset="-122"/>
-                          <a:cs typeface="Microsoft JhengHei" pitchFamily="34" charset="-120"/>
-                        </a:rPr>
-                        <a:t>C  零件倉／內勤（料號／報價）</a:t>
-                      </a:r>
-                      <a:endParaRPr lang="en-US" sz="1150" dirty="0">
-                        <a:latin typeface="Microsoft JhengHei" charset="0"/>
-                        <a:ea typeface="Microsoft JhengHei" charset="0"/>
-                        <a:cs typeface="Microsoft JhengHei" charset="0"/>
-                      </a:endParaRPr>
-                    </a:p>
-                  </a:txBody>
-                  <a:tcPr marL="91440" marR="91440" marT="45720" marB="45720" anchor="ctr">
-                    <a:lnL w="19050" cap="flat" cmpd="sng" algn="ctr">
-                      <a:solidFill>
-                        <a:srgbClr val="FFFFFF"/>
-                      </a:solidFill>
-                      <a:prstDash val="solid"/>
-                      <a:round/>
-                      <a:headEnd type="none" w="med" len="med"/>
-                      <a:tailEnd type="none" w="med" len="med"/>
-                    </a:lnL>
-                    <a:lnR w="19050" cap="flat" cmpd="sng" algn="ctr">
-                      <a:solidFill>
-                        <a:srgbClr val="FFFFFF"/>
-                      </a:solidFill>
-                      <a:prstDash val="solid"/>
-                      <a:round/>
-                      <a:headEnd type="none" w="med" len="med"/>
-                      <a:tailEnd type="none" w="med" len="med"/>
-                    </a:lnR>
-                    <a:lnT w="19050" cap="flat" cmpd="sng" algn="ctr">
-                      <a:solidFill>
-                        <a:srgbClr val="FFFFFF"/>
-                      </a:solidFill>
-                      <a:prstDash val="solid"/>
-                      <a:round/>
-                      <a:headEnd type="none" w="med" len="med"/>
-                      <a:tailEnd type="none" w="med" len="med"/>
-                    </a:lnT>
-                    <a:lnB w="19050" cap="flat" cmpd="sng" algn="ctr">
-                      <a:solidFill>
-                        <a:srgbClr val="FFFFFF"/>
-                      </a:solidFill>
-                      <a:prstDash val="solid"/>
-                      <a:round/>
-                      <a:headEnd type="none" w="med" len="med"/>
-                      <a:tailEnd type="none" w="med" len="med"/>
-                    </a:lnB>
                   </a:tcPr>
                 </a:tc>
                 <a:tc>
@@ -12643,17 +13758,17 @@
                         <a:buNone/>
                       </a:pPr>
                       <a:r>
-                        <a:rPr lang="en-US" sz="1000" dirty="0">
+                        <a:rPr lang="en-US" sz="1050" b="1" dirty="0">
                           <a:solidFill>
-                            <a:srgbClr val="6B7785"/>
+                            <a:srgbClr val="0F1E33"/>
                           </a:solidFill>
                           <a:latin typeface="Microsoft JhengHei" pitchFamily="34" charset="0"/>
                           <a:ea typeface="Microsoft JhengHei" pitchFamily="34" charset="-122"/>
                           <a:cs typeface="Microsoft JhengHei" pitchFamily="34" charset="-120"/>
                         </a:rPr>
-                        <a:t>倉管／內勤主管</a:t>
+                        <a:t>全員（A–E、W–Z）</a:t>
                       </a:r>
-                      <a:endParaRPr lang="en-US" sz="1000" dirty="0">
+                      <a:endParaRPr lang="en-US" sz="1050" dirty="0">
                         <a:latin typeface="Microsoft JhengHei" charset="0"/>
                         <a:ea typeface="Microsoft JhengHei" charset="0"/>
                         <a:cs typeface="Microsoft JhengHei" charset="0"/>
@@ -12699,546 +13814,6 @@
                     </a:lnB>
                   </a:tcPr>
                 </a:tc>
-                <a:tc>
-                  <a:txBody>
-                    <a:bodyPr/>
-                    <a:lstStyle/>
-                    <a:p>
-                      <a:pPr algn="ctr" indent="0" marL="0">
-                        <a:buNone/>
-                      </a:pPr>
-                      <a:r>
-                        <a:rPr lang="en-US" sz="1100" b="1" dirty="0">
-                          <a:solidFill>
-                            <a:srgbClr val="2E5C8A"/>
-                          </a:solidFill>
-                          <a:latin typeface="Microsoft JhengHei" pitchFamily="34" charset="0"/>
-                          <a:ea typeface="Microsoft JhengHei" pitchFamily="34" charset="-122"/>
-                          <a:cs typeface="Microsoft JhengHei" pitchFamily="34" charset="-120"/>
-                        </a:rPr>
-                        <a:t>業務 B3 B4 B5</a:t>
-                      </a:r>
-                      <a:endParaRPr lang="en-US" sz="1100" dirty="0">
-                        <a:latin typeface="Microsoft JhengHei" charset="0"/>
-                        <a:ea typeface="Microsoft JhengHei" charset="0"/>
-                        <a:cs typeface="Microsoft JhengHei" charset="0"/>
-                      </a:endParaRPr>
-                    </a:p>
-                  </a:txBody>
-                  <a:tcPr marL="91440" marR="91440" marT="45720" marB="45720" anchor="ctr">
-                    <a:lnL w="19050" cap="flat" cmpd="sng" algn="ctr">
-                      <a:solidFill>
-                        <a:srgbClr val="FFFFFF"/>
-                      </a:solidFill>
-                      <a:prstDash val="solid"/>
-                      <a:round/>
-                      <a:headEnd type="none" w="med" len="med"/>
-                      <a:tailEnd type="none" w="med" len="med"/>
-                    </a:lnL>
-                    <a:lnR w="19050" cap="flat" cmpd="sng" algn="ctr">
-                      <a:solidFill>
-                        <a:srgbClr val="FFFFFF"/>
-                      </a:solidFill>
-                      <a:prstDash val="solid"/>
-                      <a:round/>
-                      <a:headEnd type="none" w="med" len="med"/>
-                      <a:tailEnd type="none" w="med" len="med"/>
-                    </a:lnR>
-                    <a:lnT w="19050" cap="flat" cmpd="sng" algn="ctr">
-                      <a:solidFill>
-                        <a:srgbClr val="FFFFFF"/>
-                      </a:solidFill>
-                      <a:prstDash val="solid"/>
-                      <a:round/>
-                      <a:headEnd type="none" w="med" len="med"/>
-                      <a:tailEnd type="none" w="med" len="med"/>
-                    </a:lnT>
-                    <a:lnB w="19050" cap="flat" cmpd="sng" algn="ctr">
-                      <a:solidFill>
-                        <a:srgbClr val="FFFFFF"/>
-                      </a:solidFill>
-                      <a:prstDash val="solid"/>
-                      <a:round/>
-                      <a:headEnd type="none" w="med" len="med"/>
-                      <a:tailEnd type="none" w="med" len="med"/>
-                    </a:lnB>
-                    <a:solidFill>
-                      <a:srgbClr val="E7EFF8"/>
-                    </a:solidFill>
-                  </a:tcPr>
-                </a:tc>
-                <a:tc>
-                  <a:txBody>
-                    <a:bodyPr/>
-                    <a:lstStyle/>
-                    <a:p>
-                      <a:pPr algn="ctr" indent="0" marL="0">
-                        <a:buNone/>
-                      </a:pPr>
-                      <a:r>
-                        <a:rPr lang="en-US" sz="1100" b="1" dirty="0">
-                          <a:solidFill>
-                            <a:srgbClr val="E8762E"/>
-                          </a:solidFill>
-                          <a:latin typeface="Microsoft JhengHei" pitchFamily="34" charset="0"/>
-                          <a:ea typeface="Microsoft JhengHei" pitchFamily="34" charset="-122"/>
-                          <a:cs typeface="Microsoft JhengHei" pitchFamily="34" charset="-120"/>
-                        </a:rPr>
-                        <a:t>技術 T1 T2</a:t>
-                      </a:r>
-                      <a:endParaRPr lang="en-US" sz="1100" dirty="0">
-                        <a:latin typeface="Microsoft JhengHei" charset="0"/>
-                        <a:ea typeface="Microsoft JhengHei" charset="0"/>
-                        <a:cs typeface="Microsoft JhengHei" charset="0"/>
-                      </a:endParaRPr>
-                    </a:p>
-                  </a:txBody>
-                  <a:tcPr marL="91440" marR="91440" marT="45720" marB="45720" anchor="ctr">
-                    <a:lnL w="19050" cap="flat" cmpd="sng" algn="ctr">
-                      <a:solidFill>
-                        <a:srgbClr val="FFFFFF"/>
-                      </a:solidFill>
-                      <a:prstDash val="solid"/>
-                      <a:round/>
-                      <a:headEnd type="none" w="med" len="med"/>
-                      <a:tailEnd type="none" w="med" len="med"/>
-                    </a:lnL>
-                    <a:lnR w="19050" cap="flat" cmpd="sng" algn="ctr">
-                      <a:solidFill>
-                        <a:srgbClr val="FFFFFF"/>
-                      </a:solidFill>
-                      <a:prstDash val="solid"/>
-                      <a:round/>
-                      <a:headEnd type="none" w="med" len="med"/>
-                      <a:tailEnd type="none" w="med" len="med"/>
-                    </a:lnR>
-                    <a:lnT w="19050" cap="flat" cmpd="sng" algn="ctr">
-                      <a:solidFill>
-                        <a:srgbClr val="FFFFFF"/>
-                      </a:solidFill>
-                      <a:prstDash val="solid"/>
-                      <a:round/>
-                      <a:headEnd type="none" w="med" len="med"/>
-                      <a:tailEnd type="none" w="med" len="med"/>
-                    </a:lnT>
-                    <a:lnB w="19050" cap="flat" cmpd="sng" algn="ctr">
-                      <a:solidFill>
-                        <a:srgbClr val="FFFFFF"/>
-                      </a:solidFill>
-                      <a:prstDash val="solid"/>
-                      <a:round/>
-                      <a:headEnd type="none" w="med" len="med"/>
-                      <a:tailEnd type="none" w="med" len="med"/>
-                    </a:lnB>
-                    <a:solidFill>
-                      <a:srgbClr val="FDEEE3"/>
-                    </a:solidFill>
-                  </a:tcPr>
-                </a:tc>
-                <a:tc>
-                  <a:txBody>
-                    <a:bodyPr/>
-                    <a:lstStyle/>
-                    <a:p>
-                      <a:pPr algn="ctr" indent="0" marL="0">
-                        <a:buNone/>
-                      </a:pPr>
-                      <a:r>
-                        <a:rPr lang="en-US" sz="1100" b="1" dirty="0">
-                          <a:solidFill>
-                            <a:srgbClr val="2E5C8A"/>
-                          </a:solidFill>
-                          <a:latin typeface="Microsoft JhengHei" pitchFamily="34" charset="0"/>
-                          <a:ea typeface="Microsoft JhengHei" pitchFamily="34" charset="-122"/>
-                          <a:cs typeface="Microsoft JhengHei" pitchFamily="34" charset="-120"/>
-                        </a:rPr>
-                        <a:t>業務 B1 B2</a:t>
-                      </a:r>
-                      <a:endParaRPr lang="en-US" sz="1100" dirty="0">
-                        <a:latin typeface="Microsoft JhengHei" charset="0"/>
-                        <a:ea typeface="Microsoft JhengHei" charset="0"/>
-                        <a:cs typeface="Microsoft JhengHei" charset="0"/>
-                      </a:endParaRPr>
-                    </a:p>
-                  </a:txBody>
-                  <a:tcPr marL="91440" marR="91440" marT="45720" marB="45720" anchor="ctr">
-                    <a:lnL w="19050" cap="flat" cmpd="sng" algn="ctr">
-                      <a:solidFill>
-                        <a:srgbClr val="FFFFFF"/>
-                      </a:solidFill>
-                      <a:prstDash val="solid"/>
-                      <a:round/>
-                      <a:headEnd type="none" w="med" len="med"/>
-                      <a:tailEnd type="none" w="med" len="med"/>
-                    </a:lnL>
-                    <a:lnR w="19050" cap="flat" cmpd="sng" algn="ctr">
-                      <a:solidFill>
-                        <a:srgbClr val="FFFFFF"/>
-                      </a:solidFill>
-                      <a:prstDash val="solid"/>
-                      <a:round/>
-                      <a:headEnd type="none" w="med" len="med"/>
-                      <a:tailEnd type="none" w="med" len="med"/>
-                    </a:lnR>
-                    <a:lnT w="19050" cap="flat" cmpd="sng" algn="ctr">
-                      <a:solidFill>
-                        <a:srgbClr val="FFFFFF"/>
-                      </a:solidFill>
-                      <a:prstDash val="solid"/>
-                      <a:round/>
-                      <a:headEnd type="none" w="med" len="med"/>
-                      <a:tailEnd type="none" w="med" len="med"/>
-                    </a:lnT>
-                    <a:lnB w="19050" cap="flat" cmpd="sng" algn="ctr">
-                      <a:solidFill>
-                        <a:srgbClr val="FFFFFF"/>
-                      </a:solidFill>
-                      <a:prstDash val="solid"/>
-                      <a:round/>
-                      <a:headEnd type="none" w="med" len="med"/>
-                      <a:tailEnd type="none" w="med" len="med"/>
-                    </a:lnB>
-                    <a:solidFill>
-                      <a:srgbClr val="E7EFF8"/>
-                    </a:solidFill>
-                  </a:tcPr>
-                </a:tc>
-              </a:tr>
-              <a:tr h="658368">
-                <a:tc>
-                  <a:txBody>
-                    <a:bodyPr/>
-                    <a:lstStyle/>
-                    <a:p>
-                      <a:pPr indent="0" marL="0">
-                        <a:buNone/>
-                      </a:pPr>
-                      <a:r>
-                        <a:rPr lang="en-US" sz="1150" b="1" dirty="0">
-                          <a:solidFill>
-                            <a:srgbClr val="0F1E33"/>
-                          </a:solidFill>
-                          <a:latin typeface="Microsoft JhengHei" pitchFamily="34" charset="0"/>
-                          <a:ea typeface="Microsoft JhengHei" pitchFamily="34" charset="-122"/>
-                          <a:cs typeface="Microsoft JhengHei" pitchFamily="34" charset="-120"/>
-                        </a:rPr>
-                        <a:t>D  業務部（隨訪／客戶需求）</a:t>
-                      </a:r>
-                      <a:endParaRPr lang="en-US" sz="1150" dirty="0">
-                        <a:latin typeface="Microsoft JhengHei" charset="0"/>
-                        <a:ea typeface="Microsoft JhengHei" charset="0"/>
-                        <a:cs typeface="Microsoft JhengHei" charset="0"/>
-                      </a:endParaRPr>
-                    </a:p>
-                  </a:txBody>
-                  <a:tcPr marL="91440" marR="91440" marT="45720" marB="45720" anchor="ctr">
-                    <a:lnL w="19050" cap="flat" cmpd="sng" algn="ctr">
-                      <a:solidFill>
-                        <a:srgbClr val="FFFFFF"/>
-                      </a:solidFill>
-                      <a:prstDash val="solid"/>
-                      <a:round/>
-                      <a:headEnd type="none" w="med" len="med"/>
-                      <a:tailEnd type="none" w="med" len="med"/>
-                    </a:lnL>
-                    <a:lnR w="19050" cap="flat" cmpd="sng" algn="ctr">
-                      <a:solidFill>
-                        <a:srgbClr val="FFFFFF"/>
-                      </a:solidFill>
-                      <a:prstDash val="solid"/>
-                      <a:round/>
-                      <a:headEnd type="none" w="med" len="med"/>
-                      <a:tailEnd type="none" w="med" len="med"/>
-                    </a:lnR>
-                    <a:lnT w="19050" cap="flat" cmpd="sng" algn="ctr">
-                      <a:solidFill>
-                        <a:srgbClr val="FFFFFF"/>
-                      </a:solidFill>
-                      <a:prstDash val="solid"/>
-                      <a:round/>
-                      <a:headEnd type="none" w="med" len="med"/>
-                      <a:tailEnd type="none" w="med" len="med"/>
-                    </a:lnT>
-                    <a:lnB w="19050" cap="flat" cmpd="sng" algn="ctr">
-                      <a:solidFill>
-                        <a:srgbClr val="FFFFFF"/>
-                      </a:solidFill>
-                      <a:prstDash val="solid"/>
-                      <a:round/>
-                      <a:headEnd type="none" w="med" len="med"/>
-                      <a:tailEnd type="none" w="med" len="med"/>
-                    </a:lnB>
-                  </a:tcPr>
-                </a:tc>
-                <a:tc>
-                  <a:txBody>
-                    <a:bodyPr/>
-                    <a:lstStyle/>
-                    <a:p>
-                      <a:pPr indent="0" marL="0">
-                        <a:buNone/>
-                      </a:pPr>
-                      <a:r>
-                        <a:rPr lang="en-US" sz="1000" dirty="0">
-                          <a:solidFill>
-                            <a:srgbClr val="6B7785"/>
-                          </a:solidFill>
-                          <a:latin typeface="Microsoft JhengHei" pitchFamily="34" charset="0"/>
-                          <a:ea typeface="Microsoft JhengHei" pitchFamily="34" charset="-122"/>
-                          <a:cs typeface="Microsoft JhengHei" pitchFamily="34" charset="-120"/>
-                        </a:rPr>
-                        <a:t>業務主管</a:t>
-                      </a:r>
-                      <a:endParaRPr lang="en-US" sz="1000" dirty="0">
-                        <a:latin typeface="Microsoft JhengHei" charset="0"/>
-                        <a:ea typeface="Microsoft JhengHei" charset="0"/>
-                        <a:cs typeface="Microsoft JhengHei" charset="0"/>
-                      </a:endParaRPr>
-                    </a:p>
-                  </a:txBody>
-                  <a:tcPr marL="91440" marR="91440" marT="45720" marB="45720" anchor="ctr">
-                    <a:lnL w="19050" cap="flat" cmpd="sng" algn="ctr">
-                      <a:solidFill>
-                        <a:srgbClr val="FFFFFF"/>
-                      </a:solidFill>
-                      <a:prstDash val="solid"/>
-                      <a:round/>
-                      <a:headEnd type="none" w="med" len="med"/>
-                      <a:tailEnd type="none" w="med" len="med"/>
-                    </a:lnL>
-                    <a:lnR w="19050" cap="flat" cmpd="sng" algn="ctr">
-                      <a:solidFill>
-                        <a:srgbClr val="FFFFFF"/>
-                      </a:solidFill>
-                      <a:prstDash val="solid"/>
-                      <a:round/>
-                      <a:headEnd type="none" w="med" len="med"/>
-                      <a:tailEnd type="none" w="med" len="med"/>
-                    </a:lnR>
-                    <a:lnT w="19050" cap="flat" cmpd="sng" algn="ctr">
-                      <a:solidFill>
-                        <a:srgbClr val="FFFFFF"/>
-                      </a:solidFill>
-                      <a:prstDash val="solid"/>
-                      <a:round/>
-                      <a:headEnd type="none" w="med" len="med"/>
-                      <a:tailEnd type="none" w="med" len="med"/>
-                    </a:lnT>
-                    <a:lnB w="19050" cap="flat" cmpd="sng" algn="ctr">
-                      <a:solidFill>
-                        <a:srgbClr val="FFFFFF"/>
-                      </a:solidFill>
-                      <a:prstDash val="solid"/>
-                      <a:round/>
-                      <a:headEnd type="none" w="med" len="med"/>
-                      <a:tailEnd type="none" w="med" len="med"/>
-                    </a:lnB>
-                  </a:tcPr>
-                </a:tc>
-                <a:tc>
-                  <a:txBody>
-                    <a:bodyPr/>
-                    <a:lstStyle/>
-                    <a:p>
-                      <a:pPr algn="ctr" indent="0" marL="0">
-                        <a:buNone/>
-                      </a:pPr>
-                      <a:r>
-                        <a:rPr lang="en-US" sz="1100" b="1" dirty="0">
-                          <a:solidFill>
-                            <a:srgbClr val="E8762E"/>
-                          </a:solidFill>
-                          <a:latin typeface="Microsoft JhengHei" pitchFamily="34" charset="0"/>
-                          <a:ea typeface="Microsoft JhengHei" pitchFamily="34" charset="-122"/>
-                          <a:cs typeface="Microsoft JhengHei" pitchFamily="34" charset="-120"/>
-                        </a:rPr>
-                        <a:t>技術 T3 T4</a:t>
-                      </a:r>
-                      <a:endParaRPr lang="en-US" sz="1100" dirty="0">
-                        <a:latin typeface="Microsoft JhengHei" charset="0"/>
-                        <a:ea typeface="Microsoft JhengHei" charset="0"/>
-                        <a:cs typeface="Microsoft JhengHei" charset="0"/>
-                      </a:endParaRPr>
-                    </a:p>
-                  </a:txBody>
-                  <a:tcPr marL="91440" marR="91440" marT="45720" marB="45720" anchor="ctr">
-                    <a:lnL w="19050" cap="flat" cmpd="sng" algn="ctr">
-                      <a:solidFill>
-                        <a:srgbClr val="FFFFFF"/>
-                      </a:solidFill>
-                      <a:prstDash val="solid"/>
-                      <a:round/>
-                      <a:headEnd type="none" w="med" len="med"/>
-                      <a:tailEnd type="none" w="med" len="med"/>
-                    </a:lnL>
-                    <a:lnR w="19050" cap="flat" cmpd="sng" algn="ctr">
-                      <a:solidFill>
-                        <a:srgbClr val="FFFFFF"/>
-                      </a:solidFill>
-                      <a:prstDash val="solid"/>
-                      <a:round/>
-                      <a:headEnd type="none" w="med" len="med"/>
-                      <a:tailEnd type="none" w="med" len="med"/>
-                    </a:lnR>
-                    <a:lnT w="19050" cap="flat" cmpd="sng" algn="ctr">
-                      <a:solidFill>
-                        <a:srgbClr val="FFFFFF"/>
-                      </a:solidFill>
-                      <a:prstDash val="solid"/>
-                      <a:round/>
-                      <a:headEnd type="none" w="med" len="med"/>
-                      <a:tailEnd type="none" w="med" len="med"/>
-                    </a:lnT>
-                    <a:lnB w="19050" cap="flat" cmpd="sng" algn="ctr">
-                      <a:solidFill>
-                        <a:srgbClr val="FFFFFF"/>
-                      </a:solidFill>
-                      <a:prstDash val="solid"/>
-                      <a:round/>
-                      <a:headEnd type="none" w="med" len="med"/>
-                      <a:tailEnd type="none" w="med" len="med"/>
-                    </a:lnB>
-                    <a:solidFill>
-                      <a:srgbClr val="FDEEE3"/>
-                    </a:solidFill>
-                  </a:tcPr>
-                </a:tc>
-                <a:tc>
-                  <a:txBody>
-                    <a:bodyPr/>
-                    <a:lstStyle/>
-                    <a:p>
-                      <a:pPr algn="ctr" indent="0" marL="0">
-                        <a:buNone/>
-                      </a:pPr>
-                      <a:r>
-                        <a:rPr lang="en-US" sz="1100" b="1" dirty="0">
-                          <a:solidFill>
-                            <a:srgbClr val="E8762E"/>
-                          </a:solidFill>
-                          <a:latin typeface="Microsoft JhengHei" pitchFamily="34" charset="0"/>
-                          <a:ea typeface="Microsoft JhengHei" pitchFamily="34" charset="-122"/>
-                          <a:cs typeface="Microsoft JhengHei" pitchFamily="34" charset="-120"/>
-                        </a:rPr>
-                        <a:t>技術 T3 T4</a:t>
-                      </a:r>
-                      <a:endParaRPr lang="en-US" sz="1100" dirty="0">
-                        <a:latin typeface="Microsoft JhengHei" charset="0"/>
-                        <a:ea typeface="Microsoft JhengHei" charset="0"/>
-                        <a:cs typeface="Microsoft JhengHei" charset="0"/>
-                      </a:endParaRPr>
-                    </a:p>
-                  </a:txBody>
-                  <a:tcPr marL="91440" marR="91440" marT="45720" marB="45720" anchor="ctr">
-                    <a:lnL w="19050" cap="flat" cmpd="sng" algn="ctr">
-                      <a:solidFill>
-                        <a:srgbClr val="FFFFFF"/>
-                      </a:solidFill>
-                      <a:prstDash val="solid"/>
-                      <a:round/>
-                      <a:headEnd type="none" w="med" len="med"/>
-                      <a:tailEnd type="none" w="med" len="med"/>
-                    </a:lnL>
-                    <a:lnR w="19050" cap="flat" cmpd="sng" algn="ctr">
-                      <a:solidFill>
-                        <a:srgbClr val="FFFFFF"/>
-                      </a:solidFill>
-                      <a:prstDash val="solid"/>
-                      <a:round/>
-                      <a:headEnd type="none" w="med" len="med"/>
-                      <a:tailEnd type="none" w="med" len="med"/>
-                    </a:lnR>
-                    <a:lnT w="19050" cap="flat" cmpd="sng" algn="ctr">
-                      <a:solidFill>
-                        <a:srgbClr val="FFFFFF"/>
-                      </a:solidFill>
-                      <a:prstDash val="solid"/>
-                      <a:round/>
-                      <a:headEnd type="none" w="med" len="med"/>
-                      <a:tailEnd type="none" w="med" len="med"/>
-                    </a:lnT>
-                    <a:lnB w="19050" cap="flat" cmpd="sng" algn="ctr">
-                      <a:solidFill>
-                        <a:srgbClr val="FFFFFF"/>
-                      </a:solidFill>
-                      <a:prstDash val="solid"/>
-                      <a:round/>
-                      <a:headEnd type="none" w="med" len="med"/>
-                      <a:tailEnd type="none" w="med" len="med"/>
-                    </a:lnB>
-                    <a:solidFill>
-                      <a:srgbClr val="FDEEE3"/>
-                    </a:solidFill>
-                  </a:tcPr>
-                </a:tc>
-                <a:tc>
-                  <a:txBody>
-                    <a:bodyPr/>
-                    <a:lstStyle/>
-                    <a:p>
-                      <a:pPr algn="ctr" indent="0" marL="0">
-                        <a:buNone/>
-                      </a:pPr>
-                      <a:r>
-                        <a:rPr lang="en-US" sz="1100" b="1" dirty="0">
-                          <a:solidFill>
-                            <a:srgbClr val="E8762E"/>
-                          </a:solidFill>
-                          <a:latin typeface="Microsoft JhengHei" pitchFamily="34" charset="0"/>
-                          <a:ea typeface="Microsoft JhengHei" pitchFamily="34" charset="-122"/>
-                          <a:cs typeface="Microsoft JhengHei" pitchFamily="34" charset="-120"/>
-                        </a:rPr>
-                        <a:t>技術 T1 T2</a:t>
-                      </a:r>
-                      <a:endParaRPr lang="en-US" sz="1100" dirty="0">
-                        <a:latin typeface="Microsoft JhengHei" charset="0"/>
-                        <a:ea typeface="Microsoft JhengHei" charset="0"/>
-                        <a:cs typeface="Microsoft JhengHei" charset="0"/>
-                      </a:endParaRPr>
-                    </a:p>
-                  </a:txBody>
-                  <a:tcPr marL="91440" marR="91440" marT="45720" marB="45720" anchor="ctr">
-                    <a:lnL w="19050" cap="flat" cmpd="sng" algn="ctr">
-                      <a:solidFill>
-                        <a:srgbClr val="FFFFFF"/>
-                      </a:solidFill>
-                      <a:prstDash val="solid"/>
-                      <a:round/>
-                      <a:headEnd type="none" w="med" len="med"/>
-                      <a:tailEnd type="none" w="med" len="med"/>
-                    </a:lnL>
-                    <a:lnR w="19050" cap="flat" cmpd="sng" algn="ctr">
-                      <a:solidFill>
-                        <a:srgbClr val="FFFFFF"/>
-                      </a:solidFill>
-                      <a:prstDash val="solid"/>
-                      <a:round/>
-                      <a:headEnd type="none" w="med" len="med"/>
-                      <a:tailEnd type="none" w="med" len="med"/>
-                    </a:lnR>
-                    <a:lnT w="19050" cap="flat" cmpd="sng" algn="ctr">
-                      <a:solidFill>
-                        <a:srgbClr val="FFFFFF"/>
-                      </a:solidFill>
-                      <a:prstDash val="solid"/>
-                      <a:round/>
-                      <a:headEnd type="none" w="med" len="med"/>
-                      <a:tailEnd type="none" w="med" len="med"/>
-                    </a:lnT>
-                    <a:lnB w="19050" cap="flat" cmpd="sng" algn="ctr">
-                      <a:solidFill>
-                        <a:srgbClr val="FFFFFF"/>
-                      </a:solidFill>
-                      <a:prstDash val="solid"/>
-                      <a:round/>
-                      <a:headEnd type="none" w="med" len="med"/>
-                      <a:tailEnd type="none" w="med" len="med"/>
-                    </a:lnB>
-                    <a:solidFill>
-                      <a:srgbClr val="FDEEE3"/>
-                    </a:solidFill>
-                  </a:tcPr>
-                </a:tc>
               </a:tr>
             </a:tbl>
           </a:graphicData>
@@ -13246,18 +13821,18 @@
       </p:graphicFrame>
       <p:sp>
         <p:nvSpPr>
-          <p:cNvPr id="5" name="Shape 2"/>
+          <p:cNvPr id="24" name="Shape 21"/>
           <p:cNvSpPr/>
           <p:nvPr/>
         </p:nvSpPr>
         <p:spPr>
           <a:xfrm>
-            <a:off x="640080" y="4892040"/>
-            <a:ext cx="3520440" cy="1325880"/>
+            <a:off x="640080" y="5074920"/>
+            <a:ext cx="3520440" cy="1188720"/>
           </a:xfrm>
           <a:prstGeom prst="roundRect">
             <a:avLst>
-              <a:gd name="adj" fmla="val 9655"/>
+              <a:gd name="adj" fmla="val 10769"/>
             </a:avLst>
           </a:prstGeom>
           <a:solidFill>
@@ -13280,14 +13855,175 @@
       </p:sp>
       <p:sp>
         <p:nvSpPr>
-          <p:cNvPr id="6" name="Shape 3"/>
+          <p:cNvPr id="25" name="Shape 22"/>
           <p:cNvSpPr/>
           <p:nvPr/>
         </p:nvSpPr>
         <p:spPr>
           <a:xfrm>
-            <a:off x="822960" y="5074920"/>
-            <a:ext cx="502920" cy="502920"/>
+            <a:off x="822960" y="5193792"/>
+            <a:ext cx="457200" cy="457200"/>
+          </a:xfrm>
+          <a:prstGeom prst="ellipse">
+            <a:avLst/>
+          </a:prstGeom>
+          <a:solidFill>
+            <a:srgbClr val="0F1E33"/>
+          </a:solidFill>
+          <a:ln w="12700">
+            <a:solidFill>
+              <a:srgbClr val="0F1E33"/>
+            </a:solidFill>
+            <a:prstDash val="solid"/>
+          </a:ln>
+        </p:spPr>
+      </p:sp>
+      <p:pic>
+        <p:nvPicPr>
+          <p:cNvPr id="26" name="Image 0" descr="preencoded.png">    </p:cNvPr>
+          <p:cNvPicPr>
+            <a:picLocks noChangeAspect="1"/>
+          </p:cNvPicPr>
+          <p:nvPr/>
+        </p:nvPicPr>
+        <p:blipFill>
+          <a:blip r:embed="rId1"/>
+          <a:stretch>
+            <a:fillRect/>
+          </a:stretch>
+        </p:blipFill>
+        <p:spPr>
+          <a:xfrm>
+            <a:off x="937260" y="5308092"/>
+            <a:ext cx="228600" cy="228600"/>
+          </a:xfrm>
+          <a:prstGeom prst="rect">
+            <a:avLst/>
+          </a:prstGeom>
+        </p:spPr>
+      </p:pic>
+      <p:sp>
+        <p:nvSpPr>
+          <p:cNvPr id="27" name="Text 23"/>
+          <p:cNvSpPr txBox="1"/>
+          <p:nvPr/>
+        </p:nvSpPr>
+        <p:spPr>
+          <a:xfrm>
+            <a:off x="1417320" y="5138928"/>
+            <a:ext cx="2560320" cy="320040"/>
+          </a:xfrm>
+          <a:prstGeom prst="rect">
+            <a:avLst/>
+          </a:prstGeom>
+          <a:noFill/>
+          <a:ln/>
+        </p:spPr>
+        <p:txBody>
+          <a:bodyPr wrap="square" lIns="0" tIns="0" rIns="0" bIns="0" rtlCol="0" anchor="ctr"/>
+          <a:lstStyle/>
+          <a:p>
+            <a:pPr indent="0" marL="0">
+              <a:buNone/>
+            </a:pPr>
+            <a:r>
+              <a:rPr lang="en-US" sz="1300" b="1" dirty="0">
+                <a:solidFill>
+                  <a:srgbClr val="0F1E33"/>
+                </a:solidFill>
+                <a:latin typeface="Microsoft JhengHei" pitchFamily="34" charset="0"/>
+                <a:ea typeface="Microsoft JhengHei" pitchFamily="34" charset="-122"/>
+                <a:cs typeface="Microsoft JhengHei" pitchFamily="34" charset="-120"/>
+              </a:rPr>
+              <a:t>每天輪流帶</a:t>
+            </a:r>
+            <a:endParaRPr lang="en-US" sz="1300" dirty="0"/>
+          </a:p>
+        </p:txBody>
+      </p:sp>
+      <p:sp>
+        <p:nvSpPr>
+          <p:cNvPr id="28" name="Text 24"/>
+          <p:cNvSpPr txBox="1"/>
+          <p:nvPr/>
+        </p:nvSpPr>
+        <p:spPr>
+          <a:xfrm>
+            <a:off x="822960" y="5715000"/>
+            <a:ext cx="3154680" cy="502920"/>
+          </a:xfrm>
+          <a:prstGeom prst="rect">
+            <a:avLst/>
+          </a:prstGeom>
+          <a:noFill/>
+          <a:ln/>
+        </p:spPr>
+        <p:txBody>
+          <a:bodyPr wrap="square" lIns="0" tIns="0" rIns="0" bIns="0" rtlCol="0" anchor="t"/>
+          <a:lstStyle/>
+          <a:p>
+            <a:pPr indent="0" marL="0">
+              <a:buNone/>
+            </a:pPr>
+            <a:r>
+              <a:rPr lang="en-US" sz="1000" dirty="0">
+                <a:solidFill>
+                  <a:srgbClr val="1F2933"/>
+                </a:solidFill>
+                <a:latin typeface="Microsoft JhengHei" pitchFamily="34" charset="0"/>
+                <a:ea typeface="Microsoft JhengHei" pitchFamily="34" charset="-122"/>
+                <a:cs typeface="Microsoft JhengHei" pitchFamily="34" charset="-120"/>
+              </a:rPr>
+              <a:t>帶隊者每日輪替，讓新人接觸不同資深同仁與工作內容</a:t>
+            </a:r>
+            <a:endParaRPr lang="en-US" sz="1000" dirty="0"/>
+          </a:p>
+        </p:txBody>
+      </p:sp>
+      <p:sp>
+        <p:nvSpPr>
+          <p:cNvPr id="29" name="Shape 25"/>
+          <p:cNvSpPr/>
+          <p:nvPr/>
+        </p:nvSpPr>
+        <p:spPr>
+          <a:xfrm>
+            <a:off x="4343400" y="5074920"/>
+            <a:ext cx="3520440" cy="1188720"/>
+          </a:xfrm>
+          <a:prstGeom prst="roundRect">
+            <a:avLst>
+              <a:gd name="adj" fmla="val 10769"/>
+            </a:avLst>
+          </a:prstGeom>
+          <a:solidFill>
+            <a:srgbClr val="FFFFFF"/>
+          </a:solidFill>
+          <a:ln w="9525">
+            <a:solidFill>
+              <a:srgbClr val="E1E6EC"/>
+            </a:solidFill>
+            <a:prstDash val="solid"/>
+          </a:ln>
+          <a:effectLst>
+            <a:outerShdw sx="100000" sy="100000" kx="0" ky="0" algn="bl" rotWithShape="0" blurRad="127000" dist="38100" dir="5400000">
+              <a:srgbClr val="0F1E33">
+                <a:alpha val="10000"/>
+              </a:srgbClr>
+            </a:outerShdw>
+          </a:effectLst>
+        </p:spPr>
+      </p:sp>
+      <p:sp>
+        <p:nvSpPr>
+          <p:cNvPr id="30" name="Shape 26"/>
+          <p:cNvSpPr/>
+          <p:nvPr/>
+        </p:nvSpPr>
+        <p:spPr>
+          <a:xfrm>
+            <a:off x="4526280" y="5193792"/>
+            <a:ext cx="457200" cy="457200"/>
           </a:xfrm>
           <a:prstGeom prst="ellipse">
             <a:avLst/>
@@ -13305,22 +14041,22 @@
       </p:sp>
       <p:pic>
         <p:nvPicPr>
-          <p:cNvPr id="7" name="Image 0" descr="preencoded.png">    </p:cNvPr>
+          <p:cNvPr id="31" name="Image 1" descr="preencoded.png">    </p:cNvPr>
           <p:cNvPicPr>
             <a:picLocks noChangeAspect="1"/>
           </p:cNvPicPr>
           <p:nvPr/>
         </p:nvPicPr>
         <p:blipFill>
-          <a:blip r:embed="rId1"/>
+          <a:blip r:embed="rId2"/>
           <a:stretch>
             <a:fillRect/>
           </a:stretch>
         </p:blipFill>
         <p:spPr>
           <a:xfrm>
-            <a:off x="948690" y="5200650"/>
-            <a:ext cx="251460" cy="251460"/>
+            <a:off x="4640580" y="5308092"/>
+            <a:ext cx="228600" cy="228600"/>
           </a:xfrm>
           <a:prstGeom prst="rect">
             <a:avLst/>
@@ -13329,13 +14065,13 @@
       </p:pic>
       <p:sp>
         <p:nvSpPr>
-          <p:cNvPr id="8" name="Text 4"/>
+          <p:cNvPr id="32" name="Text 27"/>
           <p:cNvSpPr txBox="1"/>
           <p:nvPr/>
         </p:nvSpPr>
         <p:spPr>
           <a:xfrm>
-            <a:off x="1463040" y="5029200"/>
+            <a:off x="5120640" y="5138928"/>
             <a:ext cx="2560320" cy="320040"/>
           </a:xfrm>
           <a:prstGeom prst="rect">
@@ -13360,7 +14096,7 @@
                 <a:ea typeface="Microsoft JhengHei" pitchFamily="34" charset="-122"/>
                 <a:cs typeface="Microsoft JhengHei" pitchFamily="34" charset="-120"/>
               </a:rPr>
-              <a:t>業務 5 人</a:t>
+              <a:t>營業週</a:t>
             </a:r>
             <a:endParaRPr lang="en-US" sz="1300" dirty="0"/>
           </a:p>
@@ -13368,14 +14104,14 @@
       </p:sp>
       <p:sp>
         <p:nvSpPr>
-          <p:cNvPr id="9" name="Text 5"/>
+          <p:cNvPr id="33" name="Text 28"/>
           <p:cNvSpPr txBox="1"/>
           <p:nvPr/>
         </p:nvSpPr>
         <p:spPr>
           <a:xfrm>
-            <a:off x="822960" y="5623560"/>
-            <a:ext cx="3154680" cy="548640"/>
+            <a:off x="4526280" y="5715000"/>
+            <a:ext cx="3154680" cy="502920"/>
           </a:xfrm>
           <a:prstGeom prst="rect">
             <a:avLst/>
@@ -13399,7 +14135,7 @@
                 <a:ea typeface="Microsoft JhengHei" pitchFamily="34" charset="-122"/>
                 <a:cs typeface="Microsoft JhengHei" pitchFamily="34" charset="-120"/>
               </a:rPr>
-              <a:t>分兩組（B1–B2、B3–B5），三週輪完 A、B、C 三站</a:t>
+              <a:t>第 2、4 週由營業部帶隊：拜訪、Demo、報價、提案</a:t>
             </a:r>
             <a:endParaRPr lang="en-US" sz="1000" dirty="0"/>
           </a:p>
@@ -13407,18 +14143,18 @@
       </p:sp>
       <p:sp>
         <p:nvSpPr>
-          <p:cNvPr id="10" name="Shape 6"/>
+          <p:cNvPr id="34" name="Shape 29"/>
           <p:cNvSpPr/>
           <p:nvPr/>
         </p:nvSpPr>
         <p:spPr>
           <a:xfrm>
-            <a:off x="4343400" y="4892040"/>
-            <a:ext cx="3520440" cy="1325880"/>
+            <a:off x="8046720" y="5074920"/>
+            <a:ext cx="3520440" cy="1188720"/>
           </a:xfrm>
           <a:prstGeom prst="roundRect">
             <a:avLst>
-              <a:gd name="adj" fmla="val 9655"/>
+              <a:gd name="adj" fmla="val 10769"/>
             </a:avLst>
           </a:prstGeom>
           <a:solidFill>
@@ -13441,14 +14177,14 @@
       </p:sp>
       <p:sp>
         <p:nvSpPr>
-          <p:cNvPr id="11" name="Shape 7"/>
+          <p:cNvPr id="35" name="Shape 30"/>
           <p:cNvSpPr/>
           <p:nvPr/>
         </p:nvSpPr>
         <p:spPr>
           <a:xfrm>
-            <a:off x="4526280" y="5074920"/>
-            <a:ext cx="502920" cy="502920"/>
+            <a:off x="8229600" y="5193792"/>
+            <a:ext cx="457200" cy="457200"/>
           </a:xfrm>
           <a:prstGeom prst="ellipse">
             <a:avLst/>
@@ -13466,22 +14202,22 @@
       </p:sp>
       <p:pic>
         <p:nvPicPr>
-          <p:cNvPr id="12" name="Image 1" descr="preencoded.png">    </p:cNvPr>
+          <p:cNvPr id="36" name="Image 2" descr="preencoded.png">    </p:cNvPr>
           <p:cNvPicPr>
             <a:picLocks noChangeAspect="1"/>
           </p:cNvPicPr>
           <p:nvPr/>
         </p:nvPicPr>
         <p:blipFill>
-          <a:blip r:embed="rId2"/>
+          <a:blip r:embed="rId3"/>
           <a:stretch>
             <a:fillRect/>
           </a:stretch>
         </p:blipFill>
         <p:spPr>
           <a:xfrm>
-            <a:off x="4652010" y="5200650"/>
-            <a:ext cx="251460" cy="251460"/>
+            <a:off x="8343900" y="5308092"/>
+            <a:ext cx="228600" cy="228600"/>
           </a:xfrm>
           <a:prstGeom prst="rect">
             <a:avLst/>
@@ -13490,13 +14226,13 @@
       </p:pic>
       <p:sp>
         <p:nvSpPr>
-          <p:cNvPr id="13" name="Text 8"/>
+          <p:cNvPr id="37" name="Text 31"/>
           <p:cNvSpPr txBox="1"/>
           <p:nvPr/>
         </p:nvSpPr>
         <p:spPr>
           <a:xfrm>
-            <a:off x="5166360" y="5029200"/>
+            <a:off x="8823960" y="5138928"/>
             <a:ext cx="2560320" cy="320040"/>
           </a:xfrm>
           <a:prstGeom prst="rect">
@@ -13521,7 +14257,7 @@
                 <a:ea typeface="Microsoft JhengHei" pitchFamily="34" charset="-122"/>
                 <a:cs typeface="Microsoft JhengHei" pitchFamily="34" charset="-120"/>
               </a:rPr>
-              <a:t>技術 4 人</a:t>
+              <a:t>技術週</a:t>
             </a:r>
             <a:endParaRPr lang="en-US" sz="1300" dirty="0"/>
           </a:p>
@@ -13529,14 +14265,14 @@
       </p:sp>
       <p:sp>
         <p:nvSpPr>
-          <p:cNvPr id="14" name="Text 9"/>
+          <p:cNvPr id="38" name="Text 32"/>
           <p:cNvSpPr txBox="1"/>
           <p:nvPr/>
         </p:nvSpPr>
         <p:spPr>
           <a:xfrm>
-            <a:off x="4526280" y="5623560"/>
-            <a:ext cx="3154680" cy="548640"/>
+            <a:off x="8229600" y="5715000"/>
+            <a:ext cx="3154680" cy="502920"/>
           </a:xfrm>
           <a:prstGeom prst="rect">
             <a:avLst/>
@@ -13560,7 +14296,7 @@
                 <a:ea typeface="Microsoft JhengHei" pitchFamily="34" charset="-122"/>
                 <a:cs typeface="Microsoft JhengHei" pitchFamily="34" charset="-120"/>
               </a:rPr>
-              <a:t>T1–T2 輪 B、C、D 三站；T3–T4 業務部兩週後至展示中心</a:t>
+              <a:t>第 3、5 週由技術部帶隊：保養、裝機、控制器、零件</a:t>
             </a:r>
             <a:endParaRPr lang="en-US" sz="1000" dirty="0"/>
           </a:p>
@@ -13568,168 +14304,7 @@
       </p:sp>
       <p:sp>
         <p:nvSpPr>
-          <p:cNvPr id="15" name="Shape 10"/>
-          <p:cNvSpPr/>
-          <p:nvPr/>
-        </p:nvSpPr>
-        <p:spPr>
-          <a:xfrm>
-            <a:off x="8046720" y="4892040"/>
-            <a:ext cx="3520440" cy="1325880"/>
-          </a:xfrm>
-          <a:prstGeom prst="roundRect">
-            <a:avLst>
-              <a:gd name="adj" fmla="val 9655"/>
-            </a:avLst>
-          </a:prstGeom>
-          <a:solidFill>
-            <a:srgbClr val="FFFFFF"/>
-          </a:solidFill>
-          <a:ln w="9525">
-            <a:solidFill>
-              <a:srgbClr val="E1E6EC"/>
-            </a:solidFill>
-            <a:prstDash val="solid"/>
-          </a:ln>
-          <a:effectLst>
-            <a:outerShdw sx="100000" sy="100000" kx="0" ky="0" algn="bl" rotWithShape="0" blurRad="127000" dist="38100" dir="5400000">
-              <a:srgbClr val="0F1E33">
-                <a:alpha val="10000"/>
-              </a:srgbClr>
-            </a:outerShdw>
-          </a:effectLst>
-        </p:spPr>
-      </p:sp>
-      <p:sp>
-        <p:nvSpPr>
-          <p:cNvPr id="16" name="Shape 11"/>
-          <p:cNvSpPr/>
-          <p:nvPr/>
-        </p:nvSpPr>
-        <p:spPr>
-          <a:xfrm>
-            <a:off x="8229600" y="5074920"/>
-            <a:ext cx="502920" cy="502920"/>
-          </a:xfrm>
-          <a:prstGeom prst="ellipse">
-            <a:avLst/>
-          </a:prstGeom>
-          <a:solidFill>
-            <a:srgbClr val="2F8F63"/>
-          </a:solidFill>
-          <a:ln w="12700">
-            <a:solidFill>
-              <a:srgbClr val="2F8F63"/>
-            </a:solidFill>
-            <a:prstDash val="solid"/>
-          </a:ln>
-        </p:spPr>
-      </p:sp>
-      <p:pic>
-        <p:nvPicPr>
-          <p:cNvPr id="17" name="Image 2" descr="preencoded.png">    </p:cNvPr>
-          <p:cNvPicPr>
-            <a:picLocks noChangeAspect="1"/>
-          </p:cNvPicPr>
-          <p:nvPr/>
-        </p:nvPicPr>
-        <p:blipFill>
-          <a:blip r:embed="rId3"/>
-          <a:stretch>
-            <a:fillRect/>
-          </a:stretch>
-        </p:blipFill>
-        <p:spPr>
-          <a:xfrm>
-            <a:off x="8355330" y="5200650"/>
-            <a:ext cx="251460" cy="251460"/>
-          </a:xfrm>
-          <a:prstGeom prst="rect">
-            <a:avLst/>
-          </a:prstGeom>
-        </p:spPr>
-      </p:pic>
-      <p:sp>
-        <p:nvSpPr>
-          <p:cNvPr id="18" name="Text 12"/>
-          <p:cNvSpPr txBox="1"/>
-          <p:nvPr/>
-        </p:nvSpPr>
-        <p:spPr>
-          <a:xfrm>
-            <a:off x="8869680" y="5029200"/>
-            <a:ext cx="2560320" cy="320040"/>
-          </a:xfrm>
-          <a:prstGeom prst="rect">
-            <a:avLst/>
-          </a:prstGeom>
-          <a:noFill/>
-          <a:ln/>
-        </p:spPr>
-        <p:txBody>
-          <a:bodyPr wrap="square" lIns="0" tIns="0" rIns="0" bIns="0" rtlCol="0" anchor="ctr"/>
-          <a:lstStyle/>
-          <a:p>
-            <a:pPr indent="0" marL="0">
-              <a:buNone/>
-            </a:pPr>
-            <a:r>
-              <a:rPr lang="en-US" sz="1300" b="1" dirty="0">
-                <a:solidFill>
-                  <a:srgbClr val="2F8F63"/>
-                </a:solidFill>
-                <a:latin typeface="Microsoft JhengHei" pitchFamily="34" charset="0"/>
-                <a:ea typeface="Microsoft JhengHei" pitchFamily="34" charset="-122"/>
-                <a:cs typeface="Microsoft JhengHei" pitchFamily="34" charset="-120"/>
-              </a:rPr>
-              <a:t>站別規則</a:t>
-            </a:r>
-            <a:endParaRPr lang="en-US" sz="1300" dirty="0"/>
-          </a:p>
-        </p:txBody>
-      </p:sp>
-      <p:sp>
-        <p:nvSpPr>
-          <p:cNvPr id="19" name="Text 13"/>
-          <p:cNvSpPr txBox="1"/>
-          <p:nvPr/>
-        </p:nvSpPr>
-        <p:spPr>
-          <a:xfrm>
-            <a:off x="8229600" y="5623560"/>
-            <a:ext cx="3154680" cy="548640"/>
-          </a:xfrm>
-          <a:prstGeom prst="rect">
-            <a:avLst/>
-          </a:prstGeom>
-          <a:noFill/>
-          <a:ln/>
-        </p:spPr>
-        <p:txBody>
-          <a:bodyPr wrap="square" lIns="0" tIns="0" rIns="0" bIns="0" rtlCol="0" anchor="t"/>
-          <a:lstStyle/>
-          <a:p>
-            <a:pPr indent="0" marL="0">
-              <a:buNone/>
-            </a:pPr>
-            <a:r>
-              <a:rPr lang="en-US" sz="1000" dirty="0">
-                <a:solidFill>
-                  <a:srgbClr val="1F2933"/>
-                </a:solidFill>
-                <a:latin typeface="Microsoft JhengHei" pitchFamily="34" charset="0"/>
-                <a:ea typeface="Microsoft JhengHei" pitchFamily="34" charset="-122"/>
-                <a:cs typeface="Microsoft JhengHei" pitchFamily="34" charset="-120"/>
-              </a:rPr>
-              <a:t>每站週五由站別負責人於學習護照簽章；週一換站前交上一站心得</a:t>
-            </a:r>
-            <a:endParaRPr lang="en-US" sz="1000" dirty="0"/>
-          </a:p>
-        </p:txBody>
-      </p:sp>
-      <p:sp>
-        <p:nvSpPr>
-          <p:cNvPr id="20" name="Text 14"/>
+          <p:cNvPr id="39" name="Text 33"/>
           <p:cNvSpPr txBox="1"/>
           <p:nvPr/>
         </p:nvSpPr>
@@ -13768,7 +14343,7 @@
       </p:sp>
       <p:sp>
         <p:nvSpPr>
-          <p:cNvPr id="21" name="Text 15"/>
+          <p:cNvPr id="40" name="Text 34"/>
           <p:cNvSpPr txBox="1"/>
           <p:nvPr/>
         </p:nvSpPr>
@@ -13909,7 +14484,7 @@
                 <a:ea typeface="Microsoft JhengHei" pitchFamily="34" charset="-122"/>
                 <a:cs typeface="Microsoft JhengHei" pitchFamily="34" charset="-120"/>
               </a:rPr>
-              <a:t>學習護照（每人一本，集滿 8 章結訓）</a:t>
+              <a:t>學習護照（各大項目 OK ／ 不OK 確認）</a:t>
             </a:r>
             <a:endParaRPr lang="en-US" sz="2800" dirty="0"/>
           </a:p>
@@ -13924,11 +14499,11 @@
         <p:spPr>
           <a:xfrm>
             <a:off x="640080" y="1463040"/>
-            <a:ext cx="5349240" cy="4343400"/>
+            <a:ext cx="5349240" cy="4389120"/>
           </a:xfrm>
           <a:prstGeom prst="roundRect">
             <a:avLst>
-              <a:gd name="adj" fmla="val 2947"/>
+              <a:gd name="adj" fmla="val 2917"/>
             </a:avLst>
           </a:prstGeom>
           <a:solidFill>
@@ -14059,7 +14634,7 @@
         <p:spPr>
           <a:xfrm>
             <a:off x="1371600" y="1463040"/>
-            <a:ext cx="2743200" cy="640080"/>
+            <a:ext cx="2286000" cy="640080"/>
           </a:xfrm>
           <a:prstGeom prst="rect">
             <a:avLst/>
@@ -14075,7 +14650,7 @@
               <a:buNone/>
             </a:pPr>
             <a:r>
-              <a:rPr lang="en-US" sz="1400" b="1" dirty="0">
+              <a:rPr lang="en-US" sz="1500" b="1" dirty="0">
                 <a:solidFill>
                   <a:srgbClr val="2E5C8A"/>
                 </a:solidFill>
@@ -14083,9 +14658,9 @@
                 <a:ea typeface="Microsoft JhengHei" pitchFamily="34" charset="-122"/>
                 <a:cs typeface="Microsoft JhengHei" pitchFamily="34" charset="-120"/>
               </a:rPr>
-              <a:t>業務組  ・  8 章</a:t>
+              <a:t>營業</a:t>
             </a:r>
-            <a:endParaRPr lang="en-US" sz="1400" dirty="0"/>
+            <a:endParaRPr lang="en-US" sz="1500" dirty="0"/>
           </a:p>
         </p:txBody>
       </p:sp>
@@ -14097,8 +14672,150 @@
         </p:nvSpPr>
         <p:spPr>
           <a:xfrm>
-            <a:off x="1371600" y="1828800"/>
-            <a:ext cx="2743200" cy="274320"/>
+            <a:off x="3657600" y="1463040"/>
+            <a:ext cx="640080" cy="640080"/>
+          </a:xfrm>
+          <a:prstGeom prst="rect">
+            <a:avLst/>
+          </a:prstGeom>
+          <a:noFill/>
+          <a:ln/>
+        </p:spPr>
+        <p:txBody>
+          <a:bodyPr wrap="square" lIns="0" tIns="0" rIns="0" bIns="0" rtlCol="0" anchor="ctr"/>
+          <a:lstStyle/>
+          <a:p>
+            <a:pPr algn="ctr" indent="0" marL="0">
+              <a:buNone/>
+            </a:pPr>
+            <a:r>
+              <a:rPr lang="en-US" sz="1100" b="1" dirty="0">
+                <a:solidFill>
+                  <a:srgbClr val="2F8F63"/>
+                </a:solidFill>
+                <a:latin typeface="Arial" pitchFamily="34" charset="0"/>
+                <a:ea typeface="Arial" pitchFamily="34" charset="-122"/>
+                <a:cs typeface="Arial" pitchFamily="34" charset="-120"/>
+              </a:rPr>
+              <a:t>OK</a:t>
+            </a:r>
+            <a:endParaRPr lang="en-US" sz="1100" dirty="0"/>
+          </a:p>
+        </p:txBody>
+      </p:sp>
+      <p:sp>
+        <p:nvSpPr>
+          <p:cNvPr id="11" name="Text 8"/>
+          <p:cNvSpPr txBox="1"/>
+          <p:nvPr/>
+        </p:nvSpPr>
+        <p:spPr>
+          <a:xfrm>
+            <a:off x="4343400" y="1463040"/>
+            <a:ext cx="640080" cy="640080"/>
+          </a:xfrm>
+          <a:prstGeom prst="rect">
+            <a:avLst/>
+          </a:prstGeom>
+          <a:noFill/>
+          <a:ln/>
+        </p:spPr>
+        <p:txBody>
+          <a:bodyPr wrap="square" lIns="0" tIns="0" rIns="0" bIns="0" rtlCol="0" anchor="ctr"/>
+          <a:lstStyle/>
+          <a:p>
+            <a:pPr algn="ctr" indent="0" marL="0">
+              <a:buNone/>
+            </a:pPr>
+            <a:r>
+              <a:rPr lang="en-US" sz="1100" b="1" dirty="0">
+                <a:solidFill>
+                  <a:srgbClr val="C0392B"/>
+                </a:solidFill>
+                <a:latin typeface="Microsoft JhengHei" pitchFamily="34" charset="0"/>
+                <a:ea typeface="Microsoft JhengHei" pitchFamily="34" charset="-122"/>
+                <a:cs typeface="Microsoft JhengHei" pitchFamily="34" charset="-120"/>
+              </a:rPr>
+              <a:t>不OK</a:t>
+            </a:r>
+            <a:endParaRPr lang="en-US" sz="1100" dirty="0"/>
+          </a:p>
+        </p:txBody>
+      </p:sp>
+      <p:sp>
+        <p:nvSpPr>
+          <p:cNvPr id="12" name="Text 9"/>
+          <p:cNvSpPr txBox="1"/>
+          <p:nvPr/>
+        </p:nvSpPr>
+        <p:spPr>
+          <a:xfrm>
+            <a:off x="5074920" y="1463040"/>
+            <a:ext cx="822960" cy="640080"/>
+          </a:xfrm>
+          <a:prstGeom prst="rect">
+            <a:avLst/>
+          </a:prstGeom>
+          <a:noFill/>
+          <a:ln/>
+        </p:spPr>
+        <p:txBody>
+          <a:bodyPr wrap="square" lIns="0" tIns="0" rIns="0" bIns="0" rtlCol="0" anchor="ctr"/>
+          <a:lstStyle/>
+          <a:p>
+            <a:pPr algn="ctr" indent="0" marL="0">
+              <a:buNone/>
+            </a:pPr>
+            <a:r>
+              <a:rPr lang="en-US" sz="1000" b="1" dirty="0">
+                <a:solidFill>
+                  <a:srgbClr val="6B7785"/>
+                </a:solidFill>
+                <a:latin typeface="Microsoft JhengHei" pitchFamily="34" charset="0"/>
+                <a:ea typeface="Microsoft JhengHei" pitchFamily="34" charset="-122"/>
+                <a:cs typeface="Microsoft JhengHei" pitchFamily="34" charset="-120"/>
+              </a:rPr>
+              <a:t>確認人</a:t>
+            </a:r>
+            <a:endParaRPr lang="en-US" sz="1000" dirty="0"/>
+          </a:p>
+        </p:txBody>
+      </p:sp>
+      <p:sp>
+        <p:nvSpPr>
+          <p:cNvPr id="13" name="Shape 10"/>
+          <p:cNvSpPr/>
+          <p:nvPr/>
+        </p:nvSpPr>
+        <p:spPr>
+          <a:xfrm>
+            <a:off x="731520" y="2240280"/>
+            <a:ext cx="5166360" cy="402336"/>
+          </a:xfrm>
+          <a:prstGeom prst="rect">
+            <a:avLst/>
+          </a:prstGeom>
+          <a:solidFill>
+            <a:srgbClr val="F4F6F9"/>
+          </a:solidFill>
+          <a:ln w="12700">
+            <a:solidFill>
+              <a:srgbClr val="F4F6F9"/>
+            </a:solidFill>
+            <a:prstDash val="solid"/>
+          </a:ln>
+        </p:spPr>
+      </p:sp>
+      <p:sp>
+        <p:nvSpPr>
+          <p:cNvPr id="14" name="Text 11"/>
+          <p:cNvSpPr txBox="1"/>
+          <p:nvPr/>
+        </p:nvSpPr>
+        <p:spPr>
+          <a:xfrm>
+            <a:off x="868680" y="2240280"/>
+            <a:ext cx="365760" cy="402336"/>
           </a:xfrm>
           <a:prstGeom prst="rect">
             <a:avLst/>
@@ -14114,149 +14831,7 @@
               <a:buNone/>
             </a:pPr>
             <a:r>
-              <a:rPr lang="en-US" sz="900" dirty="0">
-                <a:solidFill>
-                  <a:srgbClr val="6B7785"/>
-                </a:solidFill>
-                <a:latin typeface="Microsoft JhengHei" pitchFamily="34" charset="0"/>
-                <a:ea typeface="Microsoft JhengHei" pitchFamily="34" charset="-122"/>
-                <a:cs typeface="Microsoft JhengHei" pitchFamily="34" charset="-120"/>
-              </a:rPr>
-              <a:t>項目</a:t>
-            </a:r>
-            <a:endParaRPr lang="en-US" sz="900" dirty="0"/>
-          </a:p>
-        </p:txBody>
-      </p:sp>
-      <p:sp>
-        <p:nvSpPr>
-          <p:cNvPr id="11" name="Text 8"/>
-          <p:cNvSpPr txBox="1"/>
-          <p:nvPr/>
-        </p:nvSpPr>
-        <p:spPr>
-          <a:xfrm>
-            <a:off x="4023360" y="1828800"/>
-            <a:ext cx="914400" cy="274320"/>
-          </a:xfrm>
-          <a:prstGeom prst="rect">
-            <a:avLst/>
-          </a:prstGeom>
-          <a:noFill/>
-          <a:ln/>
-        </p:spPr>
-        <p:txBody>
-          <a:bodyPr wrap="square" lIns="0" tIns="0" rIns="0" bIns="0" rtlCol="0" anchor="ctr"/>
-          <a:lstStyle/>
-          <a:p>
-            <a:pPr indent="0" marL="0">
-              <a:buNone/>
-            </a:pPr>
-            <a:r>
-              <a:rPr lang="en-US" sz="900" dirty="0">
-                <a:solidFill>
-                  <a:srgbClr val="6B7785"/>
-                </a:solidFill>
-                <a:latin typeface="Microsoft JhengHei" pitchFamily="34" charset="0"/>
-                <a:ea typeface="Microsoft JhengHei" pitchFamily="34" charset="-122"/>
-                <a:cs typeface="Microsoft JhengHei" pitchFamily="34" charset="-120"/>
-              </a:rPr>
-              <a:t>簽章人</a:t>
-            </a:r>
-            <a:endParaRPr lang="en-US" sz="900" dirty="0"/>
-          </a:p>
-        </p:txBody>
-      </p:sp>
-      <p:sp>
-        <p:nvSpPr>
-          <p:cNvPr id="12" name="Text 9"/>
-          <p:cNvSpPr txBox="1"/>
-          <p:nvPr/>
-        </p:nvSpPr>
-        <p:spPr>
-          <a:xfrm>
-            <a:off x="4892040" y="1828800"/>
-            <a:ext cx="1005840" cy="274320"/>
-          </a:xfrm>
-          <a:prstGeom prst="rect">
-            <a:avLst/>
-          </a:prstGeom>
-          <a:noFill/>
-          <a:ln/>
-        </p:spPr>
-        <p:txBody>
-          <a:bodyPr wrap="square" lIns="0" tIns="0" rIns="0" bIns="0" rtlCol="0" anchor="ctr"/>
-          <a:lstStyle/>
-          <a:p>
-            <a:pPr indent="0" marL="0">
-              <a:buNone/>
-            </a:pPr>
-            <a:r>
-              <a:rPr lang="en-US" sz="900" dirty="0">
-                <a:solidFill>
-                  <a:srgbClr val="6B7785"/>
-                </a:solidFill>
-                <a:latin typeface="Microsoft JhengHei" pitchFamily="34" charset="0"/>
-                <a:ea typeface="Microsoft JhengHei" pitchFamily="34" charset="-122"/>
-                <a:cs typeface="Microsoft JhengHei" pitchFamily="34" charset="-120"/>
-              </a:rPr>
-              <a:t>日期／簽章</a:t>
-            </a:r>
-            <a:endParaRPr lang="en-US" sz="900" dirty="0"/>
-          </a:p>
-        </p:txBody>
-      </p:sp>
-      <p:sp>
-        <p:nvSpPr>
-          <p:cNvPr id="13" name="Shape 10"/>
-          <p:cNvSpPr/>
-          <p:nvPr/>
-        </p:nvSpPr>
-        <p:spPr>
-          <a:xfrm>
-            <a:off x="868680" y="2322576"/>
-            <a:ext cx="274320" cy="274320"/>
-          </a:xfrm>
-          <a:prstGeom prst="ellipse">
-            <a:avLst/>
-          </a:prstGeom>
-          <a:solidFill>
-            <a:srgbClr val="FFFFFF"/>
-          </a:solidFill>
-          <a:ln w="15875">
-            <a:solidFill>
-              <a:srgbClr val="2E5C8A"/>
-            </a:solidFill>
-            <a:prstDash val="dash"/>
-          </a:ln>
-        </p:spPr>
-      </p:sp>
-      <p:sp>
-        <p:nvSpPr>
-          <p:cNvPr id="14" name="Text 11"/>
-          <p:cNvSpPr txBox="1"/>
-          <p:nvPr/>
-        </p:nvSpPr>
-        <p:spPr>
-          <a:xfrm>
-            <a:off x="868680" y="2322576"/>
-            <a:ext cx="274320" cy="274320"/>
-          </a:xfrm>
-          <a:prstGeom prst="rect">
-            <a:avLst/>
-          </a:prstGeom>
-          <a:noFill/>
-          <a:ln/>
-        </p:spPr>
-        <p:txBody>
-          <a:bodyPr wrap="square" lIns="0" tIns="0" rIns="0" bIns="0" rtlCol="0" anchor="ctr"/>
-          <a:lstStyle/>
-          <a:p>
-            <a:pPr algn="ctr" indent="0" marL="0">
-              <a:buNone/>
-            </a:pPr>
-            <a:r>
-              <a:rPr lang="en-US" sz="850" b="1" dirty="0">
+              <a:rPr lang="en-US" sz="1000" b="1" dirty="0">
                 <a:solidFill>
                   <a:srgbClr val="2E5C8A"/>
                 </a:solidFill>
@@ -14266,7 +14841,7 @@
               </a:rPr>
               <a:t>1</a:t>
             </a:r>
-            <a:endParaRPr lang="en-US" sz="850" dirty="0"/>
+            <a:endParaRPr lang="en-US" sz="1000" dirty="0"/>
           </a:p>
         </p:txBody>
       </p:sp>
@@ -14278,8 +14853,8 @@
         </p:nvSpPr>
         <p:spPr>
           <a:xfrm>
-            <a:off x="1371600" y="2286000"/>
-            <a:ext cx="2651760" cy="347472"/>
+            <a:off x="1280160" y="2240280"/>
+            <a:ext cx="2377440" cy="402336"/>
           </a:xfrm>
           <a:prstGeom prst="rect">
             <a:avLst/>
@@ -14295,7 +14870,7 @@
               <a:buNone/>
             </a:pPr>
             <a:r>
-              <a:rPr lang="en-US" sz="1050" b="1" dirty="0">
+              <a:rPr lang="en-US" sz="1150" b="1" dirty="0">
                 <a:solidFill>
                   <a:srgbClr val="1F2933"/>
                 </a:solidFill>
@@ -14303,22 +14878,99 @@
                 <a:ea typeface="Microsoft JhengHei" pitchFamily="34" charset="-122"/>
                 <a:cs typeface="Microsoft JhengHei" pitchFamily="34" charset="-120"/>
               </a:rPr>
-              <a:t>公司制度與安全教育</a:t>
+              <a:t>Brother 產品熟悉</a:t>
             </a:r>
-            <a:endParaRPr lang="en-US" sz="1050" dirty="0"/>
+            <a:endParaRPr lang="en-US" sz="1150" dirty="0"/>
           </a:p>
         </p:txBody>
       </p:sp>
       <p:sp>
         <p:nvSpPr>
-          <p:cNvPr id="16" name="Text 13"/>
+          <p:cNvPr id="16" name="Shape 13"/>
+          <p:cNvSpPr/>
+          <p:nvPr/>
+        </p:nvSpPr>
+        <p:spPr>
+          <a:xfrm>
+            <a:off x="3858768" y="2322576"/>
+            <a:ext cx="237744" cy="237744"/>
+          </a:xfrm>
+          <a:prstGeom prst="roundRect">
+            <a:avLst>
+              <a:gd name="adj" fmla="val 15385"/>
+            </a:avLst>
+          </a:prstGeom>
+          <a:solidFill>
+            <a:srgbClr val="FFFFFF"/>
+          </a:solidFill>
+          <a:ln w="19050">
+            <a:solidFill>
+              <a:srgbClr val="2F8F63"/>
+            </a:solidFill>
+            <a:prstDash val="solid"/>
+          </a:ln>
+        </p:spPr>
+      </p:sp>
+      <p:sp>
+        <p:nvSpPr>
+          <p:cNvPr id="17" name="Shape 14"/>
+          <p:cNvSpPr/>
+          <p:nvPr/>
+        </p:nvSpPr>
+        <p:spPr>
+          <a:xfrm>
+            <a:off x="4544568" y="2322576"/>
+            <a:ext cx="237744" cy="237744"/>
+          </a:xfrm>
+          <a:prstGeom prst="roundRect">
+            <a:avLst>
+              <a:gd name="adj" fmla="val 15385"/>
+            </a:avLst>
+          </a:prstGeom>
+          <a:solidFill>
+            <a:srgbClr val="FFFFFF"/>
+          </a:solidFill>
+          <a:ln w="19050">
+            <a:solidFill>
+              <a:srgbClr val="C0392B"/>
+            </a:solidFill>
+            <a:prstDash val="solid"/>
+          </a:ln>
+        </p:spPr>
+      </p:sp>
+      <p:sp>
+        <p:nvSpPr>
+          <p:cNvPr id="18" name="Shape 15"/>
+          <p:cNvSpPr/>
+          <p:nvPr/>
+        </p:nvSpPr>
+        <p:spPr>
+          <a:xfrm>
+            <a:off x="5166360" y="2551176"/>
+            <a:ext cx="640080" cy="0"/>
+          </a:xfrm>
+          <a:prstGeom prst="line">
+            <a:avLst/>
+          </a:prstGeom>
+          <a:noFill/>
+          <a:ln w="12700">
+            <a:solidFill>
+              <a:srgbClr val="9AA5B1"/>
+            </a:solidFill>
+            <a:prstDash val="solid"/>
+          </a:ln>
+        </p:spPr>
+      </p:sp>
+      <p:sp>
+        <p:nvSpPr>
+          <p:cNvPr id="19" name="Text 16"/>
           <p:cNvSpPr txBox="1"/>
           <p:nvPr/>
         </p:nvSpPr>
         <p:spPr>
           <a:xfrm>
-            <a:off x="4023360" y="2286000"/>
-            <a:ext cx="914400" cy="347472"/>
+            <a:off x="868680" y="2670048"/>
+            <a:ext cx="365760" cy="402336"/>
           </a:xfrm>
           <a:prstGeom prst="rect">
             <a:avLst/>
@@ -14334,94 +14986,7 @@
               <a:buNone/>
             </a:pPr>
             <a:r>
-              <a:rPr lang="en-US" sz="950" dirty="0">
-                <a:solidFill>
-                  <a:srgbClr val="6B7785"/>
-                </a:solidFill>
-                <a:latin typeface="Microsoft JhengHei" pitchFamily="34" charset="0"/>
-                <a:ea typeface="Microsoft JhengHei" pitchFamily="34" charset="-122"/>
-                <a:cs typeface="Microsoft JhengHei" pitchFamily="34" charset="-120"/>
-              </a:rPr>
-              <a:t>人資</a:t>
-            </a:r>
-            <a:endParaRPr lang="en-US" sz="950" dirty="0"/>
-          </a:p>
-        </p:txBody>
-      </p:sp>
-      <p:sp>
-        <p:nvSpPr>
-          <p:cNvPr id="17" name="Shape 14"/>
-          <p:cNvSpPr/>
-          <p:nvPr/>
-        </p:nvSpPr>
-        <p:spPr>
-          <a:xfrm>
-            <a:off x="4892040" y="2560320"/>
-            <a:ext cx="914400" cy="0"/>
-          </a:xfrm>
-          <a:prstGeom prst="line">
-            <a:avLst/>
-          </a:prstGeom>
-          <a:noFill/>
-          <a:ln w="12700">
-            <a:solidFill>
-              <a:srgbClr val="E1E6EC"/>
-            </a:solidFill>
-            <a:prstDash val="solid"/>
-          </a:ln>
-        </p:spPr>
-      </p:sp>
-      <p:sp>
-        <p:nvSpPr>
-          <p:cNvPr id="18" name="Shape 15"/>
-          <p:cNvSpPr/>
-          <p:nvPr/>
-        </p:nvSpPr>
-        <p:spPr>
-          <a:xfrm>
-            <a:off x="868680" y="2734056"/>
-            <a:ext cx="274320" cy="274320"/>
-          </a:xfrm>
-          <a:prstGeom prst="ellipse">
-            <a:avLst/>
-          </a:prstGeom>
-          <a:solidFill>
-            <a:srgbClr val="FFFFFF"/>
-          </a:solidFill>
-          <a:ln w="15875">
-            <a:solidFill>
-              <a:srgbClr val="2E5C8A"/>
-            </a:solidFill>
-            <a:prstDash val="dash"/>
-          </a:ln>
-        </p:spPr>
-      </p:sp>
-      <p:sp>
-        <p:nvSpPr>
-          <p:cNvPr id="19" name="Text 16"/>
-          <p:cNvSpPr txBox="1"/>
-          <p:nvPr/>
-        </p:nvSpPr>
-        <p:spPr>
-          <a:xfrm>
-            <a:off x="868680" y="2734056"/>
-            <a:ext cx="274320" cy="274320"/>
-          </a:xfrm>
-          <a:prstGeom prst="rect">
-            <a:avLst/>
-          </a:prstGeom>
-          <a:noFill/>
-          <a:ln/>
-        </p:spPr>
-        <p:txBody>
-          <a:bodyPr wrap="square" lIns="0" tIns="0" rIns="0" bIns="0" rtlCol="0" anchor="ctr"/>
-          <a:lstStyle/>
-          <a:p>
-            <a:pPr algn="ctr" indent="0" marL="0">
-              <a:buNone/>
-            </a:pPr>
-            <a:r>
-              <a:rPr lang="en-US" sz="850" b="1" dirty="0">
+              <a:rPr lang="en-US" sz="1000" b="1" dirty="0">
                 <a:solidFill>
                   <a:srgbClr val="2E5C8A"/>
                 </a:solidFill>
@@ -14431,7 +14996,7 @@
               </a:rPr>
               <a:t>2</a:t>
             </a:r>
-            <a:endParaRPr lang="en-US" sz="850" dirty="0"/>
+            <a:endParaRPr lang="en-US" sz="1000" dirty="0"/>
           </a:p>
         </p:txBody>
       </p:sp>
@@ -14443,8 +15008,8 @@
         </p:nvSpPr>
         <p:spPr>
           <a:xfrm>
-            <a:off x="1371600" y="2697480"/>
-            <a:ext cx="2651760" cy="347472"/>
+            <a:off x="1280160" y="2670048"/>
+            <a:ext cx="2377440" cy="402336"/>
           </a:xfrm>
           <a:prstGeom prst="rect">
             <a:avLst/>
@@ -14460,7 +15025,7 @@
               <a:buNone/>
             </a:pPr>
             <a:r>
-              <a:rPr lang="en-US" sz="1050" b="1" dirty="0">
+              <a:rPr lang="en-US" sz="1150" b="1" dirty="0">
                 <a:solidFill>
                   <a:srgbClr val="1F2933"/>
                 </a:solidFill>
@@ -14468,22 +15033,124 @@
                 <a:ea typeface="Microsoft JhengHei" pitchFamily="34" charset="-122"/>
                 <a:cs typeface="Microsoft JhengHei" pitchFamily="34" charset="-120"/>
               </a:rPr>
-              <a:t>三大產品型錄研讀</a:t>
+              <a:t>Okuma 產品熟悉</a:t>
             </a:r>
-            <a:endParaRPr lang="en-US" sz="1050" dirty="0"/>
+            <a:endParaRPr lang="en-US" sz="1150" dirty="0"/>
           </a:p>
         </p:txBody>
       </p:sp>
       <p:sp>
         <p:nvSpPr>
-          <p:cNvPr id="21" name="Text 18"/>
+          <p:cNvPr id="21" name="Shape 18"/>
+          <p:cNvSpPr/>
+          <p:nvPr/>
+        </p:nvSpPr>
+        <p:spPr>
+          <a:xfrm>
+            <a:off x="3858768" y="2752344"/>
+            <a:ext cx="237744" cy="237744"/>
+          </a:xfrm>
+          <a:prstGeom prst="roundRect">
+            <a:avLst>
+              <a:gd name="adj" fmla="val 15385"/>
+            </a:avLst>
+          </a:prstGeom>
+          <a:solidFill>
+            <a:srgbClr val="FFFFFF"/>
+          </a:solidFill>
+          <a:ln w="19050">
+            <a:solidFill>
+              <a:srgbClr val="2F8F63"/>
+            </a:solidFill>
+            <a:prstDash val="solid"/>
+          </a:ln>
+        </p:spPr>
+      </p:sp>
+      <p:sp>
+        <p:nvSpPr>
+          <p:cNvPr id="22" name="Shape 19"/>
+          <p:cNvSpPr/>
+          <p:nvPr/>
+        </p:nvSpPr>
+        <p:spPr>
+          <a:xfrm>
+            <a:off x="4544568" y="2752344"/>
+            <a:ext cx="237744" cy="237744"/>
+          </a:xfrm>
+          <a:prstGeom prst="roundRect">
+            <a:avLst>
+              <a:gd name="adj" fmla="val 15385"/>
+            </a:avLst>
+          </a:prstGeom>
+          <a:solidFill>
+            <a:srgbClr val="FFFFFF"/>
+          </a:solidFill>
+          <a:ln w="19050">
+            <a:solidFill>
+              <a:srgbClr val="C0392B"/>
+            </a:solidFill>
+            <a:prstDash val="solid"/>
+          </a:ln>
+        </p:spPr>
+      </p:sp>
+      <p:sp>
+        <p:nvSpPr>
+          <p:cNvPr id="23" name="Shape 20"/>
+          <p:cNvSpPr/>
+          <p:nvPr/>
+        </p:nvSpPr>
+        <p:spPr>
+          <a:xfrm>
+            <a:off x="5166360" y="2980944"/>
+            <a:ext cx="640080" cy="0"/>
+          </a:xfrm>
+          <a:prstGeom prst="line">
+            <a:avLst/>
+          </a:prstGeom>
+          <a:noFill/>
+          <a:ln w="12700">
+            <a:solidFill>
+              <a:srgbClr val="9AA5B1"/>
+            </a:solidFill>
+            <a:prstDash val="solid"/>
+          </a:ln>
+        </p:spPr>
+      </p:sp>
+      <p:sp>
+        <p:nvSpPr>
+          <p:cNvPr id="24" name="Shape 21"/>
+          <p:cNvSpPr/>
+          <p:nvPr/>
+        </p:nvSpPr>
+        <p:spPr>
+          <a:xfrm>
+            <a:off x="731520" y="3099816"/>
+            <a:ext cx="5166360" cy="402336"/>
+          </a:xfrm>
+          <a:prstGeom prst="rect">
+            <a:avLst/>
+          </a:prstGeom>
+          <a:solidFill>
+            <a:srgbClr val="F4F6F9"/>
+          </a:solidFill>
+          <a:ln w="12700">
+            <a:solidFill>
+              <a:srgbClr val="F4F6F9"/>
+            </a:solidFill>
+            <a:prstDash val="solid"/>
+          </a:ln>
+        </p:spPr>
+      </p:sp>
+      <p:sp>
+        <p:nvSpPr>
+          <p:cNvPr id="25" name="Text 22"/>
           <p:cNvSpPr txBox="1"/>
           <p:nvPr/>
         </p:nvSpPr>
         <p:spPr>
           <a:xfrm>
-            <a:off x="4023360" y="2697480"/>
-            <a:ext cx="914400" cy="347472"/>
+            <a:off x="868680" y="3099816"/>
+            <a:ext cx="365760" cy="402336"/>
           </a:xfrm>
           <a:prstGeom prst="rect">
             <a:avLst/>
@@ -14499,94 +15166,7 @@
               <a:buNone/>
             </a:pPr>
             <a:r>
-              <a:rPr lang="en-US" sz="950" dirty="0">
-                <a:solidFill>
-                  <a:srgbClr val="6B7785"/>
-                </a:solidFill>
-                <a:latin typeface="Microsoft JhengHei" pitchFamily="34" charset="0"/>
-                <a:ea typeface="Microsoft JhengHei" pitchFamily="34" charset="-122"/>
-                <a:cs typeface="Microsoft JhengHei" pitchFamily="34" charset="-120"/>
-              </a:rPr>
-              <a:t>導師</a:t>
-            </a:r>
-            <a:endParaRPr lang="en-US" sz="950" dirty="0"/>
-          </a:p>
-        </p:txBody>
-      </p:sp>
-      <p:sp>
-        <p:nvSpPr>
-          <p:cNvPr id="22" name="Shape 19"/>
-          <p:cNvSpPr/>
-          <p:nvPr/>
-        </p:nvSpPr>
-        <p:spPr>
-          <a:xfrm>
-            <a:off x="4892040" y="2971800"/>
-            <a:ext cx="914400" cy="0"/>
-          </a:xfrm>
-          <a:prstGeom prst="line">
-            <a:avLst/>
-          </a:prstGeom>
-          <a:noFill/>
-          <a:ln w="12700">
-            <a:solidFill>
-              <a:srgbClr val="E1E6EC"/>
-            </a:solidFill>
-            <a:prstDash val="solid"/>
-          </a:ln>
-        </p:spPr>
-      </p:sp>
-      <p:sp>
-        <p:nvSpPr>
-          <p:cNvPr id="23" name="Shape 20"/>
-          <p:cNvSpPr/>
-          <p:nvPr/>
-        </p:nvSpPr>
-        <p:spPr>
-          <a:xfrm>
-            <a:off x="868680" y="3145536"/>
-            <a:ext cx="274320" cy="274320"/>
-          </a:xfrm>
-          <a:prstGeom prst="ellipse">
-            <a:avLst/>
-          </a:prstGeom>
-          <a:solidFill>
-            <a:srgbClr val="FFFFFF"/>
-          </a:solidFill>
-          <a:ln w="15875">
-            <a:solidFill>
-              <a:srgbClr val="2E5C8A"/>
-            </a:solidFill>
-            <a:prstDash val="dash"/>
-          </a:ln>
-        </p:spPr>
-      </p:sp>
-      <p:sp>
-        <p:nvSpPr>
-          <p:cNvPr id="24" name="Text 21"/>
-          <p:cNvSpPr txBox="1"/>
-          <p:nvPr/>
-        </p:nvSpPr>
-        <p:spPr>
-          <a:xfrm>
-            <a:off x="868680" y="3145536"/>
-            <a:ext cx="274320" cy="274320"/>
-          </a:xfrm>
-          <a:prstGeom prst="rect">
-            <a:avLst/>
-          </a:prstGeom>
-          <a:noFill/>
-          <a:ln/>
-        </p:spPr>
-        <p:txBody>
-          <a:bodyPr wrap="square" lIns="0" tIns="0" rIns="0" bIns="0" rtlCol="0" anchor="ctr"/>
-          <a:lstStyle/>
-          <a:p>
-            <a:pPr algn="ctr" indent="0" marL="0">
-              <a:buNone/>
-            </a:pPr>
-            <a:r>
-              <a:rPr lang="en-US" sz="850" b="1" dirty="0">
+              <a:rPr lang="en-US" sz="1000" b="1" dirty="0">
                 <a:solidFill>
                   <a:srgbClr val="2E5C8A"/>
                 </a:solidFill>
@@ -14596,20 +15176,20 @@
               </a:rPr>
               <a:t>3</a:t>
             </a:r>
-            <a:endParaRPr lang="en-US" sz="850" dirty="0"/>
+            <a:endParaRPr lang="en-US" sz="1000" dirty="0"/>
           </a:p>
         </p:txBody>
       </p:sp>
       <p:sp>
         <p:nvSpPr>
-          <p:cNvPr id="25" name="Text 22"/>
+          <p:cNvPr id="26" name="Text 23"/>
           <p:cNvSpPr txBox="1"/>
           <p:nvPr/>
         </p:nvSpPr>
         <p:spPr>
           <a:xfrm>
-            <a:off x="1371600" y="3108960"/>
-            <a:ext cx="2651760" cy="347472"/>
+            <a:off x="1280160" y="3099816"/>
+            <a:ext cx="2377440" cy="402336"/>
           </a:xfrm>
           <a:prstGeom prst="rect">
             <a:avLst/>
@@ -14625,7 +15205,7 @@
               <a:buNone/>
             </a:pPr>
             <a:r>
-              <a:rPr lang="en-US" sz="1050" b="1" dirty="0">
+              <a:rPr lang="en-US" sz="1150" b="1" dirty="0">
                 <a:solidFill>
                   <a:srgbClr val="1F2933"/>
                 </a:solidFill>
@@ -14633,22 +15213,99 @@
                 <a:ea typeface="Microsoft JhengHei" pitchFamily="34" charset="-122"/>
                 <a:cs typeface="Microsoft JhengHei" pitchFamily="34" charset="-120"/>
               </a:rPr>
-              <a:t>部門輪調 3 站完成</a:t>
+              <a:t>射出機產品熟悉</a:t>
             </a:r>
-            <a:endParaRPr lang="en-US" sz="1050" dirty="0"/>
+            <a:endParaRPr lang="en-US" sz="1150" dirty="0"/>
           </a:p>
         </p:txBody>
       </p:sp>
       <p:sp>
         <p:nvSpPr>
-          <p:cNvPr id="26" name="Text 23"/>
+          <p:cNvPr id="27" name="Shape 24"/>
+          <p:cNvSpPr/>
+          <p:nvPr/>
+        </p:nvSpPr>
+        <p:spPr>
+          <a:xfrm>
+            <a:off x="3858768" y="3182112"/>
+            <a:ext cx="237744" cy="237744"/>
+          </a:xfrm>
+          <a:prstGeom prst="roundRect">
+            <a:avLst>
+              <a:gd name="adj" fmla="val 15385"/>
+            </a:avLst>
+          </a:prstGeom>
+          <a:solidFill>
+            <a:srgbClr val="FFFFFF"/>
+          </a:solidFill>
+          <a:ln w="19050">
+            <a:solidFill>
+              <a:srgbClr val="2F8F63"/>
+            </a:solidFill>
+            <a:prstDash val="solid"/>
+          </a:ln>
+        </p:spPr>
+      </p:sp>
+      <p:sp>
+        <p:nvSpPr>
+          <p:cNvPr id="28" name="Shape 25"/>
+          <p:cNvSpPr/>
+          <p:nvPr/>
+        </p:nvSpPr>
+        <p:spPr>
+          <a:xfrm>
+            <a:off x="4544568" y="3182112"/>
+            <a:ext cx="237744" cy="237744"/>
+          </a:xfrm>
+          <a:prstGeom prst="roundRect">
+            <a:avLst>
+              <a:gd name="adj" fmla="val 15385"/>
+            </a:avLst>
+          </a:prstGeom>
+          <a:solidFill>
+            <a:srgbClr val="FFFFFF"/>
+          </a:solidFill>
+          <a:ln w="19050">
+            <a:solidFill>
+              <a:srgbClr val="C0392B"/>
+            </a:solidFill>
+            <a:prstDash val="solid"/>
+          </a:ln>
+        </p:spPr>
+      </p:sp>
+      <p:sp>
+        <p:nvSpPr>
+          <p:cNvPr id="29" name="Shape 26"/>
+          <p:cNvSpPr/>
+          <p:nvPr/>
+        </p:nvSpPr>
+        <p:spPr>
+          <a:xfrm>
+            <a:off x="5166360" y="3410712"/>
+            <a:ext cx="640080" cy="0"/>
+          </a:xfrm>
+          <a:prstGeom prst="line">
+            <a:avLst/>
+          </a:prstGeom>
+          <a:noFill/>
+          <a:ln w="12700">
+            <a:solidFill>
+              <a:srgbClr val="9AA5B1"/>
+            </a:solidFill>
+            <a:prstDash val="solid"/>
+          </a:ln>
+        </p:spPr>
+      </p:sp>
+      <p:sp>
+        <p:nvSpPr>
+          <p:cNvPr id="30" name="Text 27"/>
           <p:cNvSpPr txBox="1"/>
           <p:nvPr/>
         </p:nvSpPr>
         <p:spPr>
           <a:xfrm>
-            <a:off x="4023360" y="3108960"/>
-            <a:ext cx="914400" cy="347472"/>
+            <a:off x="868680" y="3529584"/>
+            <a:ext cx="365760" cy="402336"/>
           </a:xfrm>
           <a:prstGeom prst="rect">
             <a:avLst/>
@@ -14664,94 +15321,7 @@
               <a:buNone/>
             </a:pPr>
             <a:r>
-              <a:rPr lang="en-US" sz="950" dirty="0">
-                <a:solidFill>
-                  <a:srgbClr val="6B7785"/>
-                </a:solidFill>
-                <a:latin typeface="Microsoft JhengHei" pitchFamily="34" charset="0"/>
-                <a:ea typeface="Microsoft JhengHei" pitchFamily="34" charset="-122"/>
-                <a:cs typeface="Microsoft JhengHei" pitchFamily="34" charset="-120"/>
-              </a:rPr>
-              <a:t>站別負責人</a:t>
-            </a:r>
-            <a:endParaRPr lang="en-US" sz="950" dirty="0"/>
-          </a:p>
-        </p:txBody>
-      </p:sp>
-      <p:sp>
-        <p:nvSpPr>
-          <p:cNvPr id="27" name="Shape 24"/>
-          <p:cNvSpPr/>
-          <p:nvPr/>
-        </p:nvSpPr>
-        <p:spPr>
-          <a:xfrm>
-            <a:off x="4892040" y="3383280"/>
-            <a:ext cx="914400" cy="0"/>
-          </a:xfrm>
-          <a:prstGeom prst="line">
-            <a:avLst/>
-          </a:prstGeom>
-          <a:noFill/>
-          <a:ln w="12700">
-            <a:solidFill>
-              <a:srgbClr val="E1E6EC"/>
-            </a:solidFill>
-            <a:prstDash val="solid"/>
-          </a:ln>
-        </p:spPr>
-      </p:sp>
-      <p:sp>
-        <p:nvSpPr>
-          <p:cNvPr id="28" name="Shape 25"/>
-          <p:cNvSpPr/>
-          <p:nvPr/>
-        </p:nvSpPr>
-        <p:spPr>
-          <a:xfrm>
-            <a:off x="868680" y="3557016"/>
-            <a:ext cx="274320" cy="274320"/>
-          </a:xfrm>
-          <a:prstGeom prst="ellipse">
-            <a:avLst/>
-          </a:prstGeom>
-          <a:solidFill>
-            <a:srgbClr val="FFFFFF"/>
-          </a:solidFill>
-          <a:ln w="15875">
-            <a:solidFill>
-              <a:srgbClr val="2E5C8A"/>
-            </a:solidFill>
-            <a:prstDash val="dash"/>
-          </a:ln>
-        </p:spPr>
-      </p:sp>
-      <p:sp>
-        <p:nvSpPr>
-          <p:cNvPr id="29" name="Text 26"/>
-          <p:cNvSpPr txBox="1"/>
-          <p:nvPr/>
-        </p:nvSpPr>
-        <p:spPr>
-          <a:xfrm>
-            <a:off x="868680" y="3557016"/>
-            <a:ext cx="274320" cy="274320"/>
-          </a:xfrm>
-          <a:prstGeom prst="rect">
-            <a:avLst/>
-          </a:prstGeom>
-          <a:noFill/>
-          <a:ln/>
-        </p:spPr>
-        <p:txBody>
-          <a:bodyPr wrap="square" lIns="0" tIns="0" rIns="0" bIns="0" rtlCol="0" anchor="ctr"/>
-          <a:lstStyle/>
-          <a:p>
-            <a:pPr algn="ctr" indent="0" marL="0">
-              <a:buNone/>
-            </a:pPr>
-            <a:r>
-              <a:rPr lang="en-US" sz="850" b="1" dirty="0">
+              <a:rPr lang="en-US" sz="1000" b="1" dirty="0">
                 <a:solidFill>
                   <a:srgbClr val="2E5C8A"/>
                 </a:solidFill>
@@ -14761,20 +15331,20 @@
               </a:rPr>
               <a:t>4</a:t>
             </a:r>
-            <a:endParaRPr lang="en-US" sz="850" dirty="0"/>
+            <a:endParaRPr lang="en-US" sz="1000" dirty="0"/>
           </a:p>
         </p:txBody>
       </p:sp>
       <p:sp>
         <p:nvSpPr>
-          <p:cNvPr id="30" name="Text 27"/>
+          <p:cNvPr id="31" name="Text 28"/>
           <p:cNvSpPr txBox="1"/>
           <p:nvPr/>
         </p:nvSpPr>
         <p:spPr>
           <a:xfrm>
-            <a:off x="1371600" y="3520440"/>
-            <a:ext cx="2651760" cy="347472"/>
+            <a:off x="1280160" y="3529584"/>
+            <a:ext cx="2377440" cy="402336"/>
           </a:xfrm>
           <a:prstGeom prst="rect">
             <a:avLst/>
@@ -14790,7 +15360,7 @@
               <a:buNone/>
             </a:pPr>
             <a:r>
-              <a:rPr lang="en-US" sz="1050" b="1" dirty="0">
+              <a:rPr lang="en-US" sz="1150" b="1" dirty="0">
                 <a:solidFill>
                   <a:srgbClr val="1F2933"/>
                 </a:solidFill>
@@ -14798,22 +15368,124 @@
                 <a:ea typeface="Microsoft JhengHei" pitchFamily="34" charset="-122"/>
                 <a:cs typeface="Microsoft JhengHei" pitchFamily="34" charset="-120"/>
               </a:rPr>
-              <a:t>隨訪客戶 6 家</a:t>
+              <a:t>公司制度與流程</a:t>
             </a:r>
-            <a:endParaRPr lang="en-US" sz="1050" dirty="0"/>
+            <a:endParaRPr lang="en-US" sz="1150" dirty="0"/>
           </a:p>
         </p:txBody>
       </p:sp>
       <p:sp>
         <p:nvSpPr>
-          <p:cNvPr id="31" name="Text 28"/>
+          <p:cNvPr id="32" name="Shape 29"/>
+          <p:cNvSpPr/>
+          <p:nvPr/>
+        </p:nvSpPr>
+        <p:spPr>
+          <a:xfrm>
+            <a:off x="3858768" y="3611880"/>
+            <a:ext cx="237744" cy="237744"/>
+          </a:xfrm>
+          <a:prstGeom prst="roundRect">
+            <a:avLst>
+              <a:gd name="adj" fmla="val 15385"/>
+            </a:avLst>
+          </a:prstGeom>
+          <a:solidFill>
+            <a:srgbClr val="FFFFFF"/>
+          </a:solidFill>
+          <a:ln w="19050">
+            <a:solidFill>
+              <a:srgbClr val="2F8F63"/>
+            </a:solidFill>
+            <a:prstDash val="solid"/>
+          </a:ln>
+        </p:spPr>
+      </p:sp>
+      <p:sp>
+        <p:nvSpPr>
+          <p:cNvPr id="33" name="Shape 30"/>
+          <p:cNvSpPr/>
+          <p:nvPr/>
+        </p:nvSpPr>
+        <p:spPr>
+          <a:xfrm>
+            <a:off x="4544568" y="3611880"/>
+            <a:ext cx="237744" cy="237744"/>
+          </a:xfrm>
+          <a:prstGeom prst="roundRect">
+            <a:avLst>
+              <a:gd name="adj" fmla="val 15385"/>
+            </a:avLst>
+          </a:prstGeom>
+          <a:solidFill>
+            <a:srgbClr val="FFFFFF"/>
+          </a:solidFill>
+          <a:ln w="19050">
+            <a:solidFill>
+              <a:srgbClr val="C0392B"/>
+            </a:solidFill>
+            <a:prstDash val="solid"/>
+          </a:ln>
+        </p:spPr>
+      </p:sp>
+      <p:sp>
+        <p:nvSpPr>
+          <p:cNvPr id="34" name="Shape 31"/>
+          <p:cNvSpPr/>
+          <p:nvPr/>
+        </p:nvSpPr>
+        <p:spPr>
+          <a:xfrm>
+            <a:off x="5166360" y="3840480"/>
+            <a:ext cx="640080" cy="0"/>
+          </a:xfrm>
+          <a:prstGeom prst="line">
+            <a:avLst/>
+          </a:prstGeom>
+          <a:noFill/>
+          <a:ln w="12700">
+            <a:solidFill>
+              <a:srgbClr val="9AA5B1"/>
+            </a:solidFill>
+            <a:prstDash val="solid"/>
+          </a:ln>
+        </p:spPr>
+      </p:sp>
+      <p:sp>
+        <p:nvSpPr>
+          <p:cNvPr id="35" name="Shape 32"/>
+          <p:cNvSpPr/>
+          <p:nvPr/>
+        </p:nvSpPr>
+        <p:spPr>
+          <a:xfrm>
+            <a:off x="731520" y="3959352"/>
+            <a:ext cx="5166360" cy="402336"/>
+          </a:xfrm>
+          <a:prstGeom prst="rect">
+            <a:avLst/>
+          </a:prstGeom>
+          <a:solidFill>
+            <a:srgbClr val="F4F6F9"/>
+          </a:solidFill>
+          <a:ln w="12700">
+            <a:solidFill>
+              <a:srgbClr val="F4F6F9"/>
+            </a:solidFill>
+            <a:prstDash val="solid"/>
+          </a:ln>
+        </p:spPr>
+      </p:sp>
+      <p:sp>
+        <p:nvSpPr>
+          <p:cNvPr id="36" name="Text 33"/>
           <p:cNvSpPr txBox="1"/>
           <p:nvPr/>
         </p:nvSpPr>
         <p:spPr>
           <a:xfrm>
-            <a:off x="4023360" y="3520440"/>
-            <a:ext cx="914400" cy="347472"/>
+            <a:off x="868680" y="3959352"/>
+            <a:ext cx="365760" cy="402336"/>
           </a:xfrm>
           <a:prstGeom prst="rect">
             <a:avLst/>
@@ -14829,94 +15501,7 @@
               <a:buNone/>
             </a:pPr>
             <a:r>
-              <a:rPr lang="en-US" sz="950" dirty="0">
-                <a:solidFill>
-                  <a:srgbClr val="6B7785"/>
-                </a:solidFill>
-                <a:latin typeface="Microsoft JhengHei" pitchFamily="34" charset="0"/>
-                <a:ea typeface="Microsoft JhengHei" pitchFamily="34" charset="-122"/>
-                <a:cs typeface="Microsoft JhengHei" pitchFamily="34" charset="-120"/>
-              </a:rPr>
-              <a:t>資深業務</a:t>
-            </a:r>
-            <a:endParaRPr lang="en-US" sz="950" dirty="0"/>
-          </a:p>
-        </p:txBody>
-      </p:sp>
-      <p:sp>
-        <p:nvSpPr>
-          <p:cNvPr id="32" name="Shape 29"/>
-          <p:cNvSpPr/>
-          <p:nvPr/>
-        </p:nvSpPr>
-        <p:spPr>
-          <a:xfrm>
-            <a:off x="4892040" y="3794760"/>
-            <a:ext cx="914400" cy="0"/>
-          </a:xfrm>
-          <a:prstGeom prst="line">
-            <a:avLst/>
-          </a:prstGeom>
-          <a:noFill/>
-          <a:ln w="12700">
-            <a:solidFill>
-              <a:srgbClr val="E1E6EC"/>
-            </a:solidFill>
-            <a:prstDash val="solid"/>
-          </a:ln>
-        </p:spPr>
-      </p:sp>
-      <p:sp>
-        <p:nvSpPr>
-          <p:cNvPr id="33" name="Shape 30"/>
-          <p:cNvSpPr/>
-          <p:nvPr/>
-        </p:nvSpPr>
-        <p:spPr>
-          <a:xfrm>
-            <a:off x="868680" y="3968496"/>
-            <a:ext cx="274320" cy="274320"/>
-          </a:xfrm>
-          <a:prstGeom prst="ellipse">
-            <a:avLst/>
-          </a:prstGeom>
-          <a:solidFill>
-            <a:srgbClr val="FFFFFF"/>
-          </a:solidFill>
-          <a:ln w="15875">
-            <a:solidFill>
-              <a:srgbClr val="2E5C8A"/>
-            </a:solidFill>
-            <a:prstDash val="dash"/>
-          </a:ln>
-        </p:spPr>
-      </p:sp>
-      <p:sp>
-        <p:nvSpPr>
-          <p:cNvPr id="34" name="Text 31"/>
-          <p:cNvSpPr txBox="1"/>
-          <p:nvPr/>
-        </p:nvSpPr>
-        <p:spPr>
-          <a:xfrm>
-            <a:off x="868680" y="3968496"/>
-            <a:ext cx="274320" cy="274320"/>
-          </a:xfrm>
-          <a:prstGeom prst="rect">
-            <a:avLst/>
-          </a:prstGeom>
-          <a:noFill/>
-          <a:ln/>
-        </p:spPr>
-        <p:txBody>
-          <a:bodyPr wrap="square" lIns="0" tIns="0" rIns="0" bIns="0" rtlCol="0" anchor="ctr"/>
-          <a:lstStyle/>
-          <a:p>
-            <a:pPr algn="ctr" indent="0" marL="0">
-              <a:buNone/>
-            </a:pPr>
-            <a:r>
-              <a:rPr lang="en-US" sz="850" b="1" dirty="0">
+              <a:rPr lang="en-US" sz="1000" b="1" dirty="0">
                 <a:solidFill>
                   <a:srgbClr val="2E5C8A"/>
                 </a:solidFill>
@@ -14926,20 +15511,20 @@
               </a:rPr>
               <a:t>5</a:t>
             </a:r>
-            <a:endParaRPr lang="en-US" sz="850" dirty="0"/>
+            <a:endParaRPr lang="en-US" sz="1000" dirty="0"/>
           </a:p>
         </p:txBody>
       </p:sp>
       <p:sp>
         <p:nvSpPr>
-          <p:cNvPr id="35" name="Text 32"/>
+          <p:cNvPr id="37" name="Text 34"/>
           <p:cNvSpPr txBox="1"/>
           <p:nvPr/>
         </p:nvSpPr>
         <p:spPr>
           <a:xfrm>
-            <a:off x="1371600" y="3931920"/>
-            <a:ext cx="2651760" cy="347472"/>
+            <a:off x="1280160" y="3959352"/>
+            <a:ext cx="2377440" cy="402336"/>
           </a:xfrm>
           <a:prstGeom prst="rect">
             <a:avLst/>
@@ -14955,7 +15540,7 @@
               <a:buNone/>
             </a:pPr>
             <a:r>
-              <a:rPr lang="en-US" sz="1050" b="1" dirty="0">
+              <a:rPr lang="en-US" sz="1150" b="1" dirty="0">
                 <a:solidFill>
                   <a:srgbClr val="1F2933"/>
                 </a:solidFill>
@@ -14963,22 +15548,99 @@
                 <a:ea typeface="Microsoft JhengHei" pitchFamily="34" charset="-122"/>
                 <a:cs typeface="Microsoft JhengHei" pitchFamily="34" charset="-120"/>
               </a:rPr>
-              <a:t>模擬提案 1 份</a:t>
+              <a:t>報價與訂單流程</a:t>
             </a:r>
-            <a:endParaRPr lang="en-US" sz="1050" dirty="0"/>
+            <a:endParaRPr lang="en-US" sz="1150" dirty="0"/>
           </a:p>
         </p:txBody>
       </p:sp>
       <p:sp>
         <p:nvSpPr>
-          <p:cNvPr id="36" name="Text 33"/>
+          <p:cNvPr id="38" name="Shape 35"/>
+          <p:cNvSpPr/>
+          <p:nvPr/>
+        </p:nvSpPr>
+        <p:spPr>
+          <a:xfrm>
+            <a:off x="3858768" y="4041648"/>
+            <a:ext cx="237744" cy="237744"/>
+          </a:xfrm>
+          <a:prstGeom prst="roundRect">
+            <a:avLst>
+              <a:gd name="adj" fmla="val 15385"/>
+            </a:avLst>
+          </a:prstGeom>
+          <a:solidFill>
+            <a:srgbClr val="FFFFFF"/>
+          </a:solidFill>
+          <a:ln w="19050">
+            <a:solidFill>
+              <a:srgbClr val="2F8F63"/>
+            </a:solidFill>
+            <a:prstDash val="solid"/>
+          </a:ln>
+        </p:spPr>
+      </p:sp>
+      <p:sp>
+        <p:nvSpPr>
+          <p:cNvPr id="39" name="Shape 36"/>
+          <p:cNvSpPr/>
+          <p:nvPr/>
+        </p:nvSpPr>
+        <p:spPr>
+          <a:xfrm>
+            <a:off x="4544568" y="4041648"/>
+            <a:ext cx="237744" cy="237744"/>
+          </a:xfrm>
+          <a:prstGeom prst="roundRect">
+            <a:avLst>
+              <a:gd name="adj" fmla="val 15385"/>
+            </a:avLst>
+          </a:prstGeom>
+          <a:solidFill>
+            <a:srgbClr val="FFFFFF"/>
+          </a:solidFill>
+          <a:ln w="19050">
+            <a:solidFill>
+              <a:srgbClr val="C0392B"/>
+            </a:solidFill>
+            <a:prstDash val="solid"/>
+          </a:ln>
+        </p:spPr>
+      </p:sp>
+      <p:sp>
+        <p:nvSpPr>
+          <p:cNvPr id="40" name="Shape 37"/>
+          <p:cNvSpPr/>
+          <p:nvPr/>
+        </p:nvSpPr>
+        <p:spPr>
+          <a:xfrm>
+            <a:off x="5166360" y="4270248"/>
+            <a:ext cx="640080" cy="0"/>
+          </a:xfrm>
+          <a:prstGeom prst="line">
+            <a:avLst/>
+          </a:prstGeom>
+          <a:noFill/>
+          <a:ln w="12700">
+            <a:solidFill>
+              <a:srgbClr val="9AA5B1"/>
+            </a:solidFill>
+            <a:prstDash val="solid"/>
+          </a:ln>
+        </p:spPr>
+      </p:sp>
+      <p:sp>
+        <p:nvSpPr>
+          <p:cNvPr id="41" name="Text 38"/>
           <p:cNvSpPr txBox="1"/>
           <p:nvPr/>
         </p:nvSpPr>
         <p:spPr>
           <a:xfrm>
-            <a:off x="4023360" y="3931920"/>
-            <a:ext cx="914400" cy="347472"/>
+            <a:off x="868680" y="4389120"/>
+            <a:ext cx="365760" cy="402336"/>
           </a:xfrm>
           <a:prstGeom prst="rect">
             <a:avLst/>
@@ -14994,94 +15656,7 @@
               <a:buNone/>
             </a:pPr>
             <a:r>
-              <a:rPr lang="en-US" sz="950" dirty="0">
-                <a:solidFill>
-                  <a:srgbClr val="6B7785"/>
-                </a:solidFill>
-                <a:latin typeface="Microsoft JhengHei" pitchFamily="34" charset="0"/>
-                <a:ea typeface="Microsoft JhengHei" pitchFamily="34" charset="-122"/>
-                <a:cs typeface="Microsoft JhengHei" pitchFamily="34" charset="-120"/>
-              </a:rPr>
-              <a:t>業務主管</a:t>
-            </a:r>
-            <a:endParaRPr lang="en-US" sz="950" dirty="0"/>
-          </a:p>
-        </p:txBody>
-      </p:sp>
-      <p:sp>
-        <p:nvSpPr>
-          <p:cNvPr id="37" name="Shape 34"/>
-          <p:cNvSpPr/>
-          <p:nvPr/>
-        </p:nvSpPr>
-        <p:spPr>
-          <a:xfrm>
-            <a:off x="4892040" y="4206240"/>
-            <a:ext cx="914400" cy="0"/>
-          </a:xfrm>
-          <a:prstGeom prst="line">
-            <a:avLst/>
-          </a:prstGeom>
-          <a:noFill/>
-          <a:ln w="12700">
-            <a:solidFill>
-              <a:srgbClr val="E1E6EC"/>
-            </a:solidFill>
-            <a:prstDash val="solid"/>
-          </a:ln>
-        </p:spPr>
-      </p:sp>
-      <p:sp>
-        <p:nvSpPr>
-          <p:cNvPr id="38" name="Shape 35"/>
-          <p:cNvSpPr/>
-          <p:nvPr/>
-        </p:nvSpPr>
-        <p:spPr>
-          <a:xfrm>
-            <a:off x="868680" y="4379976"/>
-            <a:ext cx="274320" cy="274320"/>
-          </a:xfrm>
-          <a:prstGeom prst="ellipse">
-            <a:avLst/>
-          </a:prstGeom>
-          <a:solidFill>
-            <a:srgbClr val="FFFFFF"/>
-          </a:solidFill>
-          <a:ln w="15875">
-            <a:solidFill>
-              <a:srgbClr val="2E5C8A"/>
-            </a:solidFill>
-            <a:prstDash val="dash"/>
-          </a:ln>
-        </p:spPr>
-      </p:sp>
-      <p:sp>
-        <p:nvSpPr>
-          <p:cNvPr id="39" name="Text 36"/>
-          <p:cNvSpPr txBox="1"/>
-          <p:nvPr/>
-        </p:nvSpPr>
-        <p:spPr>
-          <a:xfrm>
-            <a:off x="868680" y="4379976"/>
-            <a:ext cx="274320" cy="274320"/>
-          </a:xfrm>
-          <a:prstGeom prst="rect">
-            <a:avLst/>
-          </a:prstGeom>
-          <a:noFill/>
-          <a:ln/>
-        </p:spPr>
-        <p:txBody>
-          <a:bodyPr wrap="square" lIns="0" tIns="0" rIns="0" bIns="0" rtlCol="0" anchor="ctr"/>
-          <a:lstStyle/>
-          <a:p>
-            <a:pPr algn="ctr" indent="0" marL="0">
-              <a:buNone/>
-            </a:pPr>
-            <a:r>
-              <a:rPr lang="en-US" sz="850" b="1" dirty="0">
+              <a:rPr lang="en-US" sz="1000" b="1" dirty="0">
                 <a:solidFill>
                   <a:srgbClr val="2E5C8A"/>
                 </a:solidFill>
@@ -15091,20 +15666,20 @@
               </a:rPr>
               <a:t>6</a:t>
             </a:r>
-            <a:endParaRPr lang="en-US" sz="850" dirty="0"/>
+            <a:endParaRPr lang="en-US" sz="1000" dirty="0"/>
           </a:p>
         </p:txBody>
       </p:sp>
       <p:sp>
         <p:nvSpPr>
-          <p:cNvPr id="40" name="Text 37"/>
+          <p:cNvPr id="42" name="Text 39"/>
           <p:cNvSpPr txBox="1"/>
           <p:nvPr/>
         </p:nvSpPr>
         <p:spPr>
           <a:xfrm>
-            <a:off x="1371600" y="4343400"/>
-            <a:ext cx="2651760" cy="347472"/>
+            <a:off x="1280160" y="4389120"/>
+            <a:ext cx="2377440" cy="402336"/>
           </a:xfrm>
           <a:prstGeom prst="rect">
             <a:avLst/>
@@ -15120,7 +15695,7 @@
               <a:buNone/>
             </a:pPr>
             <a:r>
-              <a:rPr lang="en-US" sz="1050" b="1" dirty="0">
+              <a:rPr lang="en-US" sz="1150" b="1" dirty="0">
                 <a:solidFill>
                   <a:srgbClr val="1F2933"/>
                 </a:solidFill>
@@ -15128,22 +15703,124 @@
                 <a:ea typeface="Microsoft JhengHei" pitchFamily="34" charset="-122"/>
                 <a:cs typeface="Microsoft JhengHei" pitchFamily="34" charset="-120"/>
               </a:rPr>
-              <a:t>原廠銷售課程</a:t>
+              <a:t>展示中心 Demo</a:t>
             </a:r>
-            <a:endParaRPr lang="en-US" sz="1050" dirty="0"/>
+            <a:endParaRPr lang="en-US" sz="1150" dirty="0"/>
           </a:p>
         </p:txBody>
       </p:sp>
       <p:sp>
         <p:nvSpPr>
-          <p:cNvPr id="41" name="Text 38"/>
+          <p:cNvPr id="43" name="Shape 40"/>
+          <p:cNvSpPr/>
+          <p:nvPr/>
+        </p:nvSpPr>
+        <p:spPr>
+          <a:xfrm>
+            <a:off x="3858768" y="4471416"/>
+            <a:ext cx="237744" cy="237744"/>
+          </a:xfrm>
+          <a:prstGeom prst="roundRect">
+            <a:avLst>
+              <a:gd name="adj" fmla="val 15385"/>
+            </a:avLst>
+          </a:prstGeom>
+          <a:solidFill>
+            <a:srgbClr val="FFFFFF"/>
+          </a:solidFill>
+          <a:ln w="19050">
+            <a:solidFill>
+              <a:srgbClr val="2F8F63"/>
+            </a:solidFill>
+            <a:prstDash val="solid"/>
+          </a:ln>
+        </p:spPr>
+      </p:sp>
+      <p:sp>
+        <p:nvSpPr>
+          <p:cNvPr id="44" name="Shape 41"/>
+          <p:cNvSpPr/>
+          <p:nvPr/>
+        </p:nvSpPr>
+        <p:spPr>
+          <a:xfrm>
+            <a:off x="4544568" y="4471416"/>
+            <a:ext cx="237744" cy="237744"/>
+          </a:xfrm>
+          <a:prstGeom prst="roundRect">
+            <a:avLst>
+              <a:gd name="adj" fmla="val 15385"/>
+            </a:avLst>
+          </a:prstGeom>
+          <a:solidFill>
+            <a:srgbClr val="FFFFFF"/>
+          </a:solidFill>
+          <a:ln w="19050">
+            <a:solidFill>
+              <a:srgbClr val="C0392B"/>
+            </a:solidFill>
+            <a:prstDash val="solid"/>
+          </a:ln>
+        </p:spPr>
+      </p:sp>
+      <p:sp>
+        <p:nvSpPr>
+          <p:cNvPr id="45" name="Shape 42"/>
+          <p:cNvSpPr/>
+          <p:nvPr/>
+        </p:nvSpPr>
+        <p:spPr>
+          <a:xfrm>
+            <a:off x="5166360" y="4700016"/>
+            <a:ext cx="640080" cy="0"/>
+          </a:xfrm>
+          <a:prstGeom prst="line">
+            <a:avLst/>
+          </a:prstGeom>
+          <a:noFill/>
+          <a:ln w="12700">
+            <a:solidFill>
+              <a:srgbClr val="9AA5B1"/>
+            </a:solidFill>
+            <a:prstDash val="solid"/>
+          </a:ln>
+        </p:spPr>
+      </p:sp>
+      <p:sp>
+        <p:nvSpPr>
+          <p:cNvPr id="46" name="Shape 43"/>
+          <p:cNvSpPr/>
+          <p:nvPr/>
+        </p:nvSpPr>
+        <p:spPr>
+          <a:xfrm>
+            <a:off x="731520" y="4818888"/>
+            <a:ext cx="5166360" cy="402336"/>
+          </a:xfrm>
+          <a:prstGeom prst="rect">
+            <a:avLst/>
+          </a:prstGeom>
+          <a:solidFill>
+            <a:srgbClr val="F4F6F9"/>
+          </a:solidFill>
+          <a:ln w="12700">
+            <a:solidFill>
+              <a:srgbClr val="F4F6F9"/>
+            </a:solidFill>
+            <a:prstDash val="solid"/>
+          </a:ln>
+        </p:spPr>
+      </p:sp>
+      <p:sp>
+        <p:nvSpPr>
+          <p:cNvPr id="47" name="Text 44"/>
           <p:cNvSpPr txBox="1"/>
           <p:nvPr/>
         </p:nvSpPr>
         <p:spPr>
           <a:xfrm>
-            <a:off x="4023360" y="4343400"/>
-            <a:ext cx="914400" cy="347472"/>
+            <a:off x="868680" y="4818888"/>
+            <a:ext cx="365760" cy="402336"/>
           </a:xfrm>
           <a:prstGeom prst="rect">
             <a:avLst/>
@@ -15159,94 +15836,7 @@
               <a:buNone/>
             </a:pPr>
             <a:r>
-              <a:rPr lang="en-US" sz="950" dirty="0">
-                <a:solidFill>
-                  <a:srgbClr val="6B7785"/>
-                </a:solidFill>
-                <a:latin typeface="Microsoft JhengHei" pitchFamily="34" charset="0"/>
-                <a:ea typeface="Microsoft JhengHei" pitchFamily="34" charset="-122"/>
-                <a:cs typeface="Microsoft JhengHei" pitchFamily="34" charset="-120"/>
-              </a:rPr>
-              <a:t>原廠講師</a:t>
-            </a:r>
-            <a:endParaRPr lang="en-US" sz="950" dirty="0"/>
-          </a:p>
-        </p:txBody>
-      </p:sp>
-      <p:sp>
-        <p:nvSpPr>
-          <p:cNvPr id="42" name="Shape 39"/>
-          <p:cNvSpPr/>
-          <p:nvPr/>
-        </p:nvSpPr>
-        <p:spPr>
-          <a:xfrm>
-            <a:off x="4892040" y="4617720"/>
-            <a:ext cx="914400" cy="0"/>
-          </a:xfrm>
-          <a:prstGeom prst="line">
-            <a:avLst/>
-          </a:prstGeom>
-          <a:noFill/>
-          <a:ln w="12700">
-            <a:solidFill>
-              <a:srgbClr val="E1E6EC"/>
-            </a:solidFill>
-            <a:prstDash val="solid"/>
-          </a:ln>
-        </p:spPr>
-      </p:sp>
-      <p:sp>
-        <p:nvSpPr>
-          <p:cNvPr id="43" name="Shape 40"/>
-          <p:cNvSpPr/>
-          <p:nvPr/>
-        </p:nvSpPr>
-        <p:spPr>
-          <a:xfrm>
-            <a:off x="868680" y="4791456"/>
-            <a:ext cx="274320" cy="274320"/>
-          </a:xfrm>
-          <a:prstGeom prst="ellipse">
-            <a:avLst/>
-          </a:prstGeom>
-          <a:solidFill>
-            <a:srgbClr val="FFFFFF"/>
-          </a:solidFill>
-          <a:ln w="15875">
-            <a:solidFill>
-              <a:srgbClr val="2E5C8A"/>
-            </a:solidFill>
-            <a:prstDash val="dash"/>
-          </a:ln>
-        </p:spPr>
-      </p:sp>
-      <p:sp>
-        <p:nvSpPr>
-          <p:cNvPr id="44" name="Text 41"/>
-          <p:cNvSpPr txBox="1"/>
-          <p:nvPr/>
-        </p:nvSpPr>
-        <p:spPr>
-          <a:xfrm>
-            <a:off x="868680" y="4791456"/>
-            <a:ext cx="274320" cy="274320"/>
-          </a:xfrm>
-          <a:prstGeom prst="rect">
-            <a:avLst/>
-          </a:prstGeom>
-          <a:noFill/>
-          <a:ln/>
-        </p:spPr>
-        <p:txBody>
-          <a:bodyPr wrap="square" lIns="0" tIns="0" rIns="0" bIns="0" rtlCol="0" anchor="ctr"/>
-          <a:lstStyle/>
-          <a:p>
-            <a:pPr algn="ctr" indent="0" marL="0">
-              <a:buNone/>
-            </a:pPr>
-            <a:r>
-              <a:rPr lang="en-US" sz="850" b="1" dirty="0">
+              <a:rPr lang="en-US" sz="1000" b="1" dirty="0">
                 <a:solidFill>
                   <a:srgbClr val="2E5C8A"/>
                 </a:solidFill>
@@ -15256,20 +15846,20 @@
               </a:rPr>
               <a:t>7</a:t>
             </a:r>
-            <a:endParaRPr lang="en-US" sz="850" dirty="0"/>
+            <a:endParaRPr lang="en-US" sz="1000" dirty="0"/>
           </a:p>
         </p:txBody>
       </p:sp>
       <p:sp>
         <p:nvSpPr>
-          <p:cNvPr id="45" name="Text 42"/>
+          <p:cNvPr id="48" name="Text 45"/>
           <p:cNvSpPr txBox="1"/>
           <p:nvPr/>
         </p:nvSpPr>
         <p:spPr>
           <a:xfrm>
-            <a:off x="1371600" y="4754880"/>
-            <a:ext cx="2651760" cy="347472"/>
+            <a:off x="1280160" y="4818888"/>
+            <a:ext cx="2377440" cy="402336"/>
           </a:xfrm>
           <a:prstGeom prst="rect">
             <a:avLst/>
@@ -15285,7 +15875,7 @@
               <a:buNone/>
             </a:pPr>
             <a:r>
-              <a:rPr lang="en-US" sz="1050" b="1" dirty="0">
+              <a:rPr lang="en-US" sz="1150" b="1" dirty="0">
                 <a:solidFill>
                   <a:srgbClr val="1F2933"/>
                 </a:solidFill>
@@ -15293,22 +15883,99 @@
                 <a:ea typeface="Microsoft JhengHei" pitchFamily="34" charset="-122"/>
                 <a:cs typeface="Microsoft JhengHei" pitchFamily="34" charset="-120"/>
               </a:rPr>
-              <a:t>獨立拜訪 5 家 ＋ 正式提案 1 份</a:t>
+              <a:t>客戶拜訪與提案</a:t>
             </a:r>
-            <a:endParaRPr lang="en-US" sz="1050" dirty="0"/>
+            <a:endParaRPr lang="en-US" sz="1150" dirty="0"/>
           </a:p>
         </p:txBody>
       </p:sp>
       <p:sp>
         <p:nvSpPr>
-          <p:cNvPr id="46" name="Text 43"/>
+          <p:cNvPr id="49" name="Shape 46"/>
+          <p:cNvSpPr/>
+          <p:nvPr/>
+        </p:nvSpPr>
+        <p:spPr>
+          <a:xfrm>
+            <a:off x="3858768" y="4901184"/>
+            <a:ext cx="237744" cy="237744"/>
+          </a:xfrm>
+          <a:prstGeom prst="roundRect">
+            <a:avLst>
+              <a:gd name="adj" fmla="val 15385"/>
+            </a:avLst>
+          </a:prstGeom>
+          <a:solidFill>
+            <a:srgbClr val="FFFFFF"/>
+          </a:solidFill>
+          <a:ln w="19050">
+            <a:solidFill>
+              <a:srgbClr val="2F8F63"/>
+            </a:solidFill>
+            <a:prstDash val="solid"/>
+          </a:ln>
+        </p:spPr>
+      </p:sp>
+      <p:sp>
+        <p:nvSpPr>
+          <p:cNvPr id="50" name="Shape 47"/>
+          <p:cNvSpPr/>
+          <p:nvPr/>
+        </p:nvSpPr>
+        <p:spPr>
+          <a:xfrm>
+            <a:off x="4544568" y="4901184"/>
+            <a:ext cx="237744" cy="237744"/>
+          </a:xfrm>
+          <a:prstGeom prst="roundRect">
+            <a:avLst>
+              <a:gd name="adj" fmla="val 15385"/>
+            </a:avLst>
+          </a:prstGeom>
+          <a:solidFill>
+            <a:srgbClr val="FFFFFF"/>
+          </a:solidFill>
+          <a:ln w="19050">
+            <a:solidFill>
+              <a:srgbClr val="C0392B"/>
+            </a:solidFill>
+            <a:prstDash val="solid"/>
+          </a:ln>
+        </p:spPr>
+      </p:sp>
+      <p:sp>
+        <p:nvSpPr>
+          <p:cNvPr id="51" name="Shape 48"/>
+          <p:cNvSpPr/>
+          <p:nvPr/>
+        </p:nvSpPr>
+        <p:spPr>
+          <a:xfrm>
+            <a:off x="5166360" y="5129784"/>
+            <a:ext cx="640080" cy="0"/>
+          </a:xfrm>
+          <a:prstGeom prst="line">
+            <a:avLst/>
+          </a:prstGeom>
+          <a:noFill/>
+          <a:ln w="12700">
+            <a:solidFill>
+              <a:srgbClr val="9AA5B1"/>
+            </a:solidFill>
+            <a:prstDash val="solid"/>
+          </a:ln>
+        </p:spPr>
+      </p:sp>
+      <p:sp>
+        <p:nvSpPr>
+          <p:cNvPr id="52" name="Text 49"/>
           <p:cNvSpPr txBox="1"/>
           <p:nvPr/>
         </p:nvSpPr>
         <p:spPr>
           <a:xfrm>
-            <a:off x="4023360" y="4754880"/>
-            <a:ext cx="914400" cy="347472"/>
+            <a:off x="868680" y="5248656"/>
+            <a:ext cx="365760" cy="402336"/>
           </a:xfrm>
           <a:prstGeom prst="rect">
             <a:avLst/>
@@ -15324,94 +15991,7 @@
               <a:buNone/>
             </a:pPr>
             <a:r>
-              <a:rPr lang="en-US" sz="950" dirty="0">
-                <a:solidFill>
-                  <a:srgbClr val="6B7785"/>
-                </a:solidFill>
-                <a:latin typeface="Microsoft JhengHei" pitchFamily="34" charset="0"/>
-                <a:ea typeface="Microsoft JhengHei" pitchFamily="34" charset="-122"/>
-                <a:cs typeface="Microsoft JhengHei" pitchFamily="34" charset="-120"/>
-              </a:rPr>
-              <a:t>業務主管</a:t>
-            </a:r>
-            <a:endParaRPr lang="en-US" sz="950" dirty="0"/>
-          </a:p>
-        </p:txBody>
-      </p:sp>
-      <p:sp>
-        <p:nvSpPr>
-          <p:cNvPr id="47" name="Shape 44"/>
-          <p:cNvSpPr/>
-          <p:nvPr/>
-        </p:nvSpPr>
-        <p:spPr>
-          <a:xfrm>
-            <a:off x="4892040" y="5029200"/>
-            <a:ext cx="914400" cy="0"/>
-          </a:xfrm>
-          <a:prstGeom prst="line">
-            <a:avLst/>
-          </a:prstGeom>
-          <a:noFill/>
-          <a:ln w="12700">
-            <a:solidFill>
-              <a:srgbClr val="E1E6EC"/>
-            </a:solidFill>
-            <a:prstDash val="solid"/>
-          </a:ln>
-        </p:spPr>
-      </p:sp>
-      <p:sp>
-        <p:nvSpPr>
-          <p:cNvPr id="48" name="Shape 45"/>
-          <p:cNvSpPr/>
-          <p:nvPr/>
-        </p:nvSpPr>
-        <p:spPr>
-          <a:xfrm>
-            <a:off x="868680" y="5202936"/>
-            <a:ext cx="274320" cy="274320"/>
-          </a:xfrm>
-          <a:prstGeom prst="ellipse">
-            <a:avLst/>
-          </a:prstGeom>
-          <a:solidFill>
-            <a:srgbClr val="FFFFFF"/>
-          </a:solidFill>
-          <a:ln w="15875">
-            <a:solidFill>
-              <a:srgbClr val="2E5C8A"/>
-            </a:solidFill>
-            <a:prstDash val="dash"/>
-          </a:ln>
-        </p:spPr>
-      </p:sp>
-      <p:sp>
-        <p:nvSpPr>
-          <p:cNvPr id="49" name="Text 46"/>
-          <p:cNvSpPr txBox="1"/>
-          <p:nvPr/>
-        </p:nvSpPr>
-        <p:spPr>
-          <a:xfrm>
-            <a:off x="868680" y="5202936"/>
-            <a:ext cx="274320" cy="274320"/>
-          </a:xfrm>
-          <a:prstGeom prst="rect">
-            <a:avLst/>
-          </a:prstGeom>
-          <a:noFill/>
-          <a:ln/>
-        </p:spPr>
-        <p:txBody>
-          <a:bodyPr wrap="square" lIns="0" tIns="0" rIns="0" bIns="0" rtlCol="0" anchor="ctr"/>
-          <a:lstStyle/>
-          <a:p>
-            <a:pPr algn="ctr" indent="0" marL="0">
-              <a:buNone/>
-            </a:pPr>
-            <a:r>
-              <a:rPr lang="en-US" sz="850" b="1" dirty="0">
+              <a:rPr lang="en-US" sz="1000" b="1" dirty="0">
                 <a:solidFill>
                   <a:srgbClr val="2E5C8A"/>
                 </a:solidFill>
@@ -15421,20 +16001,20 @@
               </a:rPr>
               <a:t>8</a:t>
             </a:r>
-            <a:endParaRPr lang="en-US" sz="850" dirty="0"/>
+            <a:endParaRPr lang="en-US" sz="1000" dirty="0"/>
           </a:p>
         </p:txBody>
       </p:sp>
       <p:sp>
         <p:nvSpPr>
-          <p:cNvPr id="50" name="Text 47"/>
+          <p:cNvPr id="53" name="Text 50"/>
           <p:cNvSpPr txBox="1"/>
           <p:nvPr/>
         </p:nvSpPr>
         <p:spPr>
           <a:xfrm>
-            <a:off x="1371600" y="5166360"/>
-            <a:ext cx="2651760" cy="347472"/>
+            <a:off x="1280160" y="5248656"/>
+            <a:ext cx="2377440" cy="402336"/>
           </a:xfrm>
           <a:prstGeom prst="rect">
             <a:avLst/>
@@ -15450,7 +16030,7 @@
               <a:buNone/>
             </a:pPr>
             <a:r>
-              <a:rPr lang="en-US" sz="1050" b="1" dirty="0">
+              <a:rPr lang="en-US" sz="1150" b="1" dirty="0">
                 <a:solidFill>
                   <a:srgbClr val="1F2933"/>
                 </a:solidFill>
@@ -15458,61 +16038,76 @@
                 <a:ea typeface="Microsoft JhengHei" pitchFamily="34" charset="-122"/>
                 <a:cs typeface="Microsoft JhengHei" pitchFamily="34" charset="-120"/>
               </a:rPr>
-              <a:t>Day 90 結訓發表</a:t>
+              <a:t>售後服務流程</a:t>
             </a:r>
-            <a:endParaRPr lang="en-US" sz="1050" dirty="0"/>
+            <a:endParaRPr lang="en-US" sz="1150" dirty="0"/>
           </a:p>
         </p:txBody>
       </p:sp>
       <p:sp>
         <p:nvSpPr>
-          <p:cNvPr id="51" name="Text 48"/>
-          <p:cNvSpPr txBox="1"/>
-          <p:nvPr/>
-        </p:nvSpPr>
-        <p:spPr>
-          <a:xfrm>
-            <a:off x="4023360" y="5166360"/>
-            <a:ext cx="914400" cy="347472"/>
-          </a:xfrm>
-          <a:prstGeom prst="rect">
-            <a:avLst/>
-          </a:prstGeom>
-          <a:noFill/>
-          <a:ln/>
-        </p:spPr>
-        <p:txBody>
-          <a:bodyPr wrap="square" lIns="0" tIns="0" rIns="0" bIns="0" rtlCol="0" anchor="ctr"/>
-          <a:lstStyle/>
-          <a:p>
-            <a:pPr indent="0" marL="0">
-              <a:buNone/>
-            </a:pPr>
-            <a:r>
-              <a:rPr lang="en-US" sz="950" dirty="0">
-                <a:solidFill>
-                  <a:srgbClr val="6B7785"/>
-                </a:solidFill>
-                <a:latin typeface="Microsoft JhengHei" pitchFamily="34" charset="0"/>
-                <a:ea typeface="Microsoft JhengHei" pitchFamily="34" charset="-122"/>
-                <a:cs typeface="Microsoft JhengHei" pitchFamily="34" charset="-120"/>
-              </a:rPr>
-              <a:t>主管</a:t>
-            </a:r>
-            <a:endParaRPr lang="en-US" sz="950" dirty="0"/>
-          </a:p>
-        </p:txBody>
-      </p:sp>
-      <p:sp>
-        <p:nvSpPr>
-          <p:cNvPr id="52" name="Shape 49"/>
+          <p:cNvPr id="54" name="Shape 51"/>
           <p:cNvSpPr/>
           <p:nvPr/>
         </p:nvSpPr>
         <p:spPr>
           <a:xfrm>
-            <a:off x="4892040" y="5440680"/>
-            <a:ext cx="914400" cy="0"/>
+            <a:off x="3858768" y="5330952"/>
+            <a:ext cx="237744" cy="237744"/>
+          </a:xfrm>
+          <a:prstGeom prst="roundRect">
+            <a:avLst>
+              <a:gd name="adj" fmla="val 15385"/>
+            </a:avLst>
+          </a:prstGeom>
+          <a:solidFill>
+            <a:srgbClr val="FFFFFF"/>
+          </a:solidFill>
+          <a:ln w="19050">
+            <a:solidFill>
+              <a:srgbClr val="2F8F63"/>
+            </a:solidFill>
+            <a:prstDash val="solid"/>
+          </a:ln>
+        </p:spPr>
+      </p:sp>
+      <p:sp>
+        <p:nvSpPr>
+          <p:cNvPr id="55" name="Shape 52"/>
+          <p:cNvSpPr/>
+          <p:nvPr/>
+        </p:nvSpPr>
+        <p:spPr>
+          <a:xfrm>
+            <a:off x="4544568" y="5330952"/>
+            <a:ext cx="237744" cy="237744"/>
+          </a:xfrm>
+          <a:prstGeom prst="roundRect">
+            <a:avLst>
+              <a:gd name="adj" fmla="val 15385"/>
+            </a:avLst>
+          </a:prstGeom>
+          <a:solidFill>
+            <a:srgbClr val="FFFFFF"/>
+          </a:solidFill>
+          <a:ln w="19050">
+            <a:solidFill>
+              <a:srgbClr val="C0392B"/>
+            </a:solidFill>
+            <a:prstDash val="solid"/>
+          </a:ln>
+        </p:spPr>
+      </p:sp>
+      <p:sp>
+        <p:nvSpPr>
+          <p:cNvPr id="56" name="Shape 53"/>
+          <p:cNvSpPr/>
+          <p:nvPr/>
+        </p:nvSpPr>
+        <p:spPr>
+          <a:xfrm>
+            <a:off x="5166360" y="5559552"/>
+            <a:ext cx="640080" cy="0"/>
           </a:xfrm>
           <a:prstGeom prst="line">
             <a:avLst/>
@@ -15520,7 +16115,7 @@
           <a:noFill/>
           <a:ln w="12700">
             <a:solidFill>
-              <a:srgbClr val="E1E6EC"/>
+              <a:srgbClr val="9AA5B1"/>
             </a:solidFill>
             <a:prstDash val="solid"/>
           </a:ln>
@@ -15528,18 +16123,18 @@
       </p:sp>
       <p:sp>
         <p:nvSpPr>
-          <p:cNvPr id="53" name="Shape 50"/>
+          <p:cNvPr id="57" name="Shape 54"/>
           <p:cNvSpPr/>
           <p:nvPr/>
         </p:nvSpPr>
         <p:spPr>
           <a:xfrm>
             <a:off x="6217920" y="1463040"/>
-            <a:ext cx="5349240" cy="4343400"/>
+            <a:ext cx="5349240" cy="4389120"/>
           </a:xfrm>
           <a:prstGeom prst="roundRect">
             <a:avLst>
-              <a:gd name="adj" fmla="val 2947"/>
+              <a:gd name="adj" fmla="val 2917"/>
             </a:avLst>
           </a:prstGeom>
           <a:solidFill>
@@ -15562,7 +16157,7 @@
       </p:sp>
       <p:sp>
         <p:nvSpPr>
-          <p:cNvPr id="54" name="Shape 51"/>
+          <p:cNvPr id="58" name="Shape 55"/>
           <p:cNvSpPr/>
           <p:nvPr/>
         </p:nvSpPr>
@@ -15589,7 +16184,7 @@
       </p:sp>
       <p:sp>
         <p:nvSpPr>
-          <p:cNvPr id="55" name="Shape 52"/>
+          <p:cNvPr id="59" name="Shape 56"/>
           <p:cNvSpPr/>
           <p:nvPr/>
         </p:nvSpPr>
@@ -15614,7 +16209,7 @@
       </p:sp>
       <p:sp>
         <p:nvSpPr>
-          <p:cNvPr id="56" name="Shape 53"/>
+          <p:cNvPr id="60" name="Shape 57"/>
           <p:cNvSpPr/>
           <p:nvPr/>
         </p:nvSpPr>
@@ -15639,7 +16234,7 @@
       </p:sp>
       <p:pic>
         <p:nvPicPr>
-          <p:cNvPr id="57" name="Image 1" descr="preencoded.png">    </p:cNvPr>
+          <p:cNvPr id="61" name="Image 1" descr="preencoded.png">    </p:cNvPr>
           <p:cNvPicPr>
             <a:picLocks noChangeAspect="1"/>
           </p:cNvPicPr>
@@ -15663,14 +16258,14 @@
       </p:pic>
       <p:sp>
         <p:nvSpPr>
-          <p:cNvPr id="58" name="Text 54"/>
+          <p:cNvPr id="62" name="Text 58"/>
           <p:cNvSpPr txBox="1"/>
           <p:nvPr/>
         </p:nvSpPr>
         <p:spPr>
           <a:xfrm>
             <a:off x="6949440" y="1463040"/>
-            <a:ext cx="2743200" cy="640080"/>
+            <a:ext cx="2286000" cy="640080"/>
           </a:xfrm>
           <a:prstGeom prst="rect">
             <a:avLst/>
@@ -15686,7 +16281,7 @@
               <a:buNone/>
             </a:pPr>
             <a:r>
-              <a:rPr lang="en-US" sz="1400" b="1" dirty="0">
+              <a:rPr lang="en-US" sz="1500" b="1" dirty="0">
                 <a:solidFill>
                   <a:srgbClr val="E8762E"/>
                 </a:solidFill>
@@ -15694,22 +16289,164 @@
                 <a:ea typeface="Microsoft JhengHei" pitchFamily="34" charset="-122"/>
                 <a:cs typeface="Microsoft JhengHei" pitchFamily="34" charset="-120"/>
               </a:rPr>
-              <a:t>技術組  ・  8 章</a:t>
+              <a:t>技術</a:t>
             </a:r>
-            <a:endParaRPr lang="en-US" sz="1400" dirty="0"/>
+            <a:endParaRPr lang="en-US" sz="1500" dirty="0"/>
           </a:p>
         </p:txBody>
       </p:sp>
       <p:sp>
         <p:nvSpPr>
-          <p:cNvPr id="59" name="Text 55"/>
+          <p:cNvPr id="63" name="Text 59"/>
           <p:cNvSpPr txBox="1"/>
           <p:nvPr/>
         </p:nvSpPr>
         <p:spPr>
           <a:xfrm>
-            <a:off x="6949440" y="1828800"/>
-            <a:ext cx="2743200" cy="274320"/>
+            <a:off x="9235440" y="1463040"/>
+            <a:ext cx="640080" cy="640080"/>
+          </a:xfrm>
+          <a:prstGeom prst="rect">
+            <a:avLst/>
+          </a:prstGeom>
+          <a:noFill/>
+          <a:ln/>
+        </p:spPr>
+        <p:txBody>
+          <a:bodyPr wrap="square" lIns="0" tIns="0" rIns="0" bIns="0" rtlCol="0" anchor="ctr"/>
+          <a:lstStyle/>
+          <a:p>
+            <a:pPr algn="ctr" indent="0" marL="0">
+              <a:buNone/>
+            </a:pPr>
+            <a:r>
+              <a:rPr lang="en-US" sz="1100" b="1" dirty="0">
+                <a:solidFill>
+                  <a:srgbClr val="2F8F63"/>
+                </a:solidFill>
+                <a:latin typeface="Arial" pitchFamily="34" charset="0"/>
+                <a:ea typeface="Arial" pitchFamily="34" charset="-122"/>
+                <a:cs typeface="Arial" pitchFamily="34" charset="-120"/>
+              </a:rPr>
+              <a:t>OK</a:t>
+            </a:r>
+            <a:endParaRPr lang="en-US" sz="1100" dirty="0"/>
+          </a:p>
+        </p:txBody>
+      </p:sp>
+      <p:sp>
+        <p:nvSpPr>
+          <p:cNvPr id="64" name="Text 60"/>
+          <p:cNvSpPr txBox="1"/>
+          <p:nvPr/>
+        </p:nvSpPr>
+        <p:spPr>
+          <a:xfrm>
+            <a:off x="9921240" y="1463040"/>
+            <a:ext cx="640080" cy="640080"/>
+          </a:xfrm>
+          <a:prstGeom prst="rect">
+            <a:avLst/>
+          </a:prstGeom>
+          <a:noFill/>
+          <a:ln/>
+        </p:spPr>
+        <p:txBody>
+          <a:bodyPr wrap="square" lIns="0" tIns="0" rIns="0" bIns="0" rtlCol="0" anchor="ctr"/>
+          <a:lstStyle/>
+          <a:p>
+            <a:pPr algn="ctr" indent="0" marL="0">
+              <a:buNone/>
+            </a:pPr>
+            <a:r>
+              <a:rPr lang="en-US" sz="1100" b="1" dirty="0">
+                <a:solidFill>
+                  <a:srgbClr val="C0392B"/>
+                </a:solidFill>
+                <a:latin typeface="Microsoft JhengHei" pitchFamily="34" charset="0"/>
+                <a:ea typeface="Microsoft JhengHei" pitchFamily="34" charset="-122"/>
+                <a:cs typeface="Microsoft JhengHei" pitchFamily="34" charset="-120"/>
+              </a:rPr>
+              <a:t>不OK</a:t>
+            </a:r>
+            <a:endParaRPr lang="en-US" sz="1100" dirty="0"/>
+          </a:p>
+        </p:txBody>
+      </p:sp>
+      <p:sp>
+        <p:nvSpPr>
+          <p:cNvPr id="65" name="Text 61"/>
+          <p:cNvSpPr txBox="1"/>
+          <p:nvPr/>
+        </p:nvSpPr>
+        <p:spPr>
+          <a:xfrm>
+            <a:off x="10652760" y="1463040"/>
+            <a:ext cx="822960" cy="640080"/>
+          </a:xfrm>
+          <a:prstGeom prst="rect">
+            <a:avLst/>
+          </a:prstGeom>
+          <a:noFill/>
+          <a:ln/>
+        </p:spPr>
+        <p:txBody>
+          <a:bodyPr wrap="square" lIns="0" tIns="0" rIns="0" bIns="0" rtlCol="0" anchor="ctr"/>
+          <a:lstStyle/>
+          <a:p>
+            <a:pPr algn="ctr" indent="0" marL="0">
+              <a:buNone/>
+            </a:pPr>
+            <a:r>
+              <a:rPr lang="en-US" sz="1000" b="1" dirty="0">
+                <a:solidFill>
+                  <a:srgbClr val="6B7785"/>
+                </a:solidFill>
+                <a:latin typeface="Microsoft JhengHei" pitchFamily="34" charset="0"/>
+                <a:ea typeface="Microsoft JhengHei" pitchFamily="34" charset="-122"/>
+                <a:cs typeface="Microsoft JhengHei" pitchFamily="34" charset="-120"/>
+              </a:rPr>
+              <a:t>確認人</a:t>
+            </a:r>
+            <a:endParaRPr lang="en-US" sz="1000" dirty="0"/>
+          </a:p>
+        </p:txBody>
+      </p:sp>
+      <p:sp>
+        <p:nvSpPr>
+          <p:cNvPr id="66" name="Shape 62"/>
+          <p:cNvSpPr/>
+          <p:nvPr/>
+        </p:nvSpPr>
+        <p:spPr>
+          <a:xfrm>
+            <a:off x="6309360" y="2240280"/>
+            <a:ext cx="5166360" cy="402336"/>
+          </a:xfrm>
+          <a:prstGeom prst="rect">
+            <a:avLst/>
+          </a:prstGeom>
+          <a:solidFill>
+            <a:srgbClr val="F4F6F9"/>
+          </a:solidFill>
+          <a:ln w="12700">
+            <a:solidFill>
+              <a:srgbClr val="F4F6F9"/>
+            </a:solidFill>
+            <a:prstDash val="solid"/>
+          </a:ln>
+        </p:spPr>
+      </p:sp>
+      <p:sp>
+        <p:nvSpPr>
+          <p:cNvPr id="67" name="Text 63"/>
+          <p:cNvSpPr txBox="1"/>
+          <p:nvPr/>
+        </p:nvSpPr>
+        <p:spPr>
+          <a:xfrm>
+            <a:off x="6446520" y="2240280"/>
+            <a:ext cx="365760" cy="402336"/>
           </a:xfrm>
           <a:prstGeom prst="rect">
             <a:avLst/>
@@ -15725,149 +16462,7 @@
               <a:buNone/>
             </a:pPr>
             <a:r>
-              <a:rPr lang="en-US" sz="900" dirty="0">
-                <a:solidFill>
-                  <a:srgbClr val="6B7785"/>
-                </a:solidFill>
-                <a:latin typeface="Microsoft JhengHei" pitchFamily="34" charset="0"/>
-                <a:ea typeface="Microsoft JhengHei" pitchFamily="34" charset="-122"/>
-                <a:cs typeface="Microsoft JhengHei" pitchFamily="34" charset="-120"/>
-              </a:rPr>
-              <a:t>項目</a:t>
-            </a:r>
-            <a:endParaRPr lang="en-US" sz="900" dirty="0"/>
-          </a:p>
-        </p:txBody>
-      </p:sp>
-      <p:sp>
-        <p:nvSpPr>
-          <p:cNvPr id="60" name="Text 56"/>
-          <p:cNvSpPr txBox="1"/>
-          <p:nvPr/>
-        </p:nvSpPr>
-        <p:spPr>
-          <a:xfrm>
-            <a:off x="9601200" y="1828800"/>
-            <a:ext cx="914400" cy="274320"/>
-          </a:xfrm>
-          <a:prstGeom prst="rect">
-            <a:avLst/>
-          </a:prstGeom>
-          <a:noFill/>
-          <a:ln/>
-        </p:spPr>
-        <p:txBody>
-          <a:bodyPr wrap="square" lIns="0" tIns="0" rIns="0" bIns="0" rtlCol="0" anchor="ctr"/>
-          <a:lstStyle/>
-          <a:p>
-            <a:pPr indent="0" marL="0">
-              <a:buNone/>
-            </a:pPr>
-            <a:r>
-              <a:rPr lang="en-US" sz="900" dirty="0">
-                <a:solidFill>
-                  <a:srgbClr val="6B7785"/>
-                </a:solidFill>
-                <a:latin typeface="Microsoft JhengHei" pitchFamily="34" charset="0"/>
-                <a:ea typeface="Microsoft JhengHei" pitchFamily="34" charset="-122"/>
-                <a:cs typeface="Microsoft JhengHei" pitchFamily="34" charset="-120"/>
-              </a:rPr>
-              <a:t>簽章人</a:t>
-            </a:r>
-            <a:endParaRPr lang="en-US" sz="900" dirty="0"/>
-          </a:p>
-        </p:txBody>
-      </p:sp>
-      <p:sp>
-        <p:nvSpPr>
-          <p:cNvPr id="61" name="Text 57"/>
-          <p:cNvSpPr txBox="1"/>
-          <p:nvPr/>
-        </p:nvSpPr>
-        <p:spPr>
-          <a:xfrm>
-            <a:off x="10469880" y="1828800"/>
-            <a:ext cx="1005840" cy="274320"/>
-          </a:xfrm>
-          <a:prstGeom prst="rect">
-            <a:avLst/>
-          </a:prstGeom>
-          <a:noFill/>
-          <a:ln/>
-        </p:spPr>
-        <p:txBody>
-          <a:bodyPr wrap="square" lIns="0" tIns="0" rIns="0" bIns="0" rtlCol="0" anchor="ctr"/>
-          <a:lstStyle/>
-          <a:p>
-            <a:pPr indent="0" marL="0">
-              <a:buNone/>
-            </a:pPr>
-            <a:r>
-              <a:rPr lang="en-US" sz="900" dirty="0">
-                <a:solidFill>
-                  <a:srgbClr val="6B7785"/>
-                </a:solidFill>
-                <a:latin typeface="Microsoft JhengHei" pitchFamily="34" charset="0"/>
-                <a:ea typeface="Microsoft JhengHei" pitchFamily="34" charset="-122"/>
-                <a:cs typeface="Microsoft JhengHei" pitchFamily="34" charset="-120"/>
-              </a:rPr>
-              <a:t>日期／簽章</a:t>
-            </a:r>
-            <a:endParaRPr lang="en-US" sz="900" dirty="0"/>
-          </a:p>
-        </p:txBody>
-      </p:sp>
-      <p:sp>
-        <p:nvSpPr>
-          <p:cNvPr id="62" name="Shape 58"/>
-          <p:cNvSpPr/>
-          <p:nvPr/>
-        </p:nvSpPr>
-        <p:spPr>
-          <a:xfrm>
-            <a:off x="6446520" y="2322576"/>
-            <a:ext cx="274320" cy="274320"/>
-          </a:xfrm>
-          <a:prstGeom prst="ellipse">
-            <a:avLst/>
-          </a:prstGeom>
-          <a:solidFill>
-            <a:srgbClr val="FFFFFF"/>
-          </a:solidFill>
-          <a:ln w="15875">
-            <a:solidFill>
-              <a:srgbClr val="E8762E"/>
-            </a:solidFill>
-            <a:prstDash val="dash"/>
-          </a:ln>
-        </p:spPr>
-      </p:sp>
-      <p:sp>
-        <p:nvSpPr>
-          <p:cNvPr id="63" name="Text 59"/>
-          <p:cNvSpPr txBox="1"/>
-          <p:nvPr/>
-        </p:nvSpPr>
-        <p:spPr>
-          <a:xfrm>
-            <a:off x="6446520" y="2322576"/>
-            <a:ext cx="274320" cy="274320"/>
-          </a:xfrm>
-          <a:prstGeom prst="rect">
-            <a:avLst/>
-          </a:prstGeom>
-          <a:noFill/>
-          <a:ln/>
-        </p:spPr>
-        <p:txBody>
-          <a:bodyPr wrap="square" lIns="0" tIns="0" rIns="0" bIns="0" rtlCol="0" anchor="ctr"/>
-          <a:lstStyle/>
-          <a:p>
-            <a:pPr algn="ctr" indent="0" marL="0">
-              <a:buNone/>
-            </a:pPr>
-            <a:r>
-              <a:rPr lang="en-US" sz="850" b="1" dirty="0">
+              <a:rPr lang="en-US" sz="1000" b="1" dirty="0">
                 <a:solidFill>
                   <a:srgbClr val="E8762E"/>
                 </a:solidFill>
@@ -15877,20 +16472,20 @@
               </a:rPr>
               <a:t>1</a:t>
             </a:r>
-            <a:endParaRPr lang="en-US" sz="850" dirty="0"/>
+            <a:endParaRPr lang="en-US" sz="1000" dirty="0"/>
           </a:p>
         </p:txBody>
       </p:sp>
       <p:sp>
         <p:nvSpPr>
-          <p:cNvPr id="64" name="Text 60"/>
+          <p:cNvPr id="68" name="Text 64"/>
           <p:cNvSpPr txBox="1"/>
           <p:nvPr/>
         </p:nvSpPr>
         <p:spPr>
           <a:xfrm>
-            <a:off x="6949440" y="2286000"/>
-            <a:ext cx="2651760" cy="347472"/>
+            <a:off x="6858000" y="2240280"/>
+            <a:ext cx="2377440" cy="402336"/>
           </a:xfrm>
           <a:prstGeom prst="rect">
             <a:avLst/>
@@ -15906,7 +16501,7 @@
               <a:buNone/>
             </a:pPr>
             <a:r>
-              <a:rPr lang="en-US" sz="1050" b="1" dirty="0">
+              <a:rPr lang="en-US" sz="1150" b="1" dirty="0">
                 <a:solidFill>
                   <a:srgbClr val="1F2933"/>
                 </a:solidFill>
@@ -15914,22 +16509,99 @@
                 <a:ea typeface="Microsoft JhengHei" pitchFamily="34" charset="-122"/>
                 <a:cs typeface="Microsoft JhengHei" pitchFamily="34" charset="-120"/>
               </a:rPr>
-              <a:t>公司制度與安全教育</a:t>
+              <a:t>了解機台相關知識</a:t>
             </a:r>
-            <a:endParaRPr lang="en-US" sz="1050" dirty="0"/>
+            <a:endParaRPr lang="en-US" sz="1150" dirty="0"/>
           </a:p>
         </p:txBody>
       </p:sp>
       <p:sp>
         <p:nvSpPr>
-          <p:cNvPr id="65" name="Text 61"/>
+          <p:cNvPr id="69" name="Shape 65"/>
+          <p:cNvSpPr/>
+          <p:nvPr/>
+        </p:nvSpPr>
+        <p:spPr>
+          <a:xfrm>
+            <a:off x="9436608" y="2322576"/>
+            <a:ext cx="237744" cy="237744"/>
+          </a:xfrm>
+          <a:prstGeom prst="roundRect">
+            <a:avLst>
+              <a:gd name="adj" fmla="val 15385"/>
+            </a:avLst>
+          </a:prstGeom>
+          <a:solidFill>
+            <a:srgbClr val="FFFFFF"/>
+          </a:solidFill>
+          <a:ln w="19050">
+            <a:solidFill>
+              <a:srgbClr val="2F8F63"/>
+            </a:solidFill>
+            <a:prstDash val="solid"/>
+          </a:ln>
+        </p:spPr>
+      </p:sp>
+      <p:sp>
+        <p:nvSpPr>
+          <p:cNvPr id="70" name="Shape 66"/>
+          <p:cNvSpPr/>
+          <p:nvPr/>
+        </p:nvSpPr>
+        <p:spPr>
+          <a:xfrm>
+            <a:off x="10122408" y="2322576"/>
+            <a:ext cx="237744" cy="237744"/>
+          </a:xfrm>
+          <a:prstGeom prst="roundRect">
+            <a:avLst>
+              <a:gd name="adj" fmla="val 15385"/>
+            </a:avLst>
+          </a:prstGeom>
+          <a:solidFill>
+            <a:srgbClr val="FFFFFF"/>
+          </a:solidFill>
+          <a:ln w="19050">
+            <a:solidFill>
+              <a:srgbClr val="C0392B"/>
+            </a:solidFill>
+            <a:prstDash val="solid"/>
+          </a:ln>
+        </p:spPr>
+      </p:sp>
+      <p:sp>
+        <p:nvSpPr>
+          <p:cNvPr id="71" name="Shape 67"/>
+          <p:cNvSpPr/>
+          <p:nvPr/>
+        </p:nvSpPr>
+        <p:spPr>
+          <a:xfrm>
+            <a:off x="10744200" y="2551176"/>
+            <a:ext cx="640080" cy="0"/>
+          </a:xfrm>
+          <a:prstGeom prst="line">
+            <a:avLst/>
+          </a:prstGeom>
+          <a:noFill/>
+          <a:ln w="12700">
+            <a:solidFill>
+              <a:srgbClr val="9AA5B1"/>
+            </a:solidFill>
+            <a:prstDash val="solid"/>
+          </a:ln>
+        </p:spPr>
+      </p:sp>
+      <p:sp>
+        <p:nvSpPr>
+          <p:cNvPr id="72" name="Text 68"/>
           <p:cNvSpPr txBox="1"/>
           <p:nvPr/>
         </p:nvSpPr>
         <p:spPr>
           <a:xfrm>
-            <a:off x="9601200" y="2286000"/>
-            <a:ext cx="914400" cy="347472"/>
+            <a:off x="6446520" y="2670048"/>
+            <a:ext cx="365760" cy="402336"/>
           </a:xfrm>
           <a:prstGeom prst="rect">
             <a:avLst/>
@@ -15945,94 +16617,7 @@
               <a:buNone/>
             </a:pPr>
             <a:r>
-              <a:rPr lang="en-US" sz="950" dirty="0">
-                <a:solidFill>
-                  <a:srgbClr val="6B7785"/>
-                </a:solidFill>
-                <a:latin typeface="Microsoft JhengHei" pitchFamily="34" charset="0"/>
-                <a:ea typeface="Microsoft JhengHei" pitchFamily="34" charset="-122"/>
-                <a:cs typeface="Microsoft JhengHei" pitchFamily="34" charset="-120"/>
-              </a:rPr>
-              <a:t>人資</a:t>
-            </a:r>
-            <a:endParaRPr lang="en-US" sz="950" dirty="0"/>
-          </a:p>
-        </p:txBody>
-      </p:sp>
-      <p:sp>
-        <p:nvSpPr>
-          <p:cNvPr id="66" name="Shape 62"/>
-          <p:cNvSpPr/>
-          <p:nvPr/>
-        </p:nvSpPr>
-        <p:spPr>
-          <a:xfrm>
-            <a:off x="10469880" y="2560320"/>
-            <a:ext cx="914400" cy="0"/>
-          </a:xfrm>
-          <a:prstGeom prst="line">
-            <a:avLst/>
-          </a:prstGeom>
-          <a:noFill/>
-          <a:ln w="12700">
-            <a:solidFill>
-              <a:srgbClr val="E1E6EC"/>
-            </a:solidFill>
-            <a:prstDash val="solid"/>
-          </a:ln>
-        </p:spPr>
-      </p:sp>
-      <p:sp>
-        <p:nvSpPr>
-          <p:cNvPr id="67" name="Shape 63"/>
-          <p:cNvSpPr/>
-          <p:nvPr/>
-        </p:nvSpPr>
-        <p:spPr>
-          <a:xfrm>
-            <a:off x="6446520" y="2734056"/>
-            <a:ext cx="274320" cy="274320"/>
-          </a:xfrm>
-          <a:prstGeom prst="ellipse">
-            <a:avLst/>
-          </a:prstGeom>
-          <a:solidFill>
-            <a:srgbClr val="FFFFFF"/>
-          </a:solidFill>
-          <a:ln w="15875">
-            <a:solidFill>
-              <a:srgbClr val="E8762E"/>
-            </a:solidFill>
-            <a:prstDash val="dash"/>
-          </a:ln>
-        </p:spPr>
-      </p:sp>
-      <p:sp>
-        <p:nvSpPr>
-          <p:cNvPr id="68" name="Text 64"/>
-          <p:cNvSpPr txBox="1"/>
-          <p:nvPr/>
-        </p:nvSpPr>
-        <p:spPr>
-          <a:xfrm>
-            <a:off x="6446520" y="2734056"/>
-            <a:ext cx="274320" cy="274320"/>
-          </a:xfrm>
-          <a:prstGeom prst="rect">
-            <a:avLst/>
-          </a:prstGeom>
-          <a:noFill/>
-          <a:ln/>
-        </p:spPr>
-        <p:txBody>
-          <a:bodyPr wrap="square" lIns="0" tIns="0" rIns="0" bIns="0" rtlCol="0" anchor="ctr"/>
-          <a:lstStyle/>
-          <a:p>
-            <a:pPr algn="ctr" indent="0" marL="0">
-              <a:buNone/>
-            </a:pPr>
-            <a:r>
-              <a:rPr lang="en-US" sz="850" b="1" dirty="0">
+              <a:rPr lang="en-US" sz="1000" b="1" dirty="0">
                 <a:solidFill>
                   <a:srgbClr val="E8762E"/>
                 </a:solidFill>
@@ -16042,20 +16627,20 @@
               </a:rPr>
               <a:t>2</a:t>
             </a:r>
-            <a:endParaRPr lang="en-US" sz="850" dirty="0"/>
+            <a:endParaRPr lang="en-US" sz="1000" dirty="0"/>
           </a:p>
         </p:txBody>
       </p:sp>
       <p:sp>
         <p:nvSpPr>
-          <p:cNvPr id="69" name="Text 65"/>
+          <p:cNvPr id="73" name="Text 69"/>
           <p:cNvSpPr txBox="1"/>
           <p:nvPr/>
         </p:nvSpPr>
         <p:spPr>
           <a:xfrm>
-            <a:off x="6949440" y="2697480"/>
-            <a:ext cx="2651760" cy="347472"/>
+            <a:off x="6858000" y="2670048"/>
+            <a:ext cx="2377440" cy="402336"/>
           </a:xfrm>
           <a:prstGeom prst="rect">
             <a:avLst/>
@@ -16071,7 +16656,7 @@
               <a:buNone/>
             </a:pPr>
             <a:r>
-              <a:rPr lang="en-US" sz="1050" b="1" dirty="0">
+              <a:rPr lang="en-US" sz="1150" b="1" dirty="0">
                 <a:solidFill>
                   <a:srgbClr val="1F2933"/>
                 </a:solidFill>
@@ -16079,22 +16664,124 @@
                 <a:ea typeface="Microsoft JhengHei" pitchFamily="34" charset="-122"/>
                 <a:cs typeface="Microsoft JhengHei" pitchFamily="34" charset="-120"/>
               </a:rPr>
-              <a:t>三大產品型錄研讀</a:t>
+              <a:t>Brother 控制器操作</a:t>
             </a:r>
-            <a:endParaRPr lang="en-US" sz="1050" dirty="0"/>
+            <a:endParaRPr lang="en-US" sz="1150" dirty="0"/>
           </a:p>
         </p:txBody>
       </p:sp>
       <p:sp>
         <p:nvSpPr>
-          <p:cNvPr id="70" name="Text 66"/>
+          <p:cNvPr id="74" name="Shape 70"/>
+          <p:cNvSpPr/>
+          <p:nvPr/>
+        </p:nvSpPr>
+        <p:spPr>
+          <a:xfrm>
+            <a:off x="9436608" y="2752344"/>
+            <a:ext cx="237744" cy="237744"/>
+          </a:xfrm>
+          <a:prstGeom prst="roundRect">
+            <a:avLst>
+              <a:gd name="adj" fmla="val 15385"/>
+            </a:avLst>
+          </a:prstGeom>
+          <a:solidFill>
+            <a:srgbClr val="FFFFFF"/>
+          </a:solidFill>
+          <a:ln w="19050">
+            <a:solidFill>
+              <a:srgbClr val="2F8F63"/>
+            </a:solidFill>
+            <a:prstDash val="solid"/>
+          </a:ln>
+        </p:spPr>
+      </p:sp>
+      <p:sp>
+        <p:nvSpPr>
+          <p:cNvPr id="75" name="Shape 71"/>
+          <p:cNvSpPr/>
+          <p:nvPr/>
+        </p:nvSpPr>
+        <p:spPr>
+          <a:xfrm>
+            <a:off x="10122408" y="2752344"/>
+            <a:ext cx="237744" cy="237744"/>
+          </a:xfrm>
+          <a:prstGeom prst="roundRect">
+            <a:avLst>
+              <a:gd name="adj" fmla="val 15385"/>
+            </a:avLst>
+          </a:prstGeom>
+          <a:solidFill>
+            <a:srgbClr val="FFFFFF"/>
+          </a:solidFill>
+          <a:ln w="19050">
+            <a:solidFill>
+              <a:srgbClr val="C0392B"/>
+            </a:solidFill>
+            <a:prstDash val="solid"/>
+          </a:ln>
+        </p:spPr>
+      </p:sp>
+      <p:sp>
+        <p:nvSpPr>
+          <p:cNvPr id="76" name="Shape 72"/>
+          <p:cNvSpPr/>
+          <p:nvPr/>
+        </p:nvSpPr>
+        <p:spPr>
+          <a:xfrm>
+            <a:off x="10744200" y="2980944"/>
+            <a:ext cx="640080" cy="0"/>
+          </a:xfrm>
+          <a:prstGeom prst="line">
+            <a:avLst/>
+          </a:prstGeom>
+          <a:noFill/>
+          <a:ln w="12700">
+            <a:solidFill>
+              <a:srgbClr val="9AA5B1"/>
+            </a:solidFill>
+            <a:prstDash val="solid"/>
+          </a:ln>
+        </p:spPr>
+      </p:sp>
+      <p:sp>
+        <p:nvSpPr>
+          <p:cNvPr id="77" name="Shape 73"/>
+          <p:cNvSpPr/>
+          <p:nvPr/>
+        </p:nvSpPr>
+        <p:spPr>
+          <a:xfrm>
+            <a:off x="6309360" y="3099816"/>
+            <a:ext cx="5166360" cy="402336"/>
+          </a:xfrm>
+          <a:prstGeom prst="rect">
+            <a:avLst/>
+          </a:prstGeom>
+          <a:solidFill>
+            <a:srgbClr val="F4F6F9"/>
+          </a:solidFill>
+          <a:ln w="12700">
+            <a:solidFill>
+              <a:srgbClr val="F4F6F9"/>
+            </a:solidFill>
+            <a:prstDash val="solid"/>
+          </a:ln>
+        </p:spPr>
+      </p:sp>
+      <p:sp>
+        <p:nvSpPr>
+          <p:cNvPr id="78" name="Text 74"/>
           <p:cNvSpPr txBox="1"/>
           <p:nvPr/>
         </p:nvSpPr>
         <p:spPr>
           <a:xfrm>
-            <a:off x="9601200" y="2697480"/>
-            <a:ext cx="914400" cy="347472"/>
+            <a:off x="6446520" y="3099816"/>
+            <a:ext cx="365760" cy="402336"/>
           </a:xfrm>
           <a:prstGeom prst="rect">
             <a:avLst/>
@@ -16110,94 +16797,7 @@
               <a:buNone/>
             </a:pPr>
             <a:r>
-              <a:rPr lang="en-US" sz="950" dirty="0">
-                <a:solidFill>
-                  <a:srgbClr val="6B7785"/>
-                </a:solidFill>
-                <a:latin typeface="Microsoft JhengHei" pitchFamily="34" charset="0"/>
-                <a:ea typeface="Microsoft JhengHei" pitchFamily="34" charset="-122"/>
-                <a:cs typeface="Microsoft JhengHei" pitchFamily="34" charset="-120"/>
-              </a:rPr>
-              <a:t>導師</a:t>
-            </a:r>
-            <a:endParaRPr lang="en-US" sz="950" dirty="0"/>
-          </a:p>
-        </p:txBody>
-      </p:sp>
-      <p:sp>
-        <p:nvSpPr>
-          <p:cNvPr id="71" name="Shape 67"/>
-          <p:cNvSpPr/>
-          <p:nvPr/>
-        </p:nvSpPr>
-        <p:spPr>
-          <a:xfrm>
-            <a:off x="10469880" y="2971800"/>
-            <a:ext cx="914400" cy="0"/>
-          </a:xfrm>
-          <a:prstGeom prst="line">
-            <a:avLst/>
-          </a:prstGeom>
-          <a:noFill/>
-          <a:ln w="12700">
-            <a:solidFill>
-              <a:srgbClr val="E1E6EC"/>
-            </a:solidFill>
-            <a:prstDash val="solid"/>
-          </a:ln>
-        </p:spPr>
-      </p:sp>
-      <p:sp>
-        <p:nvSpPr>
-          <p:cNvPr id="72" name="Shape 68"/>
-          <p:cNvSpPr/>
-          <p:nvPr/>
-        </p:nvSpPr>
-        <p:spPr>
-          <a:xfrm>
-            <a:off x="6446520" y="3145536"/>
-            <a:ext cx="274320" cy="274320"/>
-          </a:xfrm>
-          <a:prstGeom prst="ellipse">
-            <a:avLst/>
-          </a:prstGeom>
-          <a:solidFill>
-            <a:srgbClr val="FFFFFF"/>
-          </a:solidFill>
-          <a:ln w="15875">
-            <a:solidFill>
-              <a:srgbClr val="E8762E"/>
-            </a:solidFill>
-            <a:prstDash val="dash"/>
-          </a:ln>
-        </p:spPr>
-      </p:sp>
-      <p:sp>
-        <p:nvSpPr>
-          <p:cNvPr id="73" name="Text 69"/>
-          <p:cNvSpPr txBox="1"/>
-          <p:nvPr/>
-        </p:nvSpPr>
-        <p:spPr>
-          <a:xfrm>
-            <a:off x="6446520" y="3145536"/>
-            <a:ext cx="274320" cy="274320"/>
-          </a:xfrm>
-          <a:prstGeom prst="rect">
-            <a:avLst/>
-          </a:prstGeom>
-          <a:noFill/>
-          <a:ln/>
-        </p:spPr>
-        <p:txBody>
-          <a:bodyPr wrap="square" lIns="0" tIns="0" rIns="0" bIns="0" rtlCol="0" anchor="ctr"/>
-          <a:lstStyle/>
-          <a:p>
-            <a:pPr algn="ctr" indent="0" marL="0">
-              <a:buNone/>
-            </a:pPr>
-            <a:r>
-              <a:rPr lang="en-US" sz="850" b="1" dirty="0">
+              <a:rPr lang="en-US" sz="1000" b="1" dirty="0">
                 <a:solidFill>
                   <a:srgbClr val="E8762E"/>
                 </a:solidFill>
@@ -16207,20 +16807,20 @@
               </a:rPr>
               <a:t>3</a:t>
             </a:r>
-            <a:endParaRPr lang="en-US" sz="850" dirty="0"/>
+            <a:endParaRPr lang="en-US" sz="1000" dirty="0"/>
           </a:p>
         </p:txBody>
       </p:sp>
       <p:sp>
         <p:nvSpPr>
-          <p:cNvPr id="74" name="Text 70"/>
+          <p:cNvPr id="79" name="Text 75"/>
           <p:cNvSpPr txBox="1"/>
           <p:nvPr/>
         </p:nvSpPr>
         <p:spPr>
           <a:xfrm>
-            <a:off x="6949440" y="3108960"/>
-            <a:ext cx="2651760" cy="347472"/>
+            <a:off x="6858000" y="3099816"/>
+            <a:ext cx="2377440" cy="402336"/>
           </a:xfrm>
           <a:prstGeom prst="rect">
             <a:avLst/>
@@ -16236,7 +16836,7 @@
               <a:buNone/>
             </a:pPr>
             <a:r>
-              <a:rPr lang="en-US" sz="1050" b="1" dirty="0">
+              <a:rPr lang="en-US" sz="1150" b="1" dirty="0">
                 <a:solidFill>
                   <a:srgbClr val="1F2933"/>
                 </a:solidFill>
@@ -16244,22 +16844,99 @@
                 <a:ea typeface="Microsoft JhengHei" pitchFamily="34" charset="-122"/>
                 <a:cs typeface="Microsoft JhengHei" pitchFamily="34" charset="-120"/>
               </a:rPr>
-              <a:t>部門輪調 3 站完成</a:t>
+              <a:t>Okuma OSP 控制器操作</a:t>
             </a:r>
-            <a:endParaRPr lang="en-US" sz="1050" dirty="0"/>
+            <a:endParaRPr lang="en-US" sz="1150" dirty="0"/>
           </a:p>
         </p:txBody>
       </p:sp>
       <p:sp>
         <p:nvSpPr>
-          <p:cNvPr id="75" name="Text 71"/>
+          <p:cNvPr id="80" name="Shape 76"/>
+          <p:cNvSpPr/>
+          <p:nvPr/>
+        </p:nvSpPr>
+        <p:spPr>
+          <a:xfrm>
+            <a:off x="9436608" y="3182112"/>
+            <a:ext cx="237744" cy="237744"/>
+          </a:xfrm>
+          <a:prstGeom prst="roundRect">
+            <a:avLst>
+              <a:gd name="adj" fmla="val 15385"/>
+            </a:avLst>
+          </a:prstGeom>
+          <a:solidFill>
+            <a:srgbClr val="FFFFFF"/>
+          </a:solidFill>
+          <a:ln w="19050">
+            <a:solidFill>
+              <a:srgbClr val="2F8F63"/>
+            </a:solidFill>
+            <a:prstDash val="solid"/>
+          </a:ln>
+        </p:spPr>
+      </p:sp>
+      <p:sp>
+        <p:nvSpPr>
+          <p:cNvPr id="81" name="Shape 77"/>
+          <p:cNvSpPr/>
+          <p:nvPr/>
+        </p:nvSpPr>
+        <p:spPr>
+          <a:xfrm>
+            <a:off x="10122408" y="3182112"/>
+            <a:ext cx="237744" cy="237744"/>
+          </a:xfrm>
+          <a:prstGeom prst="roundRect">
+            <a:avLst>
+              <a:gd name="adj" fmla="val 15385"/>
+            </a:avLst>
+          </a:prstGeom>
+          <a:solidFill>
+            <a:srgbClr val="FFFFFF"/>
+          </a:solidFill>
+          <a:ln w="19050">
+            <a:solidFill>
+              <a:srgbClr val="C0392B"/>
+            </a:solidFill>
+            <a:prstDash val="solid"/>
+          </a:ln>
+        </p:spPr>
+      </p:sp>
+      <p:sp>
+        <p:nvSpPr>
+          <p:cNvPr id="82" name="Shape 78"/>
+          <p:cNvSpPr/>
+          <p:nvPr/>
+        </p:nvSpPr>
+        <p:spPr>
+          <a:xfrm>
+            <a:off x="10744200" y="3410712"/>
+            <a:ext cx="640080" cy="0"/>
+          </a:xfrm>
+          <a:prstGeom prst="line">
+            <a:avLst/>
+          </a:prstGeom>
+          <a:noFill/>
+          <a:ln w="12700">
+            <a:solidFill>
+              <a:srgbClr val="9AA5B1"/>
+            </a:solidFill>
+            <a:prstDash val="solid"/>
+          </a:ln>
+        </p:spPr>
+      </p:sp>
+      <p:sp>
+        <p:nvSpPr>
+          <p:cNvPr id="83" name="Text 79"/>
           <p:cNvSpPr txBox="1"/>
           <p:nvPr/>
         </p:nvSpPr>
         <p:spPr>
           <a:xfrm>
-            <a:off x="9601200" y="3108960"/>
-            <a:ext cx="914400" cy="347472"/>
+            <a:off x="6446520" y="3529584"/>
+            <a:ext cx="365760" cy="402336"/>
           </a:xfrm>
           <a:prstGeom prst="rect">
             <a:avLst/>
@@ -16275,94 +16952,7 @@
               <a:buNone/>
             </a:pPr>
             <a:r>
-              <a:rPr lang="en-US" sz="950" dirty="0">
-                <a:solidFill>
-                  <a:srgbClr val="6B7785"/>
-                </a:solidFill>
-                <a:latin typeface="Microsoft JhengHei" pitchFamily="34" charset="0"/>
-                <a:ea typeface="Microsoft JhengHei" pitchFamily="34" charset="-122"/>
-                <a:cs typeface="Microsoft JhengHei" pitchFamily="34" charset="-120"/>
-              </a:rPr>
-              <a:t>站別負責人</a:t>
-            </a:r>
-            <a:endParaRPr lang="en-US" sz="950" dirty="0"/>
-          </a:p>
-        </p:txBody>
-      </p:sp>
-      <p:sp>
-        <p:nvSpPr>
-          <p:cNvPr id="76" name="Shape 72"/>
-          <p:cNvSpPr/>
-          <p:nvPr/>
-        </p:nvSpPr>
-        <p:spPr>
-          <a:xfrm>
-            <a:off x="10469880" y="3383280"/>
-            <a:ext cx="914400" cy="0"/>
-          </a:xfrm>
-          <a:prstGeom prst="line">
-            <a:avLst/>
-          </a:prstGeom>
-          <a:noFill/>
-          <a:ln w="12700">
-            <a:solidFill>
-              <a:srgbClr val="E1E6EC"/>
-            </a:solidFill>
-            <a:prstDash val="solid"/>
-          </a:ln>
-        </p:spPr>
-      </p:sp>
-      <p:sp>
-        <p:nvSpPr>
-          <p:cNvPr id="77" name="Shape 73"/>
-          <p:cNvSpPr/>
-          <p:nvPr/>
-        </p:nvSpPr>
-        <p:spPr>
-          <a:xfrm>
-            <a:off x="6446520" y="3557016"/>
-            <a:ext cx="274320" cy="274320"/>
-          </a:xfrm>
-          <a:prstGeom prst="ellipse">
-            <a:avLst/>
-          </a:prstGeom>
-          <a:solidFill>
-            <a:srgbClr val="FFFFFF"/>
-          </a:solidFill>
-          <a:ln w="15875">
-            <a:solidFill>
-              <a:srgbClr val="E8762E"/>
-            </a:solidFill>
-            <a:prstDash val="dash"/>
-          </a:ln>
-        </p:spPr>
-      </p:sp>
-      <p:sp>
-        <p:nvSpPr>
-          <p:cNvPr id="78" name="Text 74"/>
-          <p:cNvSpPr txBox="1"/>
-          <p:nvPr/>
-        </p:nvSpPr>
-        <p:spPr>
-          <a:xfrm>
-            <a:off x="6446520" y="3557016"/>
-            <a:ext cx="274320" cy="274320"/>
-          </a:xfrm>
-          <a:prstGeom prst="rect">
-            <a:avLst/>
-          </a:prstGeom>
-          <a:noFill/>
-          <a:ln/>
-        </p:spPr>
-        <p:txBody>
-          <a:bodyPr wrap="square" lIns="0" tIns="0" rIns="0" bIns="0" rtlCol="0" anchor="ctr"/>
-          <a:lstStyle/>
-          <a:p>
-            <a:pPr algn="ctr" indent="0" marL="0">
-              <a:buNone/>
-            </a:pPr>
-            <a:r>
-              <a:rPr lang="en-US" sz="850" b="1" dirty="0">
+              <a:rPr lang="en-US" sz="1000" b="1" dirty="0">
                 <a:solidFill>
                   <a:srgbClr val="E8762E"/>
                 </a:solidFill>
@@ -16372,20 +16962,20 @@
               </a:rPr>
               <a:t>4</a:t>
             </a:r>
-            <a:endParaRPr lang="en-US" sz="850" dirty="0"/>
+            <a:endParaRPr lang="en-US" sz="1000" dirty="0"/>
           </a:p>
         </p:txBody>
       </p:sp>
       <p:sp>
         <p:nvSpPr>
-          <p:cNvPr id="79" name="Text 75"/>
+          <p:cNvPr id="84" name="Text 80"/>
           <p:cNvSpPr txBox="1"/>
           <p:nvPr/>
         </p:nvSpPr>
         <p:spPr>
           <a:xfrm>
-            <a:off x="6949440" y="3520440"/>
-            <a:ext cx="2651760" cy="347472"/>
+            <a:off x="6858000" y="3529584"/>
+            <a:ext cx="2377440" cy="402336"/>
           </a:xfrm>
           <a:prstGeom prst="rect">
             <a:avLst/>
@@ -16401,7 +16991,7 @@
               <a:buNone/>
             </a:pPr>
             <a:r>
-              <a:rPr lang="en-US" sz="1050" b="1" dirty="0">
+              <a:rPr lang="en-US" sz="1150" b="1" dirty="0">
                 <a:solidFill>
                   <a:srgbClr val="1F2933"/>
                 </a:solidFill>
@@ -16409,22 +16999,124 @@
                 <a:ea typeface="Microsoft JhengHei" pitchFamily="34" charset="-122"/>
                 <a:cs typeface="Microsoft JhengHei" pitchFamily="34" charset="-120"/>
               </a:rPr>
-              <a:t>隨師裝機 1 台</a:t>
+              <a:t>射出機操作與參數</a:t>
             </a:r>
-            <a:endParaRPr lang="en-US" sz="1050" dirty="0"/>
+            <a:endParaRPr lang="en-US" sz="1150" dirty="0"/>
           </a:p>
         </p:txBody>
       </p:sp>
       <p:sp>
         <p:nvSpPr>
-          <p:cNvPr id="80" name="Text 76"/>
+          <p:cNvPr id="85" name="Shape 81"/>
+          <p:cNvSpPr/>
+          <p:nvPr/>
+        </p:nvSpPr>
+        <p:spPr>
+          <a:xfrm>
+            <a:off x="9436608" y="3611880"/>
+            <a:ext cx="237744" cy="237744"/>
+          </a:xfrm>
+          <a:prstGeom prst="roundRect">
+            <a:avLst>
+              <a:gd name="adj" fmla="val 15385"/>
+            </a:avLst>
+          </a:prstGeom>
+          <a:solidFill>
+            <a:srgbClr val="FFFFFF"/>
+          </a:solidFill>
+          <a:ln w="19050">
+            <a:solidFill>
+              <a:srgbClr val="2F8F63"/>
+            </a:solidFill>
+            <a:prstDash val="solid"/>
+          </a:ln>
+        </p:spPr>
+      </p:sp>
+      <p:sp>
+        <p:nvSpPr>
+          <p:cNvPr id="86" name="Shape 82"/>
+          <p:cNvSpPr/>
+          <p:nvPr/>
+        </p:nvSpPr>
+        <p:spPr>
+          <a:xfrm>
+            <a:off x="10122408" y="3611880"/>
+            <a:ext cx="237744" cy="237744"/>
+          </a:xfrm>
+          <a:prstGeom prst="roundRect">
+            <a:avLst>
+              <a:gd name="adj" fmla="val 15385"/>
+            </a:avLst>
+          </a:prstGeom>
+          <a:solidFill>
+            <a:srgbClr val="FFFFFF"/>
+          </a:solidFill>
+          <a:ln w="19050">
+            <a:solidFill>
+              <a:srgbClr val="C0392B"/>
+            </a:solidFill>
+            <a:prstDash val="solid"/>
+          </a:ln>
+        </p:spPr>
+      </p:sp>
+      <p:sp>
+        <p:nvSpPr>
+          <p:cNvPr id="87" name="Shape 83"/>
+          <p:cNvSpPr/>
+          <p:nvPr/>
+        </p:nvSpPr>
+        <p:spPr>
+          <a:xfrm>
+            <a:off x="10744200" y="3840480"/>
+            <a:ext cx="640080" cy="0"/>
+          </a:xfrm>
+          <a:prstGeom prst="line">
+            <a:avLst/>
+          </a:prstGeom>
+          <a:noFill/>
+          <a:ln w="12700">
+            <a:solidFill>
+              <a:srgbClr val="9AA5B1"/>
+            </a:solidFill>
+            <a:prstDash val="solid"/>
+          </a:ln>
+        </p:spPr>
+      </p:sp>
+      <p:sp>
+        <p:nvSpPr>
+          <p:cNvPr id="88" name="Shape 84"/>
+          <p:cNvSpPr/>
+          <p:nvPr/>
+        </p:nvSpPr>
+        <p:spPr>
+          <a:xfrm>
+            <a:off x="6309360" y="3959352"/>
+            <a:ext cx="5166360" cy="402336"/>
+          </a:xfrm>
+          <a:prstGeom prst="rect">
+            <a:avLst/>
+          </a:prstGeom>
+          <a:solidFill>
+            <a:srgbClr val="F4F6F9"/>
+          </a:solidFill>
+          <a:ln w="12700">
+            <a:solidFill>
+              <a:srgbClr val="F4F6F9"/>
+            </a:solidFill>
+            <a:prstDash val="solid"/>
+          </a:ln>
+        </p:spPr>
+      </p:sp>
+      <p:sp>
+        <p:nvSpPr>
+          <p:cNvPr id="89" name="Text 85"/>
           <p:cNvSpPr txBox="1"/>
           <p:nvPr/>
         </p:nvSpPr>
         <p:spPr>
           <a:xfrm>
-            <a:off x="9601200" y="3520440"/>
-            <a:ext cx="914400" cy="347472"/>
+            <a:off x="6446520" y="3959352"/>
+            <a:ext cx="365760" cy="402336"/>
           </a:xfrm>
           <a:prstGeom prst="rect">
             <a:avLst/>
@@ -16440,94 +17132,7 @@
               <a:buNone/>
             </a:pPr>
             <a:r>
-              <a:rPr lang="en-US" sz="950" dirty="0">
-                <a:solidFill>
-                  <a:srgbClr val="6B7785"/>
-                </a:solidFill>
-                <a:latin typeface="Microsoft JhengHei" pitchFamily="34" charset="0"/>
-                <a:ea typeface="Microsoft JhengHei" pitchFamily="34" charset="-122"/>
-                <a:cs typeface="Microsoft JhengHei" pitchFamily="34" charset="-120"/>
-              </a:rPr>
-              <a:t>資深技師</a:t>
-            </a:r>
-            <a:endParaRPr lang="en-US" sz="950" dirty="0"/>
-          </a:p>
-        </p:txBody>
-      </p:sp>
-      <p:sp>
-        <p:nvSpPr>
-          <p:cNvPr id="81" name="Shape 77"/>
-          <p:cNvSpPr/>
-          <p:nvPr/>
-        </p:nvSpPr>
-        <p:spPr>
-          <a:xfrm>
-            <a:off x="10469880" y="3794760"/>
-            <a:ext cx="914400" cy="0"/>
-          </a:xfrm>
-          <a:prstGeom prst="line">
-            <a:avLst/>
-          </a:prstGeom>
-          <a:noFill/>
-          <a:ln w="12700">
-            <a:solidFill>
-              <a:srgbClr val="E1E6EC"/>
-            </a:solidFill>
-            <a:prstDash val="solid"/>
-          </a:ln>
-        </p:spPr>
-      </p:sp>
-      <p:sp>
-        <p:nvSpPr>
-          <p:cNvPr id="82" name="Shape 78"/>
-          <p:cNvSpPr/>
-          <p:nvPr/>
-        </p:nvSpPr>
-        <p:spPr>
-          <a:xfrm>
-            <a:off x="6446520" y="3968496"/>
-            <a:ext cx="274320" cy="274320"/>
-          </a:xfrm>
-          <a:prstGeom prst="ellipse">
-            <a:avLst/>
-          </a:prstGeom>
-          <a:solidFill>
-            <a:srgbClr val="FFFFFF"/>
-          </a:solidFill>
-          <a:ln w="15875">
-            <a:solidFill>
-              <a:srgbClr val="E8762E"/>
-            </a:solidFill>
-            <a:prstDash val="dash"/>
-          </a:ln>
-        </p:spPr>
-      </p:sp>
-      <p:sp>
-        <p:nvSpPr>
-          <p:cNvPr id="83" name="Text 79"/>
-          <p:cNvSpPr txBox="1"/>
-          <p:nvPr/>
-        </p:nvSpPr>
-        <p:spPr>
-          <a:xfrm>
-            <a:off x="6446520" y="3968496"/>
-            <a:ext cx="274320" cy="274320"/>
-          </a:xfrm>
-          <a:prstGeom prst="rect">
-            <a:avLst/>
-          </a:prstGeom>
-          <a:noFill/>
-          <a:ln/>
-        </p:spPr>
-        <p:txBody>
-          <a:bodyPr wrap="square" lIns="0" tIns="0" rIns="0" bIns="0" rtlCol="0" anchor="ctr"/>
-          <a:lstStyle/>
-          <a:p>
-            <a:pPr algn="ctr" indent="0" marL="0">
-              <a:buNone/>
-            </a:pPr>
-            <a:r>
-              <a:rPr lang="en-US" sz="850" b="1" dirty="0">
+              <a:rPr lang="en-US" sz="1000" b="1" dirty="0">
                 <a:solidFill>
                   <a:srgbClr val="E8762E"/>
                 </a:solidFill>
@@ -16537,20 +17142,20 @@
               </a:rPr>
               <a:t>5</a:t>
             </a:r>
-            <a:endParaRPr lang="en-US" sz="850" dirty="0"/>
+            <a:endParaRPr lang="en-US" sz="1000" dirty="0"/>
           </a:p>
         </p:txBody>
       </p:sp>
       <p:sp>
         <p:nvSpPr>
-          <p:cNvPr id="84" name="Text 80"/>
+          <p:cNvPr id="90" name="Text 86"/>
           <p:cNvSpPr txBox="1"/>
           <p:nvPr/>
         </p:nvSpPr>
         <p:spPr>
           <a:xfrm>
-            <a:off x="6949440" y="3931920"/>
-            <a:ext cx="2651760" cy="347472"/>
+            <a:off x="6858000" y="3959352"/>
+            <a:ext cx="2377440" cy="402336"/>
           </a:xfrm>
           <a:prstGeom prst="rect">
             <a:avLst/>
@@ -16566,7 +17171,7 @@
               <a:buNone/>
             </a:pPr>
             <a:r>
-              <a:rPr lang="en-US" sz="1050" b="1" dirty="0">
+              <a:rPr lang="en-US" sz="1150" b="1" dirty="0">
                 <a:solidFill>
                   <a:srgbClr val="1F2933"/>
                 </a:solidFill>
@@ -16574,22 +17179,99 @@
                 <a:ea typeface="Microsoft JhengHei" pitchFamily="34" charset="-122"/>
                 <a:cs typeface="Microsoft JhengHei" pitchFamily="34" charset="-120"/>
               </a:rPr>
-              <a:t>保養實作 3 台</a:t>
+              <a:t>安裝與調校</a:t>
             </a:r>
-            <a:endParaRPr lang="en-US" sz="1050" dirty="0"/>
+            <a:endParaRPr lang="en-US" sz="1150" dirty="0"/>
           </a:p>
         </p:txBody>
       </p:sp>
       <p:sp>
         <p:nvSpPr>
-          <p:cNvPr id="85" name="Text 81"/>
+          <p:cNvPr id="91" name="Shape 87"/>
+          <p:cNvSpPr/>
+          <p:nvPr/>
+        </p:nvSpPr>
+        <p:spPr>
+          <a:xfrm>
+            <a:off x="9436608" y="4041648"/>
+            <a:ext cx="237744" cy="237744"/>
+          </a:xfrm>
+          <a:prstGeom prst="roundRect">
+            <a:avLst>
+              <a:gd name="adj" fmla="val 15385"/>
+            </a:avLst>
+          </a:prstGeom>
+          <a:solidFill>
+            <a:srgbClr val="FFFFFF"/>
+          </a:solidFill>
+          <a:ln w="19050">
+            <a:solidFill>
+              <a:srgbClr val="2F8F63"/>
+            </a:solidFill>
+            <a:prstDash val="solid"/>
+          </a:ln>
+        </p:spPr>
+      </p:sp>
+      <p:sp>
+        <p:nvSpPr>
+          <p:cNvPr id="92" name="Shape 88"/>
+          <p:cNvSpPr/>
+          <p:nvPr/>
+        </p:nvSpPr>
+        <p:spPr>
+          <a:xfrm>
+            <a:off x="10122408" y="4041648"/>
+            <a:ext cx="237744" cy="237744"/>
+          </a:xfrm>
+          <a:prstGeom prst="roundRect">
+            <a:avLst>
+              <a:gd name="adj" fmla="val 15385"/>
+            </a:avLst>
+          </a:prstGeom>
+          <a:solidFill>
+            <a:srgbClr val="FFFFFF"/>
+          </a:solidFill>
+          <a:ln w="19050">
+            <a:solidFill>
+              <a:srgbClr val="C0392B"/>
+            </a:solidFill>
+            <a:prstDash val="solid"/>
+          </a:ln>
+        </p:spPr>
+      </p:sp>
+      <p:sp>
+        <p:nvSpPr>
+          <p:cNvPr id="93" name="Shape 89"/>
+          <p:cNvSpPr/>
+          <p:nvPr/>
+        </p:nvSpPr>
+        <p:spPr>
+          <a:xfrm>
+            <a:off x="10744200" y="4270248"/>
+            <a:ext cx="640080" cy="0"/>
+          </a:xfrm>
+          <a:prstGeom prst="line">
+            <a:avLst/>
+          </a:prstGeom>
+          <a:noFill/>
+          <a:ln w="12700">
+            <a:solidFill>
+              <a:srgbClr val="9AA5B1"/>
+            </a:solidFill>
+            <a:prstDash val="solid"/>
+          </a:ln>
+        </p:spPr>
+      </p:sp>
+      <p:sp>
+        <p:nvSpPr>
+          <p:cNvPr id="94" name="Text 90"/>
           <p:cNvSpPr txBox="1"/>
           <p:nvPr/>
         </p:nvSpPr>
         <p:spPr>
           <a:xfrm>
-            <a:off x="9601200" y="3931920"/>
-            <a:ext cx="914400" cy="347472"/>
+            <a:off x="6446520" y="4389120"/>
+            <a:ext cx="365760" cy="402336"/>
           </a:xfrm>
           <a:prstGeom prst="rect">
             <a:avLst/>
@@ -16605,94 +17287,7 @@
               <a:buNone/>
             </a:pPr>
             <a:r>
-              <a:rPr lang="en-US" sz="950" dirty="0">
-                <a:solidFill>
-                  <a:srgbClr val="6B7785"/>
-                </a:solidFill>
-                <a:latin typeface="Microsoft JhengHei" pitchFamily="34" charset="0"/>
-                <a:ea typeface="Microsoft JhengHei" pitchFamily="34" charset="-122"/>
-                <a:cs typeface="Microsoft JhengHei" pitchFamily="34" charset="-120"/>
-              </a:rPr>
-              <a:t>資深技師</a:t>
-            </a:r>
-            <a:endParaRPr lang="en-US" sz="950" dirty="0"/>
-          </a:p>
-        </p:txBody>
-      </p:sp>
-      <p:sp>
-        <p:nvSpPr>
-          <p:cNvPr id="86" name="Shape 82"/>
-          <p:cNvSpPr/>
-          <p:nvPr/>
-        </p:nvSpPr>
-        <p:spPr>
-          <a:xfrm>
-            <a:off x="10469880" y="4206240"/>
-            <a:ext cx="914400" cy="0"/>
-          </a:xfrm>
-          <a:prstGeom prst="line">
-            <a:avLst/>
-          </a:prstGeom>
-          <a:noFill/>
-          <a:ln w="12700">
-            <a:solidFill>
-              <a:srgbClr val="E1E6EC"/>
-            </a:solidFill>
-            <a:prstDash val="solid"/>
-          </a:ln>
-        </p:spPr>
-      </p:sp>
-      <p:sp>
-        <p:nvSpPr>
-          <p:cNvPr id="87" name="Shape 83"/>
-          <p:cNvSpPr/>
-          <p:nvPr/>
-        </p:nvSpPr>
-        <p:spPr>
-          <a:xfrm>
-            <a:off x="6446520" y="4379976"/>
-            <a:ext cx="274320" cy="274320"/>
-          </a:xfrm>
-          <a:prstGeom prst="ellipse">
-            <a:avLst/>
-          </a:prstGeom>
-          <a:solidFill>
-            <a:srgbClr val="FFFFFF"/>
-          </a:solidFill>
-          <a:ln w="15875">
-            <a:solidFill>
-              <a:srgbClr val="E8762E"/>
-            </a:solidFill>
-            <a:prstDash val="dash"/>
-          </a:ln>
-        </p:spPr>
-      </p:sp>
-      <p:sp>
-        <p:nvSpPr>
-          <p:cNvPr id="88" name="Text 84"/>
-          <p:cNvSpPr txBox="1"/>
-          <p:nvPr/>
-        </p:nvSpPr>
-        <p:spPr>
-          <a:xfrm>
-            <a:off x="6446520" y="4379976"/>
-            <a:ext cx="274320" cy="274320"/>
-          </a:xfrm>
-          <a:prstGeom prst="rect">
-            <a:avLst/>
-          </a:prstGeom>
-          <a:noFill/>
-          <a:ln/>
-        </p:spPr>
-        <p:txBody>
-          <a:bodyPr wrap="square" lIns="0" tIns="0" rIns="0" bIns="0" rtlCol="0" anchor="ctr"/>
-          <a:lstStyle/>
-          <a:p>
-            <a:pPr algn="ctr" indent="0" marL="0">
-              <a:buNone/>
-            </a:pPr>
-            <a:r>
-              <a:rPr lang="en-US" sz="850" b="1" dirty="0">
+              <a:rPr lang="en-US" sz="1000" b="1" dirty="0">
                 <a:solidFill>
                   <a:srgbClr val="E8762E"/>
                 </a:solidFill>
@@ -16702,20 +17297,20 @@
               </a:rPr>
               <a:t>6</a:t>
             </a:r>
-            <a:endParaRPr lang="en-US" sz="850" dirty="0"/>
+            <a:endParaRPr lang="en-US" sz="1000" dirty="0"/>
           </a:p>
         </p:txBody>
       </p:sp>
       <p:sp>
         <p:nvSpPr>
-          <p:cNvPr id="89" name="Text 85"/>
+          <p:cNvPr id="95" name="Text 91"/>
           <p:cNvSpPr txBox="1"/>
           <p:nvPr/>
         </p:nvSpPr>
         <p:spPr>
           <a:xfrm>
-            <a:off x="6949440" y="4343400"/>
-            <a:ext cx="2651760" cy="347472"/>
+            <a:off x="6858000" y="4389120"/>
+            <a:ext cx="2377440" cy="402336"/>
           </a:xfrm>
           <a:prstGeom prst="rect">
             <a:avLst/>
@@ -16731,7 +17326,7 @@
               <a:buNone/>
             </a:pPr>
             <a:r>
-              <a:rPr lang="en-US" sz="1050" b="1" dirty="0">
+              <a:rPr lang="en-US" sz="1150" b="1" dirty="0">
                 <a:solidFill>
                   <a:srgbClr val="1F2933"/>
                 </a:solidFill>
@@ -16739,22 +17334,124 @@
                 <a:ea typeface="Microsoft JhengHei" pitchFamily="34" charset="-122"/>
                 <a:cs typeface="Microsoft JhengHei" pitchFamily="34" charset="-120"/>
               </a:rPr>
-              <a:t>原廠技術課程</a:t>
+              <a:t>定期保養</a:t>
             </a:r>
-            <a:endParaRPr lang="en-US" sz="1050" dirty="0"/>
+            <a:endParaRPr lang="en-US" sz="1150" dirty="0"/>
           </a:p>
         </p:txBody>
       </p:sp>
       <p:sp>
         <p:nvSpPr>
-          <p:cNvPr id="90" name="Text 86"/>
+          <p:cNvPr id="96" name="Shape 92"/>
+          <p:cNvSpPr/>
+          <p:nvPr/>
+        </p:nvSpPr>
+        <p:spPr>
+          <a:xfrm>
+            <a:off x="9436608" y="4471416"/>
+            <a:ext cx="237744" cy="237744"/>
+          </a:xfrm>
+          <a:prstGeom prst="roundRect">
+            <a:avLst>
+              <a:gd name="adj" fmla="val 15385"/>
+            </a:avLst>
+          </a:prstGeom>
+          <a:solidFill>
+            <a:srgbClr val="FFFFFF"/>
+          </a:solidFill>
+          <a:ln w="19050">
+            <a:solidFill>
+              <a:srgbClr val="2F8F63"/>
+            </a:solidFill>
+            <a:prstDash val="solid"/>
+          </a:ln>
+        </p:spPr>
+      </p:sp>
+      <p:sp>
+        <p:nvSpPr>
+          <p:cNvPr id="97" name="Shape 93"/>
+          <p:cNvSpPr/>
+          <p:nvPr/>
+        </p:nvSpPr>
+        <p:spPr>
+          <a:xfrm>
+            <a:off x="10122408" y="4471416"/>
+            <a:ext cx="237744" cy="237744"/>
+          </a:xfrm>
+          <a:prstGeom prst="roundRect">
+            <a:avLst>
+              <a:gd name="adj" fmla="val 15385"/>
+            </a:avLst>
+          </a:prstGeom>
+          <a:solidFill>
+            <a:srgbClr val="FFFFFF"/>
+          </a:solidFill>
+          <a:ln w="19050">
+            <a:solidFill>
+              <a:srgbClr val="C0392B"/>
+            </a:solidFill>
+            <a:prstDash val="solid"/>
+          </a:ln>
+        </p:spPr>
+      </p:sp>
+      <p:sp>
+        <p:nvSpPr>
+          <p:cNvPr id="98" name="Shape 94"/>
+          <p:cNvSpPr/>
+          <p:nvPr/>
+        </p:nvSpPr>
+        <p:spPr>
+          <a:xfrm>
+            <a:off x="10744200" y="4700016"/>
+            <a:ext cx="640080" cy="0"/>
+          </a:xfrm>
+          <a:prstGeom prst="line">
+            <a:avLst/>
+          </a:prstGeom>
+          <a:noFill/>
+          <a:ln w="12700">
+            <a:solidFill>
+              <a:srgbClr val="9AA5B1"/>
+            </a:solidFill>
+            <a:prstDash val="solid"/>
+          </a:ln>
+        </p:spPr>
+      </p:sp>
+      <p:sp>
+        <p:nvSpPr>
+          <p:cNvPr id="99" name="Shape 95"/>
+          <p:cNvSpPr/>
+          <p:nvPr/>
+        </p:nvSpPr>
+        <p:spPr>
+          <a:xfrm>
+            <a:off x="6309360" y="4818888"/>
+            <a:ext cx="5166360" cy="402336"/>
+          </a:xfrm>
+          <a:prstGeom prst="rect">
+            <a:avLst/>
+          </a:prstGeom>
+          <a:solidFill>
+            <a:srgbClr val="F4F6F9"/>
+          </a:solidFill>
+          <a:ln w="12700">
+            <a:solidFill>
+              <a:srgbClr val="F4F6F9"/>
+            </a:solidFill>
+            <a:prstDash val="solid"/>
+          </a:ln>
+        </p:spPr>
+      </p:sp>
+      <p:sp>
+        <p:nvSpPr>
+          <p:cNvPr id="100" name="Text 96"/>
           <p:cNvSpPr txBox="1"/>
           <p:nvPr/>
         </p:nvSpPr>
         <p:spPr>
           <a:xfrm>
-            <a:off x="9601200" y="4343400"/>
-            <a:ext cx="914400" cy="347472"/>
+            <a:off x="6446520" y="4818888"/>
+            <a:ext cx="365760" cy="402336"/>
           </a:xfrm>
           <a:prstGeom prst="rect">
             <a:avLst/>
@@ -16770,94 +17467,7 @@
               <a:buNone/>
             </a:pPr>
             <a:r>
-              <a:rPr lang="en-US" sz="950" dirty="0">
-                <a:solidFill>
-                  <a:srgbClr val="6B7785"/>
-                </a:solidFill>
-                <a:latin typeface="Microsoft JhengHei" pitchFamily="34" charset="0"/>
-                <a:ea typeface="Microsoft JhengHei" pitchFamily="34" charset="-122"/>
-                <a:cs typeface="Microsoft JhengHei" pitchFamily="34" charset="-120"/>
-              </a:rPr>
-              <a:t>原廠講師</a:t>
-            </a:r>
-            <a:endParaRPr lang="en-US" sz="950" dirty="0"/>
-          </a:p>
-        </p:txBody>
-      </p:sp>
-      <p:sp>
-        <p:nvSpPr>
-          <p:cNvPr id="91" name="Shape 87"/>
-          <p:cNvSpPr/>
-          <p:nvPr/>
-        </p:nvSpPr>
-        <p:spPr>
-          <a:xfrm>
-            <a:off x="10469880" y="4617720"/>
-            <a:ext cx="914400" cy="0"/>
-          </a:xfrm>
-          <a:prstGeom prst="line">
-            <a:avLst/>
-          </a:prstGeom>
-          <a:noFill/>
-          <a:ln w="12700">
-            <a:solidFill>
-              <a:srgbClr val="E1E6EC"/>
-            </a:solidFill>
-            <a:prstDash val="solid"/>
-          </a:ln>
-        </p:spPr>
-      </p:sp>
-      <p:sp>
-        <p:nvSpPr>
-          <p:cNvPr id="92" name="Shape 88"/>
-          <p:cNvSpPr/>
-          <p:nvPr/>
-        </p:nvSpPr>
-        <p:spPr>
-          <a:xfrm>
-            <a:off x="6446520" y="4791456"/>
-            <a:ext cx="274320" cy="274320"/>
-          </a:xfrm>
-          <a:prstGeom prst="ellipse">
-            <a:avLst/>
-          </a:prstGeom>
-          <a:solidFill>
-            <a:srgbClr val="FFFFFF"/>
-          </a:solidFill>
-          <a:ln w="15875">
-            <a:solidFill>
-              <a:srgbClr val="E8762E"/>
-            </a:solidFill>
-            <a:prstDash val="dash"/>
-          </a:ln>
-        </p:spPr>
-      </p:sp>
-      <p:sp>
-        <p:nvSpPr>
-          <p:cNvPr id="93" name="Text 89"/>
-          <p:cNvSpPr txBox="1"/>
-          <p:nvPr/>
-        </p:nvSpPr>
-        <p:spPr>
-          <a:xfrm>
-            <a:off x="6446520" y="4791456"/>
-            <a:ext cx="274320" cy="274320"/>
-          </a:xfrm>
-          <a:prstGeom prst="rect">
-            <a:avLst/>
-          </a:prstGeom>
-          <a:noFill/>
-          <a:ln/>
-        </p:spPr>
-        <p:txBody>
-          <a:bodyPr wrap="square" lIns="0" tIns="0" rIns="0" bIns="0" rtlCol="0" anchor="ctr"/>
-          <a:lstStyle/>
-          <a:p>
-            <a:pPr algn="ctr" indent="0" marL="0">
-              <a:buNone/>
-            </a:pPr>
-            <a:r>
-              <a:rPr lang="en-US" sz="850" b="1" dirty="0">
+              <a:rPr lang="en-US" sz="1000" b="1" dirty="0">
                 <a:solidFill>
                   <a:srgbClr val="E8762E"/>
                 </a:solidFill>
@@ -16867,20 +17477,20 @@
               </a:rPr>
               <a:t>7</a:t>
             </a:r>
-            <a:endParaRPr lang="en-US" sz="850" dirty="0"/>
+            <a:endParaRPr lang="en-US" sz="1000" dirty="0"/>
           </a:p>
         </p:txBody>
       </p:sp>
       <p:sp>
         <p:nvSpPr>
-          <p:cNvPr id="94" name="Text 90"/>
+          <p:cNvPr id="101" name="Text 97"/>
           <p:cNvSpPr txBox="1"/>
           <p:nvPr/>
         </p:nvSpPr>
         <p:spPr>
           <a:xfrm>
-            <a:off x="6949440" y="4754880"/>
-            <a:ext cx="2651760" cy="347472"/>
+            <a:off x="6858000" y="4818888"/>
+            <a:ext cx="2377440" cy="402336"/>
           </a:xfrm>
           <a:prstGeom prst="rect">
             <a:avLst/>
@@ -16896,7 +17506,7 @@
               <a:buNone/>
             </a:pPr>
             <a:r>
-              <a:rPr lang="en-US" sz="1050" b="1" dirty="0">
+              <a:rPr lang="en-US" sz="1150" b="1" dirty="0">
                 <a:solidFill>
                   <a:srgbClr val="1F2933"/>
                 </a:solidFill>
@@ -16904,22 +17514,99 @@
                 <a:ea typeface="Microsoft JhengHei" pitchFamily="34" charset="-122"/>
                 <a:cs typeface="Microsoft JhengHei" pitchFamily="34" charset="-120"/>
               </a:rPr>
-              <a:t>獨立服務案件 3 件</a:t>
+              <a:t>故障排除</a:t>
             </a:r>
-            <a:endParaRPr lang="en-US" sz="1050" dirty="0"/>
+            <a:endParaRPr lang="en-US" sz="1150" dirty="0"/>
           </a:p>
         </p:txBody>
       </p:sp>
       <p:sp>
         <p:nvSpPr>
-          <p:cNvPr id="95" name="Text 91"/>
+          <p:cNvPr id="102" name="Shape 98"/>
+          <p:cNvSpPr/>
+          <p:nvPr/>
+        </p:nvSpPr>
+        <p:spPr>
+          <a:xfrm>
+            <a:off x="9436608" y="4901184"/>
+            <a:ext cx="237744" cy="237744"/>
+          </a:xfrm>
+          <a:prstGeom prst="roundRect">
+            <a:avLst>
+              <a:gd name="adj" fmla="val 15385"/>
+            </a:avLst>
+          </a:prstGeom>
+          <a:solidFill>
+            <a:srgbClr val="FFFFFF"/>
+          </a:solidFill>
+          <a:ln w="19050">
+            <a:solidFill>
+              <a:srgbClr val="2F8F63"/>
+            </a:solidFill>
+            <a:prstDash val="solid"/>
+          </a:ln>
+        </p:spPr>
+      </p:sp>
+      <p:sp>
+        <p:nvSpPr>
+          <p:cNvPr id="103" name="Shape 99"/>
+          <p:cNvSpPr/>
+          <p:nvPr/>
+        </p:nvSpPr>
+        <p:spPr>
+          <a:xfrm>
+            <a:off x="10122408" y="4901184"/>
+            <a:ext cx="237744" cy="237744"/>
+          </a:xfrm>
+          <a:prstGeom prst="roundRect">
+            <a:avLst>
+              <a:gd name="adj" fmla="val 15385"/>
+            </a:avLst>
+          </a:prstGeom>
+          <a:solidFill>
+            <a:srgbClr val="FFFFFF"/>
+          </a:solidFill>
+          <a:ln w="19050">
+            <a:solidFill>
+              <a:srgbClr val="C0392B"/>
+            </a:solidFill>
+            <a:prstDash val="solid"/>
+          </a:ln>
+        </p:spPr>
+      </p:sp>
+      <p:sp>
+        <p:nvSpPr>
+          <p:cNvPr id="104" name="Shape 100"/>
+          <p:cNvSpPr/>
+          <p:nvPr/>
+        </p:nvSpPr>
+        <p:spPr>
+          <a:xfrm>
+            <a:off x="10744200" y="5129784"/>
+            <a:ext cx="640080" cy="0"/>
+          </a:xfrm>
+          <a:prstGeom prst="line">
+            <a:avLst/>
+          </a:prstGeom>
+          <a:noFill/>
+          <a:ln w="12700">
+            <a:solidFill>
+              <a:srgbClr val="9AA5B1"/>
+            </a:solidFill>
+            <a:prstDash val="solid"/>
+          </a:ln>
+        </p:spPr>
+      </p:sp>
+      <p:sp>
+        <p:nvSpPr>
+          <p:cNvPr id="105" name="Text 101"/>
           <p:cNvSpPr txBox="1"/>
           <p:nvPr/>
         </p:nvSpPr>
         <p:spPr>
           <a:xfrm>
-            <a:off x="9601200" y="4754880"/>
-            <a:ext cx="914400" cy="347472"/>
+            <a:off x="6446520" y="5248656"/>
+            <a:ext cx="365760" cy="402336"/>
           </a:xfrm>
           <a:prstGeom prst="rect">
             <a:avLst/>
@@ -16935,94 +17622,7 @@
               <a:buNone/>
             </a:pPr>
             <a:r>
-              <a:rPr lang="en-US" sz="950" dirty="0">
-                <a:solidFill>
-                  <a:srgbClr val="6B7785"/>
-                </a:solidFill>
-                <a:latin typeface="Microsoft JhengHei" pitchFamily="34" charset="0"/>
-                <a:ea typeface="Microsoft JhengHei" pitchFamily="34" charset="-122"/>
-                <a:cs typeface="Microsoft JhengHei" pitchFamily="34" charset="-120"/>
-              </a:rPr>
-              <a:t>技術主管</a:t>
-            </a:r>
-            <a:endParaRPr lang="en-US" sz="950" dirty="0"/>
-          </a:p>
-        </p:txBody>
-      </p:sp>
-      <p:sp>
-        <p:nvSpPr>
-          <p:cNvPr id="96" name="Shape 92"/>
-          <p:cNvSpPr/>
-          <p:nvPr/>
-        </p:nvSpPr>
-        <p:spPr>
-          <a:xfrm>
-            <a:off x="10469880" y="5029200"/>
-            <a:ext cx="914400" cy="0"/>
-          </a:xfrm>
-          <a:prstGeom prst="line">
-            <a:avLst/>
-          </a:prstGeom>
-          <a:noFill/>
-          <a:ln w="12700">
-            <a:solidFill>
-              <a:srgbClr val="E1E6EC"/>
-            </a:solidFill>
-            <a:prstDash val="solid"/>
-          </a:ln>
-        </p:spPr>
-      </p:sp>
-      <p:sp>
-        <p:nvSpPr>
-          <p:cNvPr id="97" name="Shape 93"/>
-          <p:cNvSpPr/>
-          <p:nvPr/>
-        </p:nvSpPr>
-        <p:spPr>
-          <a:xfrm>
-            <a:off x="6446520" y="5202936"/>
-            <a:ext cx="274320" cy="274320"/>
-          </a:xfrm>
-          <a:prstGeom prst="ellipse">
-            <a:avLst/>
-          </a:prstGeom>
-          <a:solidFill>
-            <a:srgbClr val="FFFFFF"/>
-          </a:solidFill>
-          <a:ln w="15875">
-            <a:solidFill>
-              <a:srgbClr val="E8762E"/>
-            </a:solidFill>
-            <a:prstDash val="dash"/>
-          </a:ln>
-        </p:spPr>
-      </p:sp>
-      <p:sp>
-        <p:nvSpPr>
-          <p:cNvPr id="98" name="Text 94"/>
-          <p:cNvSpPr txBox="1"/>
-          <p:nvPr/>
-        </p:nvSpPr>
-        <p:spPr>
-          <a:xfrm>
-            <a:off x="6446520" y="5202936"/>
-            <a:ext cx="274320" cy="274320"/>
-          </a:xfrm>
-          <a:prstGeom prst="rect">
-            <a:avLst/>
-          </a:prstGeom>
-          <a:noFill/>
-          <a:ln/>
-        </p:spPr>
-        <p:txBody>
-          <a:bodyPr wrap="square" lIns="0" tIns="0" rIns="0" bIns="0" rtlCol="0" anchor="ctr"/>
-          <a:lstStyle/>
-          <a:p>
-            <a:pPr algn="ctr" indent="0" marL="0">
-              <a:buNone/>
-            </a:pPr>
-            <a:r>
-              <a:rPr lang="en-US" sz="850" b="1" dirty="0">
+              <a:rPr lang="en-US" sz="1000" b="1" dirty="0">
                 <a:solidFill>
                   <a:srgbClr val="E8762E"/>
                 </a:solidFill>
@@ -17032,20 +17632,20 @@
               </a:rPr>
               <a:t>8</a:t>
             </a:r>
-            <a:endParaRPr lang="en-US" sz="850" dirty="0"/>
+            <a:endParaRPr lang="en-US" sz="1000" dirty="0"/>
           </a:p>
         </p:txBody>
       </p:sp>
       <p:sp>
         <p:nvSpPr>
-          <p:cNvPr id="99" name="Text 95"/>
+          <p:cNvPr id="106" name="Text 102"/>
           <p:cNvSpPr txBox="1"/>
           <p:nvPr/>
         </p:nvSpPr>
         <p:spPr>
           <a:xfrm>
-            <a:off x="6949440" y="5166360"/>
-            <a:ext cx="2651760" cy="347472"/>
+            <a:off x="6858000" y="5248656"/>
+            <a:ext cx="2377440" cy="402336"/>
           </a:xfrm>
           <a:prstGeom prst="rect">
             <a:avLst/>
@@ -17061,7 +17661,7 @@
               <a:buNone/>
             </a:pPr>
             <a:r>
-              <a:rPr lang="en-US" sz="1050" b="1" dirty="0">
+              <a:rPr lang="en-US" sz="1150" b="1" dirty="0">
                 <a:solidFill>
                   <a:srgbClr val="1F2933"/>
                 </a:solidFill>
@@ -17069,61 +17669,76 @@
                 <a:ea typeface="Microsoft JhengHei" pitchFamily="34" charset="-122"/>
                 <a:cs typeface="Microsoft JhengHei" pitchFamily="34" charset="-120"/>
               </a:rPr>
-              <a:t>Day 90 結訓成果分享</a:t>
+              <a:t>零件與備品流程</a:t>
             </a:r>
-            <a:endParaRPr lang="en-US" sz="1050" dirty="0"/>
+            <a:endParaRPr lang="en-US" sz="1150" dirty="0"/>
           </a:p>
         </p:txBody>
       </p:sp>
       <p:sp>
         <p:nvSpPr>
-          <p:cNvPr id="100" name="Text 96"/>
-          <p:cNvSpPr txBox="1"/>
-          <p:nvPr/>
-        </p:nvSpPr>
-        <p:spPr>
-          <a:xfrm>
-            <a:off x="9601200" y="5166360"/>
-            <a:ext cx="914400" cy="347472"/>
-          </a:xfrm>
-          <a:prstGeom prst="rect">
-            <a:avLst/>
-          </a:prstGeom>
-          <a:noFill/>
-          <a:ln/>
-        </p:spPr>
-        <p:txBody>
-          <a:bodyPr wrap="square" lIns="0" tIns="0" rIns="0" bIns="0" rtlCol="0" anchor="ctr"/>
-          <a:lstStyle/>
-          <a:p>
-            <a:pPr indent="0" marL="0">
-              <a:buNone/>
-            </a:pPr>
-            <a:r>
-              <a:rPr lang="en-US" sz="950" dirty="0">
-                <a:solidFill>
-                  <a:srgbClr val="6B7785"/>
-                </a:solidFill>
-                <a:latin typeface="Microsoft JhengHei" pitchFamily="34" charset="0"/>
-                <a:ea typeface="Microsoft JhengHei" pitchFamily="34" charset="-122"/>
-                <a:cs typeface="Microsoft JhengHei" pitchFamily="34" charset="-120"/>
-              </a:rPr>
-              <a:t>主管</a:t>
-            </a:r>
-            <a:endParaRPr lang="en-US" sz="950" dirty="0"/>
-          </a:p>
-        </p:txBody>
-      </p:sp>
-      <p:sp>
-        <p:nvSpPr>
-          <p:cNvPr id="101" name="Shape 97"/>
+          <p:cNvPr id="107" name="Shape 103"/>
           <p:cNvSpPr/>
           <p:nvPr/>
         </p:nvSpPr>
         <p:spPr>
           <a:xfrm>
-            <a:off x="10469880" y="5440680"/>
-            <a:ext cx="914400" cy="0"/>
+            <a:off x="9436608" y="5330952"/>
+            <a:ext cx="237744" cy="237744"/>
+          </a:xfrm>
+          <a:prstGeom prst="roundRect">
+            <a:avLst>
+              <a:gd name="adj" fmla="val 15385"/>
+            </a:avLst>
+          </a:prstGeom>
+          <a:solidFill>
+            <a:srgbClr val="FFFFFF"/>
+          </a:solidFill>
+          <a:ln w="19050">
+            <a:solidFill>
+              <a:srgbClr val="2F8F63"/>
+            </a:solidFill>
+            <a:prstDash val="solid"/>
+          </a:ln>
+        </p:spPr>
+      </p:sp>
+      <p:sp>
+        <p:nvSpPr>
+          <p:cNvPr id="108" name="Shape 104"/>
+          <p:cNvSpPr/>
+          <p:nvPr/>
+        </p:nvSpPr>
+        <p:spPr>
+          <a:xfrm>
+            <a:off x="10122408" y="5330952"/>
+            <a:ext cx="237744" cy="237744"/>
+          </a:xfrm>
+          <a:prstGeom prst="roundRect">
+            <a:avLst>
+              <a:gd name="adj" fmla="val 15385"/>
+            </a:avLst>
+          </a:prstGeom>
+          <a:solidFill>
+            <a:srgbClr val="FFFFFF"/>
+          </a:solidFill>
+          <a:ln w="19050">
+            <a:solidFill>
+              <a:srgbClr val="C0392B"/>
+            </a:solidFill>
+            <a:prstDash val="solid"/>
+          </a:ln>
+        </p:spPr>
+      </p:sp>
+      <p:sp>
+        <p:nvSpPr>
+          <p:cNvPr id="109" name="Shape 105"/>
+          <p:cNvSpPr/>
+          <p:nvPr/>
+        </p:nvSpPr>
+        <p:spPr>
+          <a:xfrm>
+            <a:off x="10744200" y="5559552"/>
+            <a:ext cx="640080" cy="0"/>
           </a:xfrm>
           <a:prstGeom prst="line">
             <a:avLst/>
@@ -17131,7 +17746,7 @@
           <a:noFill/>
           <a:ln w="12700">
             <a:solidFill>
-              <a:srgbClr val="E1E6EC"/>
+              <a:srgbClr val="9AA5B1"/>
             </a:solidFill>
             <a:prstDash val="solid"/>
           </a:ln>
@@ -17139,18 +17754,18 @@
       </p:sp>
       <p:sp>
         <p:nvSpPr>
-          <p:cNvPr id="102" name="Shape 98"/>
+          <p:cNvPr id="110" name="Shape 106"/>
           <p:cNvSpPr/>
           <p:nvPr/>
         </p:nvSpPr>
         <p:spPr>
           <a:xfrm>
-            <a:off x="640080" y="5943600"/>
-            <a:ext cx="10927080" cy="384048"/>
+            <a:off x="640080" y="5989320"/>
+            <a:ext cx="10927080" cy="365760"/>
           </a:xfrm>
           <a:prstGeom prst="roundRect">
             <a:avLst>
-              <a:gd name="adj" fmla="val 33333"/>
+              <a:gd name="adj" fmla="val 35000"/>
             </a:avLst>
           </a:prstGeom>
           <a:solidFill>
@@ -17166,14 +17781,14 @@
       </p:sp>
       <p:sp>
         <p:nvSpPr>
-          <p:cNvPr id="103" name="Text 99"/>
+          <p:cNvPr id="111" name="Text 107"/>
           <p:cNvSpPr txBox="1"/>
           <p:nvPr/>
         </p:nvSpPr>
         <p:spPr>
           <a:xfrm>
-            <a:off x="868680" y="5943600"/>
-            <a:ext cx="10515600" cy="384048"/>
+            <a:off x="868680" y="5989320"/>
+            <a:ext cx="10515600" cy="365760"/>
           </a:xfrm>
           <a:prstGeom prst="rect">
             <a:avLst/>
@@ -17211,7 +17826,7 @@
                 <a:ea typeface="Microsoft JhengHei" pitchFamily="34" charset="-122"/>
                 <a:cs typeface="Microsoft JhengHei" pitchFamily="34" charset="-120"/>
               </a:rPr>
-              <a:t>完成一項由簽章人簽名；每週五導師檢視護照。集滿 8 章 ＝ 結訓通過，作為轉正依據。</a:t>
+              <a:t>各大項由帶隊資深同仁或主管確認 OK；不OK 者於下一週安排補強，全部 OK 即結訓。</a:t>
             </a:r>
             <a:endParaRPr lang="en-US" sz="1050" dirty="0"/>
           </a:p>
@@ -17219,7 +17834,7 @@
       </p:sp>
       <p:sp>
         <p:nvSpPr>
-          <p:cNvPr id="104" name="Text 100"/>
+          <p:cNvPr id="112" name="Text 108"/>
           <p:cNvSpPr txBox="1"/>
           <p:nvPr/>
         </p:nvSpPr>
@@ -17258,7 +17873,7 @@
       </p:sp>
       <p:sp>
         <p:nvSpPr>
-          <p:cNvPr id="105" name="Text 101"/>
+          <p:cNvPr id="113" name="Text 109"/>
           <p:cNvSpPr txBox="1"/>
           <p:nvPr/>
         </p:nvSpPr>
